--- a/presentation.pptx
+++ b/presentation.pptx
@@ -15,6 +15,8 @@
     <p:sldId id="263" r:id="rId14"/>
     <p:sldId id="264" r:id="rId15"/>
     <p:sldId id="265" r:id="rId16"/>
+    <p:sldId id="266" r:id="rId17"/>
+    <p:sldId id="267" r:id="rId18"/>
   </p:sldIdLst>
   <p:sldSz cx="12188952" cy="6858000" type="screen4x3"/>
   <p:notesSz cx="6858000" cy="9144000"/>
@@ -3788,15 +3790,39 @@
           </a:p>
         </p:txBody>
       </p:sp>
-      <p:sp>
-        <p:nvSpPr>
-          <p:cNvPr id="21" name="Rectangle 20"/>
+      <p:pic>
+        <p:nvPicPr>
+          <p:cNvPr id="21" name="Picture 20" descr="AULogo.png"/>
+          <p:cNvPicPr>
+            <a:picLocks noChangeAspect="1"/>
+          </p:cNvPicPr>
+          <p:nvPr/>
+        </p:nvPicPr>
+        <p:blipFill>
+          <a:blip r:embed="rId2"/>
+          <a:stretch>
+            <a:fillRect/>
+          </a:stretch>
+        </p:blipFill>
+        <p:spPr>
+          <a:xfrm>
+            <a:off x="5728716" y="4626864"/>
+            <a:ext cx="944326" cy="731520"/>
+          </a:xfrm>
+          <a:prstGeom prst="rect">
+            <a:avLst/>
+          </a:prstGeom>
+        </p:spPr>
+      </p:pic>
+      <p:sp>
+        <p:nvSpPr>
+          <p:cNvPr id="22" name="Rectangle 21"/>
           <p:cNvSpPr/>
           <p:nvPr/>
         </p:nvSpPr>
         <p:spPr>
           <a:xfrm>
-            <a:off x="3657600" y="4626864"/>
+            <a:off x="3657600" y="5495544"/>
             <a:ext cx="4873752" cy="12700"/>
           </a:xfrm>
           <a:prstGeom prst="rect">
@@ -3835,13 +3861,13 @@
       </p:sp>
       <p:sp>
         <p:nvSpPr>
-          <p:cNvPr id="22" name="TextBox 21"/>
-          <p:cNvSpPr txBox="1"/>
-          <p:nvPr/>
-        </p:nvSpPr>
-        <p:spPr>
-          <a:xfrm>
-            <a:off x="1645920" y="4736592"/>
+          <p:cNvPr id="23" name="TextBox 22"/>
+          <p:cNvSpPr txBox="1"/>
+          <p:nvPr/>
+        </p:nvSpPr>
+        <p:spPr>
+          <a:xfrm>
+            <a:off x="1645920" y="5605272"/>
             <a:ext cx="8897112" cy="256032"/>
           </a:xfrm>
           <a:prstGeom prst="rect">
@@ -3870,13 +3896,13 @@
       </p:sp>
       <p:sp>
         <p:nvSpPr>
-          <p:cNvPr id="23" name="TextBox 22"/>
-          <p:cNvSpPr txBox="1"/>
-          <p:nvPr/>
-        </p:nvSpPr>
-        <p:spPr>
-          <a:xfrm>
-            <a:off x="1645920" y="4983480"/>
+          <p:cNvPr id="24" name="TextBox 23"/>
+          <p:cNvSpPr txBox="1"/>
+          <p:nvPr/>
+        </p:nvSpPr>
+        <p:spPr>
+          <a:xfrm>
+            <a:off x="1645920" y="5852160"/>
             <a:ext cx="8897112" cy="246888"/>
           </a:xfrm>
           <a:prstGeom prst="rect">
@@ -3905,13 +3931,13 @@
       </p:sp>
       <p:sp>
         <p:nvSpPr>
-          <p:cNvPr id="24" name="TextBox 23"/>
-          <p:cNvSpPr txBox="1"/>
-          <p:nvPr/>
-        </p:nvSpPr>
-        <p:spPr>
-          <a:xfrm>
-            <a:off x="1645920" y="5221224"/>
+          <p:cNvPr id="25" name="TextBox 24"/>
+          <p:cNvSpPr txBox="1"/>
+          <p:nvPr/>
+        </p:nvSpPr>
+        <p:spPr>
+          <a:xfrm>
+            <a:off x="1645920" y="6089904"/>
             <a:ext cx="8897112" cy="228600"/>
           </a:xfrm>
           <a:prstGeom prst="rect">
@@ -3940,13 +3966,13 @@
       </p:sp>
       <p:sp>
         <p:nvSpPr>
-          <p:cNvPr id="25" name="TextBox 24"/>
-          <p:cNvSpPr txBox="1"/>
-          <p:nvPr/>
-        </p:nvSpPr>
-        <p:spPr>
-          <a:xfrm>
-            <a:off x="1645920" y="5440680"/>
+          <p:cNvPr id="26" name="TextBox 25"/>
+          <p:cNvSpPr txBox="1"/>
+          <p:nvPr/>
+        </p:nvSpPr>
+        <p:spPr>
+          <a:xfrm>
+            <a:off x="1645920" y="6309360"/>
             <a:ext cx="8897112" cy="228600"/>
           </a:xfrm>
           <a:prstGeom prst="rect">
@@ -4072,7 +4098,990 @@
                 </a:solidFill>
                 <a:latin typeface="Inter"/>
               </a:rPr>
-              <a:t>Next Steps &amp; Roadmap</a:t>
+              <a:t>Phase 5 — Computer Vision Integration (YOLO)</a:t>
+            </a:r>
+          </a:p>
+        </p:txBody>
+      </p:sp>
+      <p:sp>
+        <p:nvSpPr>
+          <p:cNvPr id="4" name="TextBox 3"/>
+          <p:cNvSpPr txBox="1"/>
+          <p:nvPr/>
+        </p:nvSpPr>
+        <p:spPr>
+          <a:xfrm>
+            <a:off x="182880" y="6537960"/>
+            <a:ext cx="3657600" cy="274320"/>
+          </a:xfrm>
+          <a:prstGeom prst="rect">
+            <a:avLst/>
+          </a:prstGeom>
+          <a:noFill/>
+        </p:spPr>
+        <p:txBody>
+          <a:bodyPr wrap="square">
+            <a:spAutoFit/>
+          </a:bodyPr>
+          <a:lstStyle/>
+          <a:p>
+            <a:pPr algn="l"/>
+            <a:r>
+              <a:rPr sz="900" b="0" i="0">
+                <a:solidFill>
+                  <a:srgbClr val="8A7D6E"/>
+                </a:solidFill>
+                <a:latin typeface="Inter"/>
+              </a:rPr>
+              <a:t>Phase 5 — Computer Vision Integration (YOLO)   |   10/13</a:t>
+            </a:r>
+          </a:p>
+        </p:txBody>
+      </p:sp>
+      <p:sp>
+        <p:nvSpPr>
+          <p:cNvPr id="5" name="TextBox 4"/>
+          <p:cNvSpPr txBox="1"/>
+          <p:nvPr/>
+        </p:nvSpPr>
+        <p:spPr>
+          <a:xfrm>
+            <a:off x="5029200" y="822960"/>
+            <a:ext cx="2743200" cy="256032"/>
+          </a:xfrm>
+          <a:prstGeom prst="rect">
+            <a:avLst/>
+          </a:prstGeom>
+          <a:noFill/>
+        </p:spPr>
+        <p:txBody>
+          <a:bodyPr wrap="square">
+            <a:spAutoFit/>
+          </a:bodyPr>
+          <a:lstStyle/>
+          <a:p>
+            <a:pPr algn="ctr"/>
+            <a:r>
+              <a:rPr sz="900" b="1" i="0">
+                <a:solidFill>
+                  <a:srgbClr val="D2691E"/>
+                </a:solidFill>
+                <a:latin typeface="Inter"/>
+              </a:rPr>
+              <a:t>🔄 Under Development</a:t>
+            </a:r>
+          </a:p>
+        </p:txBody>
+      </p:sp>
+      <p:sp>
+        <p:nvSpPr>
+          <p:cNvPr id="6" name="Rectangle 5"/>
+          <p:cNvSpPr/>
+          <p:nvPr/>
+        </p:nvSpPr>
+        <p:spPr>
+          <a:xfrm>
+            <a:off x="365760" y="1234440"/>
+            <a:ext cx="2743200" cy="2011680"/>
+          </a:xfrm>
+          <a:prstGeom prst="rect">
+            <a:avLst/>
+          </a:prstGeom>
+          <a:solidFill>
+            <a:srgbClr val="FFFFFF"/>
+          </a:solidFill>
+          <a:ln w="9525">
+            <a:solidFill>
+              <a:srgbClr val="CCC4B8"/>
+            </a:solidFill>
+          </a:ln>
+        </p:spPr>
+        <p:style>
+          <a:lnRef idx="1">
+            <a:schemeClr val="accent1"/>
+          </a:lnRef>
+          <a:fillRef idx="3">
+            <a:schemeClr val="accent1"/>
+          </a:fillRef>
+          <a:effectRef idx="2">
+            <a:schemeClr val="accent1"/>
+          </a:effectRef>
+          <a:fontRef idx="minor">
+            <a:schemeClr val="lt1"/>
+          </a:fontRef>
+        </p:style>
+        <p:txBody>
+          <a:bodyPr rtlCol="0" anchor="ctr"/>
+          <a:lstStyle/>
+          <a:p>
+            <a:pPr algn="ctr"/>
+          </a:p>
+        </p:txBody>
+      </p:sp>
+      <p:sp>
+        <p:nvSpPr>
+          <p:cNvPr id="7" name="TextBox 6"/>
+          <p:cNvSpPr txBox="1"/>
+          <p:nvPr/>
+        </p:nvSpPr>
+        <p:spPr>
+          <a:xfrm>
+            <a:off x="502920" y="1325880"/>
+            <a:ext cx="2468880" cy="256032"/>
+          </a:xfrm>
+          <a:prstGeom prst="rect">
+            <a:avLst/>
+          </a:prstGeom>
+          <a:noFill/>
+        </p:spPr>
+        <p:txBody>
+          <a:bodyPr wrap="square">
+            <a:spAutoFit/>
+          </a:bodyPr>
+          <a:lstStyle/>
+          <a:p>
+            <a:pPr algn="l"/>
+            <a:r>
+              <a:rPr sz="800" b="1" i="0">
+                <a:solidFill>
+                  <a:srgbClr val="1A6B8A"/>
+                </a:solidFill>
+                <a:latin typeface="Inter"/>
+              </a:rPr>
+              <a:t>OVERVIEW</a:t>
+            </a:r>
+          </a:p>
+        </p:txBody>
+      </p:sp>
+      <p:sp>
+        <p:nvSpPr>
+          <p:cNvPr id="8" name="TextBox 7"/>
+          <p:cNvSpPr txBox="1"/>
+          <p:nvPr/>
+        </p:nvSpPr>
+        <p:spPr>
+          <a:xfrm>
+            <a:off x="502920" y="1572768"/>
+            <a:ext cx="2468880" cy="1508760"/>
+          </a:xfrm>
+          <a:prstGeom prst="rect">
+            <a:avLst/>
+          </a:prstGeom>
+          <a:noFill/>
+        </p:spPr>
+        <p:txBody>
+          <a:bodyPr wrap="square">
+            <a:spAutoFit/>
+          </a:bodyPr>
+          <a:lstStyle/>
+          <a:p>
+            <a:pPr algn="l"/>
+            <a:r>
+              <a:rPr sz="1050" b="0" i="0">
+                <a:solidFill>
+                  <a:srgbClr val="4A4035"/>
+                </a:solidFill>
+                <a:latin typeface="Inter"/>
+              </a:rPr>
+              <a:t>A YOLOv8-based pipeline was developed to detect a human hand and convert that detection into servo movement commands. This is the core intelligence of gesture control mode.</a:t>
+            </a:r>
+          </a:p>
+        </p:txBody>
+      </p:sp>
+      <p:sp>
+        <p:nvSpPr>
+          <p:cNvPr id="9" name="TextBox 8"/>
+          <p:cNvSpPr txBox="1"/>
+          <p:nvPr/>
+        </p:nvSpPr>
+        <p:spPr>
+          <a:xfrm>
+            <a:off x="502920" y="3337560"/>
+            <a:ext cx="2468880" cy="228600"/>
+          </a:xfrm>
+          <a:prstGeom prst="rect">
+            <a:avLst/>
+          </a:prstGeom>
+          <a:noFill/>
+        </p:spPr>
+        <p:txBody>
+          <a:bodyPr wrap="square">
+            <a:spAutoFit/>
+          </a:bodyPr>
+          <a:lstStyle/>
+          <a:p>
+            <a:pPr algn="l"/>
+            <a:r>
+              <a:rPr sz="800" b="1" i="0">
+                <a:solidFill>
+                  <a:srgbClr val="27AE60"/>
+                </a:solidFill>
+                <a:latin typeface="Inter"/>
+              </a:rPr>
+              <a:t>OUTCOME</a:t>
+            </a:r>
+          </a:p>
+        </p:txBody>
+      </p:sp>
+      <p:sp>
+        <p:nvSpPr>
+          <p:cNvPr id="10" name="TextBox 9"/>
+          <p:cNvSpPr txBox="1"/>
+          <p:nvPr/>
+        </p:nvSpPr>
+        <p:spPr>
+          <a:xfrm>
+            <a:off x="502920" y="3566160"/>
+            <a:ext cx="2468880" cy="1097280"/>
+          </a:xfrm>
+          <a:prstGeom prst="rect">
+            <a:avLst/>
+          </a:prstGeom>
+          <a:noFill/>
+        </p:spPr>
+        <p:txBody>
+          <a:bodyPr wrap="square">
+            <a:spAutoFit/>
+          </a:bodyPr>
+          <a:lstStyle/>
+          <a:p>
+            <a:pPr algn="l"/>
+            <a:r>
+              <a:rPr sz="1000" b="0" i="0">
+                <a:solidFill>
+                  <a:srgbClr val="2D6A4F"/>
+                </a:solidFill>
+                <a:latin typeface="Inter"/>
+              </a:rPr>
+              <a:t>Hand detection functional in isolation. Full pipeline integration into ROS2 + servo chain is the current blocker under active debugging.</a:t>
+            </a:r>
+          </a:p>
+        </p:txBody>
+      </p:sp>
+      <p:sp>
+        <p:nvSpPr>
+          <p:cNvPr id="11" name="Rectangle 10"/>
+          <p:cNvSpPr/>
+          <p:nvPr/>
+        </p:nvSpPr>
+        <p:spPr>
+          <a:xfrm>
+            <a:off x="3291840" y="1234440"/>
+            <a:ext cx="5029200" cy="1188720"/>
+          </a:xfrm>
+          <a:prstGeom prst="rect">
+            <a:avLst/>
+          </a:prstGeom>
+          <a:solidFill>
+            <a:srgbClr val="FFFFFF"/>
+          </a:solidFill>
+          <a:ln w="9525">
+            <a:solidFill>
+              <a:srgbClr val="CCC4B8"/>
+            </a:solidFill>
+          </a:ln>
+        </p:spPr>
+        <p:style>
+          <a:lnRef idx="1">
+            <a:schemeClr val="accent1"/>
+          </a:lnRef>
+          <a:fillRef idx="3">
+            <a:schemeClr val="accent1"/>
+          </a:fillRef>
+          <a:effectRef idx="2">
+            <a:schemeClr val="accent1"/>
+          </a:effectRef>
+          <a:fontRef idx="minor">
+            <a:schemeClr val="lt1"/>
+          </a:fontRef>
+        </p:style>
+        <p:txBody>
+          <a:bodyPr rtlCol="0" anchor="ctr"/>
+          <a:lstStyle/>
+          <a:p>
+            <a:pPr algn="ctr"/>
+          </a:p>
+        </p:txBody>
+      </p:sp>
+      <p:sp>
+        <p:nvSpPr>
+          <p:cNvPr id="12" name="TextBox 11"/>
+          <p:cNvSpPr txBox="1"/>
+          <p:nvPr/>
+        </p:nvSpPr>
+        <p:spPr>
+          <a:xfrm>
+            <a:off x="3429000" y="1344168"/>
+            <a:ext cx="457200" cy="1078992"/>
+          </a:xfrm>
+          <a:prstGeom prst="rect">
+            <a:avLst/>
+          </a:prstGeom>
+          <a:noFill/>
+        </p:spPr>
+        <p:txBody>
+          <a:bodyPr wrap="square">
+            <a:spAutoFit/>
+          </a:bodyPr>
+          <a:lstStyle/>
+          <a:p>
+            <a:pPr algn="l"/>
+            <a:r>
+              <a:rPr sz="900" b="1" i="0">
+                <a:solidFill>
+                  <a:srgbClr val="1A6B8A"/>
+                </a:solidFill>
+                <a:latin typeface="Inter"/>
+              </a:rPr>
+              <a:t>01</a:t>
+            </a:r>
+          </a:p>
+        </p:txBody>
+      </p:sp>
+      <p:sp>
+        <p:nvSpPr>
+          <p:cNvPr id="13" name="TextBox 12"/>
+          <p:cNvSpPr txBox="1"/>
+          <p:nvPr/>
+        </p:nvSpPr>
+        <p:spPr>
+          <a:xfrm>
+            <a:off x="3931920" y="1325880"/>
+            <a:ext cx="4251960" cy="256032"/>
+          </a:xfrm>
+          <a:prstGeom prst="rect">
+            <a:avLst/>
+          </a:prstGeom>
+          <a:noFill/>
+        </p:spPr>
+        <p:txBody>
+          <a:bodyPr wrap="square">
+            <a:spAutoFit/>
+          </a:bodyPr>
+          <a:lstStyle/>
+          <a:p>
+            <a:pPr algn="l"/>
+            <a:r>
+              <a:rPr sz="1200" b="1" i="0">
+                <a:solidFill>
+                  <a:srgbClr val="1C1A16"/>
+                </a:solidFill>
+                <a:latin typeface="Inter"/>
+              </a:rPr>
+              <a:t>YOLOv8 Model Setup</a:t>
+            </a:r>
+          </a:p>
+        </p:txBody>
+      </p:sp>
+      <p:sp>
+        <p:nvSpPr>
+          <p:cNvPr id="14" name="TextBox 13"/>
+          <p:cNvSpPr txBox="1"/>
+          <p:nvPr/>
+        </p:nvSpPr>
+        <p:spPr>
+          <a:xfrm>
+            <a:off x="3931920" y="1581912"/>
+            <a:ext cx="4251960" cy="804672"/>
+          </a:xfrm>
+          <a:prstGeom prst="rect">
+            <a:avLst/>
+          </a:prstGeom>
+          <a:noFill/>
+        </p:spPr>
+        <p:txBody>
+          <a:bodyPr wrap="square">
+            <a:spAutoFit/>
+          </a:bodyPr>
+          <a:lstStyle/>
+          <a:p>
+            <a:pPr algn="l"/>
+            <a:r>
+              <a:rPr sz="1000" b="0" i="0">
+                <a:solidFill>
+                  <a:srgbClr val="8A7D6E"/>
+                </a:solidFill>
+                <a:latin typeface="Inter"/>
+              </a:rPr>
+              <a:t>YOLOv8 (Ultralytics) configured on NVIDIA RTX 3060 with CUDA 12.1 for accelerated inference. Targeting real-time &gt;30 FPS performance.</a:t>
+            </a:r>
+          </a:p>
+        </p:txBody>
+      </p:sp>
+      <p:sp>
+        <p:nvSpPr>
+          <p:cNvPr id="15" name="Rectangle 14"/>
+          <p:cNvSpPr/>
+          <p:nvPr/>
+        </p:nvSpPr>
+        <p:spPr>
+          <a:xfrm>
+            <a:off x="3291840" y="2514600"/>
+            <a:ext cx="5029200" cy="1188720"/>
+          </a:xfrm>
+          <a:prstGeom prst="rect">
+            <a:avLst/>
+          </a:prstGeom>
+          <a:solidFill>
+            <a:srgbClr val="FFFFFF"/>
+          </a:solidFill>
+          <a:ln w="9525">
+            <a:solidFill>
+              <a:srgbClr val="CCC4B8"/>
+            </a:solidFill>
+          </a:ln>
+        </p:spPr>
+        <p:style>
+          <a:lnRef idx="1">
+            <a:schemeClr val="accent1"/>
+          </a:lnRef>
+          <a:fillRef idx="3">
+            <a:schemeClr val="accent1"/>
+          </a:fillRef>
+          <a:effectRef idx="2">
+            <a:schemeClr val="accent1"/>
+          </a:effectRef>
+          <a:fontRef idx="minor">
+            <a:schemeClr val="lt1"/>
+          </a:fontRef>
+        </p:style>
+        <p:txBody>
+          <a:bodyPr rtlCol="0" anchor="ctr"/>
+          <a:lstStyle/>
+          <a:p>
+            <a:pPr algn="ctr"/>
+          </a:p>
+        </p:txBody>
+      </p:sp>
+      <p:sp>
+        <p:nvSpPr>
+          <p:cNvPr id="16" name="TextBox 15"/>
+          <p:cNvSpPr txBox="1"/>
+          <p:nvPr/>
+        </p:nvSpPr>
+        <p:spPr>
+          <a:xfrm>
+            <a:off x="3429000" y="2624328"/>
+            <a:ext cx="457200" cy="1078992"/>
+          </a:xfrm>
+          <a:prstGeom prst="rect">
+            <a:avLst/>
+          </a:prstGeom>
+          <a:noFill/>
+        </p:spPr>
+        <p:txBody>
+          <a:bodyPr wrap="square">
+            <a:spAutoFit/>
+          </a:bodyPr>
+          <a:lstStyle/>
+          <a:p>
+            <a:pPr algn="l"/>
+            <a:r>
+              <a:rPr sz="900" b="1" i="0">
+                <a:solidFill>
+                  <a:srgbClr val="1A6B8A"/>
+                </a:solidFill>
+                <a:latin typeface="Inter"/>
+              </a:rPr>
+              <a:t>02</a:t>
+            </a:r>
+          </a:p>
+        </p:txBody>
+      </p:sp>
+      <p:sp>
+        <p:nvSpPr>
+          <p:cNvPr id="17" name="TextBox 16"/>
+          <p:cNvSpPr txBox="1"/>
+          <p:nvPr/>
+        </p:nvSpPr>
+        <p:spPr>
+          <a:xfrm>
+            <a:off x="3931920" y="2606040"/>
+            <a:ext cx="4251960" cy="256032"/>
+          </a:xfrm>
+          <a:prstGeom prst="rect">
+            <a:avLst/>
+          </a:prstGeom>
+          <a:noFill/>
+        </p:spPr>
+        <p:txBody>
+          <a:bodyPr wrap="square">
+            <a:spAutoFit/>
+          </a:bodyPr>
+          <a:lstStyle/>
+          <a:p>
+            <a:pPr algn="l"/>
+            <a:r>
+              <a:rPr sz="1200" b="1" i="0">
+                <a:solidFill>
+                  <a:srgbClr val="1C1A16"/>
+                </a:solidFill>
+                <a:latin typeface="Inter"/>
+              </a:rPr>
+              <a:t>Detection → Command Pipeline</a:t>
+            </a:r>
+          </a:p>
+        </p:txBody>
+      </p:sp>
+      <p:sp>
+        <p:nvSpPr>
+          <p:cNvPr id="18" name="TextBox 17"/>
+          <p:cNvSpPr txBox="1"/>
+          <p:nvPr/>
+        </p:nvSpPr>
+        <p:spPr>
+          <a:xfrm>
+            <a:off x="3931920" y="2862072"/>
+            <a:ext cx="4251960" cy="804672"/>
+          </a:xfrm>
+          <a:prstGeom prst="rect">
+            <a:avLst/>
+          </a:prstGeom>
+          <a:noFill/>
+        </p:spPr>
+        <p:txBody>
+          <a:bodyPr wrap="square">
+            <a:spAutoFit/>
+          </a:bodyPr>
+          <a:lstStyle/>
+          <a:p>
+            <a:pPr algn="l"/>
+            <a:r>
+              <a:rPr sz="1000" b="0" i="0">
+                <a:solidFill>
+                  <a:srgbClr val="8A7D6E"/>
+                </a:solidFill>
+                <a:latin typeface="Inter"/>
+              </a:rPr>
+              <a:t>Intended: camera → YOLOv8 bounding box → centroid → IK → 6 joint angles → ESP8266 servo commands. Partially implemented.</a:t>
+            </a:r>
+          </a:p>
+        </p:txBody>
+      </p:sp>
+      <p:sp>
+        <p:nvSpPr>
+          <p:cNvPr id="19" name="Rectangle 18"/>
+          <p:cNvSpPr/>
+          <p:nvPr/>
+        </p:nvSpPr>
+        <p:spPr>
+          <a:xfrm>
+            <a:off x="3291840" y="3794760"/>
+            <a:ext cx="5029200" cy="1188720"/>
+          </a:xfrm>
+          <a:prstGeom prst="rect">
+            <a:avLst/>
+          </a:prstGeom>
+          <a:solidFill>
+            <a:srgbClr val="FFFFFF"/>
+          </a:solidFill>
+          <a:ln w="9525">
+            <a:solidFill>
+              <a:srgbClr val="CCC4B8"/>
+            </a:solidFill>
+          </a:ln>
+        </p:spPr>
+        <p:style>
+          <a:lnRef idx="1">
+            <a:schemeClr val="accent1"/>
+          </a:lnRef>
+          <a:fillRef idx="3">
+            <a:schemeClr val="accent1"/>
+          </a:fillRef>
+          <a:effectRef idx="2">
+            <a:schemeClr val="accent1"/>
+          </a:effectRef>
+          <a:fontRef idx="minor">
+            <a:schemeClr val="lt1"/>
+          </a:fontRef>
+        </p:style>
+        <p:txBody>
+          <a:bodyPr rtlCol="0" anchor="ctr"/>
+          <a:lstStyle/>
+          <a:p>
+            <a:pPr algn="ctr"/>
+          </a:p>
+        </p:txBody>
+      </p:sp>
+      <p:sp>
+        <p:nvSpPr>
+          <p:cNvPr id="20" name="TextBox 19"/>
+          <p:cNvSpPr txBox="1"/>
+          <p:nvPr/>
+        </p:nvSpPr>
+        <p:spPr>
+          <a:xfrm>
+            <a:off x="3429000" y="3904488"/>
+            <a:ext cx="457200" cy="1078992"/>
+          </a:xfrm>
+          <a:prstGeom prst="rect">
+            <a:avLst/>
+          </a:prstGeom>
+          <a:noFill/>
+        </p:spPr>
+        <p:txBody>
+          <a:bodyPr wrap="square">
+            <a:spAutoFit/>
+          </a:bodyPr>
+          <a:lstStyle/>
+          <a:p>
+            <a:pPr algn="l"/>
+            <a:r>
+              <a:rPr sz="900" b="1" i="0">
+                <a:solidFill>
+                  <a:srgbClr val="1A6B8A"/>
+                </a:solidFill>
+                <a:latin typeface="Inter"/>
+              </a:rPr>
+              <a:t>03</a:t>
+            </a:r>
+          </a:p>
+        </p:txBody>
+      </p:sp>
+      <p:sp>
+        <p:nvSpPr>
+          <p:cNvPr id="21" name="TextBox 20"/>
+          <p:cNvSpPr txBox="1"/>
+          <p:nvPr/>
+        </p:nvSpPr>
+        <p:spPr>
+          <a:xfrm>
+            <a:off x="3931920" y="3886200"/>
+            <a:ext cx="4251960" cy="256032"/>
+          </a:xfrm>
+          <a:prstGeom prst="rect">
+            <a:avLst/>
+          </a:prstGeom>
+          <a:noFill/>
+        </p:spPr>
+        <p:txBody>
+          <a:bodyPr wrap="square">
+            <a:spAutoFit/>
+          </a:bodyPr>
+          <a:lstStyle/>
+          <a:p>
+            <a:pPr algn="l"/>
+            <a:r>
+              <a:rPr sz="1200" b="1" i="0">
+                <a:solidFill>
+                  <a:srgbClr val="1C1A16"/>
+                </a:solidFill>
+                <a:latin typeface="Inter"/>
+              </a:rPr>
+              <a:t>Integration Issues Found</a:t>
+            </a:r>
+          </a:p>
+        </p:txBody>
+      </p:sp>
+      <p:sp>
+        <p:nvSpPr>
+          <p:cNvPr id="22" name="TextBox 21"/>
+          <p:cNvSpPr txBox="1"/>
+          <p:nvPr/>
+        </p:nvSpPr>
+        <p:spPr>
+          <a:xfrm>
+            <a:off x="3931920" y="4142232"/>
+            <a:ext cx="4251960" cy="804672"/>
+          </a:xfrm>
+          <a:prstGeom prst="rect">
+            <a:avLst/>
+          </a:prstGeom>
+          <a:noFill/>
+        </p:spPr>
+        <p:txBody>
+          <a:bodyPr wrap="square">
+            <a:spAutoFit/>
+          </a:bodyPr>
+          <a:lstStyle/>
+          <a:p>
+            <a:pPr algn="l"/>
+            <a:r>
+              <a:rPr sz="1000" b="0" i="0">
+                <a:solidFill>
+                  <a:srgbClr val="8A7D6E"/>
+                </a:solidFill>
+                <a:latin typeface="Inter"/>
+              </a:rPr>
+              <a:t>Latency spikes in detection-to-command loop, coordinate mapping calibration errors, and serialization issues passing YOLO output into ROS2 topics.</a:t>
+            </a:r>
+          </a:p>
+        </p:txBody>
+      </p:sp>
+      <p:sp>
+        <p:nvSpPr>
+          <p:cNvPr id="23" name="Rectangle 22"/>
+          <p:cNvSpPr/>
+          <p:nvPr/>
+        </p:nvSpPr>
+        <p:spPr>
+          <a:xfrm>
+            <a:off x="3291840" y="5074920"/>
+            <a:ext cx="5029200" cy="1188720"/>
+          </a:xfrm>
+          <a:prstGeom prst="rect">
+            <a:avLst/>
+          </a:prstGeom>
+          <a:solidFill>
+            <a:srgbClr val="FFFFFF"/>
+          </a:solidFill>
+          <a:ln w="9525">
+            <a:solidFill>
+              <a:srgbClr val="CCC4B8"/>
+            </a:solidFill>
+          </a:ln>
+        </p:spPr>
+        <p:style>
+          <a:lnRef idx="1">
+            <a:schemeClr val="accent1"/>
+          </a:lnRef>
+          <a:fillRef idx="3">
+            <a:schemeClr val="accent1"/>
+          </a:fillRef>
+          <a:effectRef idx="2">
+            <a:schemeClr val="accent1"/>
+          </a:effectRef>
+          <a:fontRef idx="minor">
+            <a:schemeClr val="lt1"/>
+          </a:fontRef>
+        </p:style>
+        <p:txBody>
+          <a:bodyPr rtlCol="0" anchor="ctr"/>
+          <a:lstStyle/>
+          <a:p>
+            <a:pPr algn="ctr"/>
+          </a:p>
+        </p:txBody>
+      </p:sp>
+      <p:sp>
+        <p:nvSpPr>
+          <p:cNvPr id="24" name="TextBox 23"/>
+          <p:cNvSpPr txBox="1"/>
+          <p:nvPr/>
+        </p:nvSpPr>
+        <p:spPr>
+          <a:xfrm>
+            <a:off x="3429000" y="5184648"/>
+            <a:ext cx="457200" cy="1078992"/>
+          </a:xfrm>
+          <a:prstGeom prst="rect">
+            <a:avLst/>
+          </a:prstGeom>
+          <a:noFill/>
+        </p:spPr>
+        <p:txBody>
+          <a:bodyPr wrap="square">
+            <a:spAutoFit/>
+          </a:bodyPr>
+          <a:lstStyle/>
+          <a:p>
+            <a:pPr algn="l"/>
+            <a:r>
+              <a:rPr sz="900" b="1" i="0">
+                <a:solidFill>
+                  <a:srgbClr val="1A6B8A"/>
+                </a:solidFill>
+                <a:latin typeface="Inter"/>
+              </a:rPr>
+              <a:t>04</a:t>
+            </a:r>
+          </a:p>
+        </p:txBody>
+      </p:sp>
+      <p:sp>
+        <p:nvSpPr>
+          <p:cNvPr id="25" name="TextBox 24"/>
+          <p:cNvSpPr txBox="1"/>
+          <p:nvPr/>
+        </p:nvSpPr>
+        <p:spPr>
+          <a:xfrm>
+            <a:off x="3931920" y="5166360"/>
+            <a:ext cx="4251960" cy="256032"/>
+          </a:xfrm>
+          <a:prstGeom prst="rect">
+            <a:avLst/>
+          </a:prstGeom>
+          <a:noFill/>
+        </p:spPr>
+        <p:txBody>
+          <a:bodyPr wrap="square">
+            <a:spAutoFit/>
+          </a:bodyPr>
+          <a:lstStyle/>
+          <a:p>
+            <a:pPr algn="l"/>
+            <a:r>
+              <a:rPr sz="1200" b="1" i="0">
+                <a:solidFill>
+                  <a:srgbClr val="1C1A16"/>
+                </a:solidFill>
+                <a:latin typeface="Inter"/>
+              </a:rPr>
+              <a:t>Current Status</a:t>
+            </a:r>
+          </a:p>
+        </p:txBody>
+      </p:sp>
+      <p:sp>
+        <p:nvSpPr>
+          <p:cNvPr id="26" name="TextBox 25"/>
+          <p:cNvSpPr txBox="1"/>
+          <p:nvPr/>
+        </p:nvSpPr>
+        <p:spPr>
+          <a:xfrm>
+            <a:off x="3931920" y="5422392"/>
+            <a:ext cx="4251960" cy="804672"/>
+          </a:xfrm>
+          <a:prstGeom prst="rect">
+            <a:avLst/>
+          </a:prstGeom>
+          <a:noFill/>
+        </p:spPr>
+        <p:txBody>
+          <a:bodyPr wrap="square">
+            <a:spAutoFit/>
+          </a:bodyPr>
+          <a:lstStyle/>
+          <a:p>
+            <a:pPr algn="l"/>
+            <a:r>
+              <a:rPr sz="1000" b="0" i="0">
+                <a:solidFill>
+                  <a:srgbClr val="8A7D6E"/>
+                </a:solidFill>
+                <a:latin typeface="Inter"/>
+              </a:rPr>
+              <a:t>YOLO detects hands reliably in isolation. End-to-end integration from detection to servo command under active debugging and expected to resolve in next cycle.</a:t>
+            </a:r>
+          </a:p>
+        </p:txBody>
+      </p:sp>
+      <p:pic>
+        <p:nvPicPr>
+          <p:cNvPr id="27" name="Picture 26" descr="YOLO HAND DETECTION.jpg"/>
+          <p:cNvPicPr>
+            <a:picLocks noChangeAspect="1"/>
+          </p:cNvPicPr>
+          <p:nvPr/>
+        </p:nvPicPr>
+        <p:blipFill>
+          <a:blip r:embed="rId2"/>
+          <a:stretch>
+            <a:fillRect/>
+          </a:stretch>
+        </p:blipFill>
+        <p:spPr>
+          <a:xfrm>
+            <a:off x="8503920" y="1234440"/>
+            <a:ext cx="3474720" cy="2075658"/>
+          </a:xfrm>
+          <a:prstGeom prst="rect">
+            <a:avLst/>
+          </a:prstGeom>
+        </p:spPr>
+      </p:pic>
+    </p:spTree>
+  </p:cSld>
+  <p:clrMapOvr>
+    <a:masterClrMapping/>
+  </p:clrMapOvr>
+</p:sld>
+</file>
+
+<file path=ppt/slides/slide11.xml><?xml version="1.0" encoding="utf-8"?>
+<p:sld xmlns:a="http://schemas.openxmlformats.org/drawingml/2006/main" xmlns:p="http://schemas.openxmlformats.org/presentationml/2006/main" xmlns:r="http://schemas.openxmlformats.org/officeDocument/2006/relationships">
+  <p:cSld>
+    <p:bg>
+      <p:bgPr>
+        <a:solidFill>
+          <a:srgbClr val="F0EBE3"/>
+        </a:solidFill>
+        <a:effectLst/>
+      </p:bgPr>
+    </p:bg>
+    <p:spTree>
+      <p:nvGrpSpPr>
+        <p:cNvPr id="1" name=""/>
+        <p:cNvGrpSpPr/>
+        <p:nvPr/>
+      </p:nvGrpSpPr>
+      <p:grpSpPr/>
+      <p:sp>
+        <p:nvSpPr>
+          <p:cNvPr id="2" name="Rectangle 1"/>
+          <p:cNvSpPr/>
+          <p:nvPr/>
+        </p:nvSpPr>
+        <p:spPr>
+          <a:xfrm>
+            <a:off x="0" y="0"/>
+            <a:ext cx="12188952" cy="76200"/>
+          </a:xfrm>
+          <a:prstGeom prst="rect">
+            <a:avLst/>
+          </a:prstGeom>
+          <a:solidFill>
+            <a:srgbClr val="1A6B8A"/>
+          </a:solidFill>
+          <a:ln>
+            <a:noFill/>
+          </a:ln>
+        </p:spPr>
+        <p:style>
+          <a:lnRef idx="1">
+            <a:schemeClr val="accent1"/>
+          </a:lnRef>
+          <a:fillRef idx="3">
+            <a:schemeClr val="accent1"/>
+          </a:fillRef>
+          <a:effectRef idx="2">
+            <a:schemeClr val="accent1"/>
+          </a:effectRef>
+          <a:fontRef idx="minor">
+            <a:schemeClr val="lt1"/>
+          </a:fontRef>
+        </p:style>
+        <p:txBody>
+          <a:bodyPr rtlCol="0" anchor="ctr"/>
+          <a:lstStyle/>
+          <a:p>
+            <a:pPr algn="ctr"/>
+          </a:p>
+        </p:txBody>
+      </p:sp>
+      <p:sp>
+        <p:nvSpPr>
+          <p:cNvPr id="3" name="TextBox 2"/>
+          <p:cNvSpPr txBox="1"/>
+          <p:nvPr/>
+        </p:nvSpPr>
+        <p:spPr>
+          <a:xfrm>
+            <a:off x="548640" y="320040"/>
+            <a:ext cx="11064240" cy="594360"/>
+          </a:xfrm>
+          <a:prstGeom prst="rect">
+            <a:avLst/>
+          </a:prstGeom>
+          <a:noFill/>
+        </p:spPr>
+        <p:txBody>
+          <a:bodyPr wrap="square">
+            <a:spAutoFit/>
+          </a:bodyPr>
+          <a:lstStyle/>
+          <a:p>
+            <a:pPr algn="ctr"/>
+            <a:r>
+              <a:rPr sz="2600" b="1" i="0">
+                <a:solidFill>
+                  <a:srgbClr val="1C1A16"/>
+                </a:solidFill>
+                <a:latin typeface="Inter"/>
+              </a:rPr>
+              <a:t>Challenges &amp; Current Status</a:t>
             </a:r>
           </a:p>
         </p:txBody>
@@ -4107,7 +5116,7 @@
                 </a:solidFill>
                 <a:latin typeface="Inter"/>
               </a:rPr>
-              <a:t>Structured development path — testable artefact at every phase</a:t>
+              <a:t>Dual-track development: each track validated independently, converging at integration</a:t>
             </a:r>
           </a:p>
         </p:txBody>
@@ -4142,7 +5151,1111 @@
                 </a:solidFill>
                 <a:latin typeface="Inter"/>
               </a:rPr>
-              <a:t>Next Steps &amp; Roadmap   |   10/10</a:t>
+              <a:t>Challenges &amp; Current Status   |   11/12</a:t>
+            </a:r>
+          </a:p>
+        </p:txBody>
+      </p:sp>
+      <p:sp>
+        <p:nvSpPr>
+          <p:cNvPr id="6" name="Rectangle 5"/>
+          <p:cNvSpPr/>
+          <p:nvPr/>
+        </p:nvSpPr>
+        <p:spPr>
+          <a:xfrm>
+            <a:off x="365760" y="1280160"/>
+            <a:ext cx="5715000" cy="4251960"/>
+          </a:xfrm>
+          <a:prstGeom prst="rect">
+            <a:avLst/>
+          </a:prstGeom>
+          <a:solidFill>
+            <a:srgbClr val="FFFFFF"/>
+          </a:solidFill>
+          <a:ln w="9525">
+            <a:solidFill>
+              <a:srgbClr val="CCC4B8"/>
+            </a:solidFill>
+          </a:ln>
+        </p:spPr>
+        <p:style>
+          <a:lnRef idx="1">
+            <a:schemeClr val="accent1"/>
+          </a:lnRef>
+          <a:fillRef idx="3">
+            <a:schemeClr val="accent1"/>
+          </a:fillRef>
+          <a:effectRef idx="2">
+            <a:schemeClr val="accent1"/>
+          </a:effectRef>
+          <a:fontRef idx="minor">
+            <a:schemeClr val="lt1"/>
+          </a:fontRef>
+        </p:style>
+        <p:txBody>
+          <a:bodyPr rtlCol="0" anchor="ctr"/>
+          <a:lstStyle/>
+          <a:p>
+            <a:pPr algn="ctr"/>
+          </a:p>
+        </p:txBody>
+      </p:sp>
+      <p:sp>
+        <p:nvSpPr>
+          <p:cNvPr id="7" name="TextBox 6"/>
+          <p:cNvSpPr txBox="1"/>
+          <p:nvPr/>
+        </p:nvSpPr>
+        <p:spPr>
+          <a:xfrm>
+            <a:off x="530352" y="1371600"/>
+            <a:ext cx="5394960" cy="320040"/>
+          </a:xfrm>
+          <a:prstGeom prst="rect">
+            <a:avLst/>
+          </a:prstGeom>
+          <a:noFill/>
+        </p:spPr>
+        <p:txBody>
+          <a:bodyPr wrap="square">
+            <a:spAutoFit/>
+          </a:bodyPr>
+          <a:lstStyle/>
+          <a:p>
+            <a:pPr algn="l"/>
+            <a:r>
+              <a:rPr sz="1400" b="1" i="0">
+                <a:solidFill>
+                  <a:srgbClr val="D2691E"/>
+                </a:solidFill>
+                <a:latin typeface="Inter"/>
+              </a:rPr>
+              <a:t>Hardware Track</a:t>
+            </a:r>
+          </a:p>
+        </p:txBody>
+      </p:sp>
+      <p:sp>
+        <p:nvSpPr>
+          <p:cNvPr id="8" name="TextBox 7"/>
+          <p:cNvSpPr txBox="1"/>
+          <p:nvPr/>
+        </p:nvSpPr>
+        <p:spPr>
+          <a:xfrm>
+            <a:off x="530352" y="1737360"/>
+            <a:ext cx="5394960" cy="228600"/>
+          </a:xfrm>
+          <a:prstGeom prst="rect">
+            <a:avLst/>
+          </a:prstGeom>
+          <a:noFill/>
+        </p:spPr>
+        <p:txBody>
+          <a:bodyPr wrap="square">
+            <a:spAutoFit/>
+          </a:bodyPr>
+          <a:lstStyle/>
+          <a:p>
+            <a:pPr algn="l"/>
+            <a:r>
+              <a:rPr sz="900" b="1" i="0">
+                <a:solidFill>
+                  <a:srgbClr val="8A7D6E"/>
+                </a:solidFill>
+                <a:latin typeface="Inter"/>
+              </a:rPr>
+              <a:t>COMPLETED</a:t>
+            </a:r>
+          </a:p>
+        </p:txBody>
+      </p:sp>
+      <p:sp>
+        <p:nvSpPr>
+          <p:cNvPr id="9" name="TextBox 8"/>
+          <p:cNvSpPr txBox="1"/>
+          <p:nvPr/>
+        </p:nvSpPr>
+        <p:spPr>
+          <a:xfrm>
+            <a:off x="530352" y="1965960"/>
+            <a:ext cx="5394960" cy="274320"/>
+          </a:xfrm>
+          <a:prstGeom prst="rect">
+            <a:avLst/>
+          </a:prstGeom>
+          <a:noFill/>
+        </p:spPr>
+        <p:txBody>
+          <a:bodyPr wrap="square">
+            <a:spAutoFit/>
+          </a:bodyPr>
+          <a:lstStyle/>
+          <a:p>
+            <a:pPr algn="l"/>
+            <a:r>
+              <a:rPr sz="1100" b="0" i="0">
+                <a:solidFill>
+                  <a:srgbClr val="4A4035"/>
+                </a:solidFill>
+                <a:latin typeface="Inter"/>
+              </a:rPr>
+              <a:t>✅  All components procured</a:t>
+            </a:r>
+          </a:p>
+        </p:txBody>
+      </p:sp>
+      <p:sp>
+        <p:nvSpPr>
+          <p:cNvPr id="10" name="TextBox 9"/>
+          <p:cNvSpPr txBox="1"/>
+          <p:nvPr/>
+        </p:nvSpPr>
+        <p:spPr>
+          <a:xfrm>
+            <a:off x="530352" y="2249424"/>
+            <a:ext cx="5394960" cy="274320"/>
+          </a:xfrm>
+          <a:prstGeom prst="rect">
+            <a:avLst/>
+          </a:prstGeom>
+          <a:noFill/>
+        </p:spPr>
+        <p:txBody>
+          <a:bodyPr wrap="square">
+            <a:spAutoFit/>
+          </a:bodyPr>
+          <a:lstStyle/>
+          <a:p>
+            <a:pPr algn="l"/>
+            <a:r>
+              <a:rPr sz="1100" b="0" i="0">
+                <a:solidFill>
+                  <a:srgbClr val="4A4035"/>
+                </a:solidFill>
+                <a:latin typeface="Inter"/>
+              </a:rPr>
+              <a:t>✅  Specs verified</a:t>
+            </a:r>
+          </a:p>
+        </p:txBody>
+      </p:sp>
+      <p:sp>
+        <p:nvSpPr>
+          <p:cNvPr id="11" name="TextBox 10"/>
+          <p:cNvSpPr txBox="1"/>
+          <p:nvPr/>
+        </p:nvSpPr>
+        <p:spPr>
+          <a:xfrm>
+            <a:off x="530352" y="2532888"/>
+            <a:ext cx="5394960" cy="274320"/>
+          </a:xfrm>
+          <a:prstGeom prst="rect">
+            <a:avLst/>
+          </a:prstGeom>
+          <a:noFill/>
+        </p:spPr>
+        <p:txBody>
+          <a:bodyPr wrap="square">
+            <a:spAutoFit/>
+          </a:bodyPr>
+          <a:lstStyle/>
+          <a:p>
+            <a:pPr algn="l"/>
+            <a:r>
+              <a:rPr sz="1100" b="0" i="0">
+                <a:solidFill>
+                  <a:srgbClr val="4A4035"/>
+                </a:solidFill>
+                <a:latin typeface="Inter"/>
+              </a:rPr>
+              <a:t>✅  ESP8266 PWM firmware written</a:t>
+            </a:r>
+          </a:p>
+        </p:txBody>
+      </p:sp>
+      <p:sp>
+        <p:nvSpPr>
+          <p:cNvPr id="12" name="TextBox 11"/>
+          <p:cNvSpPr txBox="1"/>
+          <p:nvPr/>
+        </p:nvSpPr>
+        <p:spPr>
+          <a:xfrm>
+            <a:off x="530352" y="2816352"/>
+            <a:ext cx="5394960" cy="274320"/>
+          </a:xfrm>
+          <a:prstGeom prst="rect">
+            <a:avLst/>
+          </a:prstGeom>
+          <a:noFill/>
+        </p:spPr>
+        <p:txBody>
+          <a:bodyPr wrap="square">
+            <a:spAutoFit/>
+          </a:bodyPr>
+          <a:lstStyle/>
+          <a:p>
+            <a:pPr algn="l"/>
+            <a:r>
+              <a:rPr sz="1100" b="0" i="0">
+                <a:solidFill>
+                  <a:srgbClr val="4A4035"/>
+                </a:solidFill>
+                <a:latin typeface="Inter"/>
+              </a:rPr>
+              <a:t>✅  Individual servo response tested</a:t>
+            </a:r>
+          </a:p>
+        </p:txBody>
+      </p:sp>
+      <p:sp>
+        <p:nvSpPr>
+          <p:cNvPr id="13" name="TextBox 12"/>
+          <p:cNvSpPr txBox="1"/>
+          <p:nvPr/>
+        </p:nvSpPr>
+        <p:spPr>
+          <a:xfrm>
+            <a:off x="530352" y="3145536"/>
+            <a:ext cx="5394960" cy="228600"/>
+          </a:xfrm>
+          <a:prstGeom prst="rect">
+            <a:avLst/>
+          </a:prstGeom>
+          <a:noFill/>
+        </p:spPr>
+        <p:txBody>
+          <a:bodyPr wrap="square">
+            <a:spAutoFit/>
+          </a:bodyPr>
+          <a:lstStyle/>
+          <a:p>
+            <a:pPr algn="l"/>
+            <a:r>
+              <a:rPr sz="900" b="1" i="0">
+                <a:solidFill>
+                  <a:srgbClr val="8A7D6E"/>
+                </a:solidFill>
+                <a:latin typeface="Inter"/>
+              </a:rPr>
+              <a:t>PENDING</a:t>
+            </a:r>
+          </a:p>
+        </p:txBody>
+      </p:sp>
+      <p:sp>
+        <p:nvSpPr>
+          <p:cNvPr id="14" name="TextBox 13"/>
+          <p:cNvSpPr txBox="1"/>
+          <p:nvPr/>
+        </p:nvSpPr>
+        <p:spPr>
+          <a:xfrm>
+            <a:off x="530352" y="3374136"/>
+            <a:ext cx="5394960" cy="274320"/>
+          </a:xfrm>
+          <a:prstGeom prst="rect">
+            <a:avLst/>
+          </a:prstGeom>
+          <a:noFill/>
+        </p:spPr>
+        <p:txBody>
+          <a:bodyPr wrap="square">
+            <a:spAutoFit/>
+          </a:bodyPr>
+          <a:lstStyle/>
+          <a:p>
+            <a:pPr algn="l"/>
+            <a:r>
+              <a:rPr sz="1100" b="0" i="0">
+                <a:solidFill>
+                  <a:srgbClr val="8A7D6E"/>
+                </a:solidFill>
+                <a:latin typeface="Inter"/>
+              </a:rPr>
+              <a:t>⏳  Full arm assembly &amp; wiring</a:t>
+            </a:r>
+          </a:p>
+        </p:txBody>
+      </p:sp>
+      <p:sp>
+        <p:nvSpPr>
+          <p:cNvPr id="15" name="TextBox 14"/>
+          <p:cNvSpPr txBox="1"/>
+          <p:nvPr/>
+        </p:nvSpPr>
+        <p:spPr>
+          <a:xfrm>
+            <a:off x="530352" y="3657600"/>
+            <a:ext cx="5394960" cy="274320"/>
+          </a:xfrm>
+          <a:prstGeom prst="rect">
+            <a:avLst/>
+          </a:prstGeom>
+          <a:noFill/>
+        </p:spPr>
+        <p:txBody>
+          <a:bodyPr wrap="square">
+            <a:spAutoFit/>
+          </a:bodyPr>
+          <a:lstStyle/>
+          <a:p>
+            <a:pPr algn="l"/>
+            <a:r>
+              <a:rPr sz="1100" b="0" i="0">
+                <a:solidFill>
+                  <a:srgbClr val="8A7D6E"/>
+                </a:solidFill>
+                <a:latin typeface="Inter"/>
+              </a:rPr>
+              <a:t>⏳  Multi-servo coordinated control</a:t>
+            </a:r>
+          </a:p>
+        </p:txBody>
+      </p:sp>
+      <p:sp>
+        <p:nvSpPr>
+          <p:cNvPr id="16" name="TextBox 15"/>
+          <p:cNvSpPr txBox="1"/>
+          <p:nvPr/>
+        </p:nvSpPr>
+        <p:spPr>
+          <a:xfrm>
+            <a:off x="530352" y="3941064"/>
+            <a:ext cx="5394960" cy="274320"/>
+          </a:xfrm>
+          <a:prstGeom prst="rect">
+            <a:avLst/>
+          </a:prstGeom>
+          <a:noFill/>
+        </p:spPr>
+        <p:txBody>
+          <a:bodyPr wrap="square">
+            <a:spAutoFit/>
+          </a:bodyPr>
+          <a:lstStyle/>
+          <a:p>
+            <a:pPr algn="l"/>
+            <a:r>
+              <a:rPr sz="1100" b="0" i="0">
+                <a:solidFill>
+                  <a:srgbClr val="8A7D6E"/>
+                </a:solidFill>
+                <a:latin typeface="Inter"/>
+              </a:rPr>
+              <a:t>⏳  ROS2 ↔ ESP8266 serial bridge</a:t>
+            </a:r>
+          </a:p>
+        </p:txBody>
+      </p:sp>
+      <p:sp>
+        <p:nvSpPr>
+          <p:cNvPr id="17" name="TextBox 16"/>
+          <p:cNvSpPr txBox="1"/>
+          <p:nvPr/>
+        </p:nvSpPr>
+        <p:spPr>
+          <a:xfrm>
+            <a:off x="530352" y="4224528"/>
+            <a:ext cx="5394960" cy="274320"/>
+          </a:xfrm>
+          <a:prstGeom prst="rect">
+            <a:avLst/>
+          </a:prstGeom>
+          <a:noFill/>
+        </p:spPr>
+        <p:txBody>
+          <a:bodyPr wrap="square">
+            <a:spAutoFit/>
+          </a:bodyPr>
+          <a:lstStyle/>
+          <a:p>
+            <a:pPr algn="l"/>
+            <a:r>
+              <a:rPr sz="1100" b="0" i="0">
+                <a:solidFill>
+                  <a:srgbClr val="8A7D6E"/>
+                </a:solidFill>
+                <a:latin typeface="Inter"/>
+              </a:rPr>
+              <a:t>⏳  IMU integration</a:t>
+            </a:r>
+          </a:p>
+        </p:txBody>
+      </p:sp>
+      <p:sp>
+        <p:nvSpPr>
+          <p:cNvPr id="18" name="Rectangle 17"/>
+          <p:cNvSpPr/>
+          <p:nvPr/>
+        </p:nvSpPr>
+        <p:spPr>
+          <a:xfrm>
+            <a:off x="6355080" y="1280160"/>
+            <a:ext cx="5715000" cy="4251960"/>
+          </a:xfrm>
+          <a:prstGeom prst="rect">
+            <a:avLst/>
+          </a:prstGeom>
+          <a:solidFill>
+            <a:srgbClr val="FFFFFF"/>
+          </a:solidFill>
+          <a:ln w="9525">
+            <a:solidFill>
+              <a:srgbClr val="CCC4B8"/>
+            </a:solidFill>
+          </a:ln>
+        </p:spPr>
+        <p:style>
+          <a:lnRef idx="1">
+            <a:schemeClr val="accent1"/>
+          </a:lnRef>
+          <a:fillRef idx="3">
+            <a:schemeClr val="accent1"/>
+          </a:fillRef>
+          <a:effectRef idx="2">
+            <a:schemeClr val="accent1"/>
+          </a:effectRef>
+          <a:fontRef idx="minor">
+            <a:schemeClr val="lt1"/>
+          </a:fontRef>
+        </p:style>
+        <p:txBody>
+          <a:bodyPr rtlCol="0" anchor="ctr"/>
+          <a:lstStyle/>
+          <a:p>
+            <a:pPr algn="ctr"/>
+          </a:p>
+        </p:txBody>
+      </p:sp>
+      <p:sp>
+        <p:nvSpPr>
+          <p:cNvPr id="19" name="TextBox 18"/>
+          <p:cNvSpPr txBox="1"/>
+          <p:nvPr/>
+        </p:nvSpPr>
+        <p:spPr>
+          <a:xfrm>
+            <a:off x="6519672" y="1371600"/>
+            <a:ext cx="5394960" cy="320040"/>
+          </a:xfrm>
+          <a:prstGeom prst="rect">
+            <a:avLst/>
+          </a:prstGeom>
+          <a:noFill/>
+        </p:spPr>
+        <p:txBody>
+          <a:bodyPr wrap="square">
+            <a:spAutoFit/>
+          </a:bodyPr>
+          <a:lstStyle/>
+          <a:p>
+            <a:pPr algn="l"/>
+            <a:r>
+              <a:rPr sz="1400" b="1" i="0">
+                <a:solidFill>
+                  <a:srgbClr val="1A6B8A"/>
+                </a:solidFill>
+                <a:latin typeface="Inter"/>
+              </a:rPr>
+              <a:t>Software Track</a:t>
+            </a:r>
+          </a:p>
+        </p:txBody>
+      </p:sp>
+      <p:sp>
+        <p:nvSpPr>
+          <p:cNvPr id="20" name="TextBox 19"/>
+          <p:cNvSpPr txBox="1"/>
+          <p:nvPr/>
+        </p:nvSpPr>
+        <p:spPr>
+          <a:xfrm>
+            <a:off x="6519672" y="1737360"/>
+            <a:ext cx="5394960" cy="228600"/>
+          </a:xfrm>
+          <a:prstGeom prst="rect">
+            <a:avLst/>
+          </a:prstGeom>
+          <a:noFill/>
+        </p:spPr>
+        <p:txBody>
+          <a:bodyPr wrap="square">
+            <a:spAutoFit/>
+          </a:bodyPr>
+          <a:lstStyle/>
+          <a:p>
+            <a:pPr algn="l"/>
+            <a:r>
+              <a:rPr sz="900" b="1" i="0">
+                <a:solidFill>
+                  <a:srgbClr val="8A7D6E"/>
+                </a:solidFill>
+                <a:latin typeface="Inter"/>
+              </a:rPr>
+              <a:t>COMPLETED</a:t>
+            </a:r>
+          </a:p>
+        </p:txBody>
+      </p:sp>
+      <p:sp>
+        <p:nvSpPr>
+          <p:cNvPr id="21" name="TextBox 20"/>
+          <p:cNvSpPr txBox="1"/>
+          <p:nvPr/>
+        </p:nvSpPr>
+        <p:spPr>
+          <a:xfrm>
+            <a:off x="6519672" y="1965960"/>
+            <a:ext cx="5394960" cy="274320"/>
+          </a:xfrm>
+          <a:prstGeom prst="rect">
+            <a:avLst/>
+          </a:prstGeom>
+          <a:noFill/>
+        </p:spPr>
+        <p:txBody>
+          <a:bodyPr wrap="square">
+            <a:spAutoFit/>
+          </a:bodyPr>
+          <a:lstStyle/>
+          <a:p>
+            <a:pPr algn="l"/>
+            <a:r>
+              <a:rPr sz="1100" b="0" i="0">
+                <a:solidFill>
+                  <a:srgbClr val="4A4035"/>
+                </a:solidFill>
+                <a:latin typeface="Inter"/>
+              </a:rPr>
+              <a:t>✅  URDF created after iterative adaptation</a:t>
+            </a:r>
+          </a:p>
+        </p:txBody>
+      </p:sp>
+      <p:sp>
+        <p:nvSpPr>
+          <p:cNvPr id="22" name="TextBox 21"/>
+          <p:cNvSpPr txBox="1"/>
+          <p:nvPr/>
+        </p:nvSpPr>
+        <p:spPr>
+          <a:xfrm>
+            <a:off x="6519672" y="2249424"/>
+            <a:ext cx="5394960" cy="274320"/>
+          </a:xfrm>
+          <a:prstGeom prst="rect">
+            <a:avLst/>
+          </a:prstGeom>
+          <a:noFill/>
+        </p:spPr>
+        <p:txBody>
+          <a:bodyPr wrap="square">
+            <a:spAutoFit/>
+          </a:bodyPr>
+          <a:lstStyle/>
+          <a:p>
+            <a:pPr algn="l"/>
+            <a:r>
+              <a:rPr sz="1100" b="0" i="0">
+                <a:solidFill>
+                  <a:srgbClr val="4A4035"/>
+                </a:solidFill>
+                <a:latin typeface="Inter"/>
+              </a:rPr>
+              <a:t>✅  Arm visualised in RViz</a:t>
+            </a:r>
+          </a:p>
+        </p:txBody>
+      </p:sp>
+      <p:sp>
+        <p:nvSpPr>
+          <p:cNvPr id="23" name="TextBox 22"/>
+          <p:cNvSpPr txBox="1"/>
+          <p:nvPr/>
+        </p:nvSpPr>
+        <p:spPr>
+          <a:xfrm>
+            <a:off x="6519672" y="2532888"/>
+            <a:ext cx="5394960" cy="274320"/>
+          </a:xfrm>
+          <a:prstGeom prst="rect">
+            <a:avLst/>
+          </a:prstGeom>
+          <a:noFill/>
+        </p:spPr>
+        <p:txBody>
+          <a:bodyPr wrap="square">
+            <a:spAutoFit/>
+          </a:bodyPr>
+          <a:lstStyle/>
+          <a:p>
+            <a:pPr algn="l"/>
+            <a:r>
+              <a:rPr sz="1100" b="0" i="0">
+                <a:solidFill>
+                  <a:srgbClr val="4A4035"/>
+                </a:solidFill>
+                <a:latin typeface="Inter"/>
+              </a:rPr>
+              <a:t>✅  Gazebo simulation running</a:t>
+            </a:r>
+          </a:p>
+        </p:txBody>
+      </p:sp>
+      <p:sp>
+        <p:nvSpPr>
+          <p:cNvPr id="24" name="TextBox 23"/>
+          <p:cNvSpPr txBox="1"/>
+          <p:nvPr/>
+        </p:nvSpPr>
+        <p:spPr>
+          <a:xfrm>
+            <a:off x="6519672" y="2816352"/>
+            <a:ext cx="5394960" cy="274320"/>
+          </a:xfrm>
+          <a:prstGeom prst="rect">
+            <a:avLst/>
+          </a:prstGeom>
+          <a:noFill/>
+        </p:spPr>
+        <p:txBody>
+          <a:bodyPr wrap="square">
+            <a:spAutoFit/>
+          </a:bodyPr>
+          <a:lstStyle/>
+          <a:p>
+            <a:pPr algn="l"/>
+            <a:r>
+              <a:rPr sz="1100" b="0" i="0">
+                <a:solidFill>
+                  <a:srgbClr val="4A4035"/>
+                </a:solidFill>
+                <a:latin typeface="Inter"/>
+              </a:rPr>
+              <a:t>✅  ros2_control JTC active</a:t>
+            </a:r>
+          </a:p>
+        </p:txBody>
+      </p:sp>
+      <p:sp>
+        <p:nvSpPr>
+          <p:cNvPr id="25" name="TextBox 24"/>
+          <p:cNvSpPr txBox="1"/>
+          <p:nvPr/>
+        </p:nvSpPr>
+        <p:spPr>
+          <a:xfrm>
+            <a:off x="6519672" y="3099816"/>
+            <a:ext cx="5394960" cy="274320"/>
+          </a:xfrm>
+          <a:prstGeom prst="rect">
+            <a:avLst/>
+          </a:prstGeom>
+          <a:noFill/>
+        </p:spPr>
+        <p:txBody>
+          <a:bodyPr wrap="square">
+            <a:spAutoFit/>
+          </a:bodyPr>
+          <a:lstStyle/>
+          <a:p>
+            <a:pPr algn="l"/>
+            <a:r>
+              <a:rPr sz="1100" b="0" i="0">
+                <a:solidFill>
+                  <a:srgbClr val="4A4035"/>
+                </a:solidFill>
+                <a:latin typeface="Inter"/>
+              </a:rPr>
+              <a:t>✅  YOLOv8 detection working in isolation</a:t>
+            </a:r>
+          </a:p>
+        </p:txBody>
+      </p:sp>
+      <p:sp>
+        <p:nvSpPr>
+          <p:cNvPr id="26" name="TextBox 25"/>
+          <p:cNvSpPr txBox="1"/>
+          <p:nvPr/>
+        </p:nvSpPr>
+        <p:spPr>
+          <a:xfrm>
+            <a:off x="6519672" y="3429000"/>
+            <a:ext cx="5394960" cy="228600"/>
+          </a:xfrm>
+          <a:prstGeom prst="rect">
+            <a:avLst/>
+          </a:prstGeom>
+          <a:noFill/>
+        </p:spPr>
+        <p:txBody>
+          <a:bodyPr wrap="square">
+            <a:spAutoFit/>
+          </a:bodyPr>
+          <a:lstStyle/>
+          <a:p>
+            <a:pPr algn="l"/>
+            <a:r>
+              <a:rPr sz="900" b="1" i="0">
+                <a:solidFill>
+                  <a:srgbClr val="8A7D6E"/>
+                </a:solidFill>
+                <a:latin typeface="Inter"/>
+              </a:rPr>
+              <a:t>PENDING</a:t>
+            </a:r>
+          </a:p>
+        </p:txBody>
+      </p:sp>
+      <p:sp>
+        <p:nvSpPr>
+          <p:cNvPr id="27" name="TextBox 26"/>
+          <p:cNvSpPr txBox="1"/>
+          <p:nvPr/>
+        </p:nvSpPr>
+        <p:spPr>
+          <a:xfrm>
+            <a:off x="6519672" y="3657600"/>
+            <a:ext cx="5394960" cy="274320"/>
+          </a:xfrm>
+          <a:prstGeom prst="rect">
+            <a:avLst/>
+          </a:prstGeom>
+          <a:noFill/>
+        </p:spPr>
+        <p:txBody>
+          <a:bodyPr wrap="square">
+            <a:spAutoFit/>
+          </a:bodyPr>
+          <a:lstStyle/>
+          <a:p>
+            <a:pPr algn="l"/>
+            <a:r>
+              <a:rPr sz="1100" b="0" i="0">
+                <a:solidFill>
+                  <a:srgbClr val="8A7D6E"/>
+                </a:solidFill>
+                <a:latin typeface="Inter"/>
+              </a:rPr>
+              <a:t>⏳  YOLO → ROS2 command pipeline</a:t>
+            </a:r>
+          </a:p>
+        </p:txBody>
+      </p:sp>
+      <p:sp>
+        <p:nvSpPr>
+          <p:cNvPr id="28" name="TextBox 27"/>
+          <p:cNvSpPr txBox="1"/>
+          <p:nvPr/>
+        </p:nvSpPr>
+        <p:spPr>
+          <a:xfrm>
+            <a:off x="6519672" y="3941064"/>
+            <a:ext cx="5394960" cy="274320"/>
+          </a:xfrm>
+          <a:prstGeom prst="rect">
+            <a:avLst/>
+          </a:prstGeom>
+          <a:noFill/>
+        </p:spPr>
+        <p:txBody>
+          <a:bodyPr wrap="square">
+            <a:spAutoFit/>
+          </a:bodyPr>
+          <a:lstStyle/>
+          <a:p>
+            <a:pPr algn="l"/>
+            <a:r>
+              <a:rPr sz="1100" b="0" i="0">
+                <a:solidFill>
+                  <a:srgbClr val="8A7D6E"/>
+                </a:solidFill>
+                <a:latin typeface="Inter"/>
+              </a:rPr>
+              <a:t>⏳  Camera-to-workspace calibration</a:t>
+            </a:r>
+          </a:p>
+        </p:txBody>
+      </p:sp>
+      <p:sp>
+        <p:nvSpPr>
+          <p:cNvPr id="29" name="TextBox 28"/>
+          <p:cNvSpPr txBox="1"/>
+          <p:nvPr/>
+        </p:nvSpPr>
+        <p:spPr>
+          <a:xfrm>
+            <a:off x="6519672" y="4224528"/>
+            <a:ext cx="5394960" cy="274320"/>
+          </a:xfrm>
+          <a:prstGeom prst="rect">
+            <a:avLst/>
+          </a:prstGeom>
+          <a:noFill/>
+        </p:spPr>
+        <p:txBody>
+          <a:bodyPr wrap="square">
+            <a:spAutoFit/>
+          </a:bodyPr>
+          <a:lstStyle/>
+          <a:p>
+            <a:pPr algn="l"/>
+            <a:r>
+              <a:rPr sz="1100" b="0" i="0">
+                <a:solidFill>
+                  <a:srgbClr val="8A7D6E"/>
+                </a:solidFill>
+                <a:latin typeface="Inter"/>
+              </a:rPr>
+              <a:t>⏳  MoveIt2 motion planning</a:t>
+            </a:r>
+          </a:p>
+        </p:txBody>
+      </p:sp>
+      <p:sp>
+        <p:nvSpPr>
+          <p:cNvPr id="30" name="TextBox 29"/>
+          <p:cNvSpPr txBox="1"/>
+          <p:nvPr/>
+        </p:nvSpPr>
+        <p:spPr>
+          <a:xfrm>
+            <a:off x="6519672" y="4507992"/>
+            <a:ext cx="5394960" cy="274320"/>
+          </a:xfrm>
+          <a:prstGeom prst="rect">
+            <a:avLst/>
+          </a:prstGeom>
+          <a:noFill/>
+        </p:spPr>
+        <p:txBody>
+          <a:bodyPr wrap="square">
+            <a:spAutoFit/>
+          </a:bodyPr>
+          <a:lstStyle/>
+          <a:p>
+            <a:pPr algn="l"/>
+            <a:r>
+              <a:rPr sz="1100" b="0" i="0">
+                <a:solidFill>
+                  <a:srgbClr val="8A7D6E"/>
+                </a:solidFill>
+                <a:latin typeface="Inter"/>
+              </a:rPr>
+              <a:t>⏳  Autonomous mode logic</a:t>
+            </a:r>
+          </a:p>
+        </p:txBody>
+      </p:sp>
+      <p:sp>
+        <p:nvSpPr>
+          <p:cNvPr id="31" name="TextBox 30"/>
+          <p:cNvSpPr txBox="1"/>
+          <p:nvPr/>
+        </p:nvSpPr>
+        <p:spPr>
+          <a:xfrm>
+            <a:off x="365760" y="5669280"/>
+            <a:ext cx="11521440" cy="411480"/>
+          </a:xfrm>
+          <a:prstGeom prst="rect">
+            <a:avLst/>
+          </a:prstGeom>
+          <a:noFill/>
+        </p:spPr>
+        <p:txBody>
+          <a:bodyPr wrap="square">
+            <a:spAutoFit/>
+          </a:bodyPr>
+          <a:lstStyle/>
+          <a:p>
+            <a:pPr algn="ctr"/>
+            <a:r>
+              <a:rPr sz="1100" b="0" i="1">
+                <a:solidFill>
+                  <a:srgbClr val="D2691E"/>
+                </a:solidFill>
+                <a:latin typeface="Inter"/>
+              </a:rPr>
+              <a:t>Key Challenge: The most significant obstacle was the absence of a ready-made URDF for the purchased arm kit, requiring multiple iterative reconstruction attempts before a working simulation model was produced.</a:t>
+            </a:r>
+          </a:p>
+        </p:txBody>
+      </p:sp>
+    </p:spTree>
+  </p:cSld>
+  <p:clrMapOvr>
+    <a:masterClrMapping/>
+  </p:clrMapOvr>
+</p:sld>
+</file>
+
+<file path=ppt/slides/slide12.xml><?xml version="1.0" encoding="utf-8"?>
+<p:sld xmlns:a="http://schemas.openxmlformats.org/drawingml/2006/main" xmlns:p="http://schemas.openxmlformats.org/presentationml/2006/main" xmlns:r="http://schemas.openxmlformats.org/officeDocument/2006/relationships">
+  <p:cSld>
+    <p:bg>
+      <p:bgPr>
+        <a:solidFill>
+          <a:srgbClr val="F0EBE3"/>
+        </a:solidFill>
+        <a:effectLst/>
+      </p:bgPr>
+    </p:bg>
+    <p:spTree>
+      <p:nvGrpSpPr>
+        <p:cNvPr id="1" name=""/>
+        <p:cNvGrpSpPr/>
+        <p:nvPr/>
+      </p:nvGrpSpPr>
+      <p:grpSpPr/>
+      <p:sp>
+        <p:nvSpPr>
+          <p:cNvPr id="2" name="Rectangle 1"/>
+          <p:cNvSpPr/>
+          <p:nvPr/>
+        </p:nvSpPr>
+        <p:spPr>
+          <a:xfrm>
+            <a:off x="0" y="0"/>
+            <a:ext cx="12188952" cy="76200"/>
+          </a:xfrm>
+          <a:prstGeom prst="rect">
+            <a:avLst/>
+          </a:prstGeom>
+          <a:solidFill>
+            <a:srgbClr val="1A6B8A"/>
+          </a:solidFill>
+          <a:ln>
+            <a:noFill/>
+          </a:ln>
+        </p:spPr>
+        <p:style>
+          <a:lnRef idx="1">
+            <a:schemeClr val="accent1"/>
+          </a:lnRef>
+          <a:fillRef idx="3">
+            <a:schemeClr val="accent1"/>
+          </a:fillRef>
+          <a:effectRef idx="2">
+            <a:schemeClr val="accent1"/>
+          </a:effectRef>
+          <a:fontRef idx="minor">
+            <a:schemeClr val="lt1"/>
+          </a:fontRef>
+        </p:style>
+        <p:txBody>
+          <a:bodyPr rtlCol="0" anchor="ctr"/>
+          <a:lstStyle/>
+          <a:p>
+            <a:pPr algn="ctr"/>
+          </a:p>
+        </p:txBody>
+      </p:sp>
+      <p:sp>
+        <p:nvSpPr>
+          <p:cNvPr id="3" name="TextBox 2"/>
+          <p:cNvSpPr txBox="1"/>
+          <p:nvPr/>
+        </p:nvSpPr>
+        <p:spPr>
+          <a:xfrm>
+            <a:off x="548640" y="320040"/>
+            <a:ext cx="11064240" cy="594360"/>
+          </a:xfrm>
+          <a:prstGeom prst="rect">
+            <a:avLst/>
+          </a:prstGeom>
+          <a:noFill/>
+        </p:spPr>
+        <p:txBody>
+          <a:bodyPr wrap="square">
+            <a:spAutoFit/>
+          </a:bodyPr>
+          <a:lstStyle/>
+          <a:p>
+            <a:pPr algn="ctr"/>
+            <a:r>
+              <a:rPr sz="2600" b="1" i="0">
+                <a:solidFill>
+                  <a:srgbClr val="1C1A16"/>
+                </a:solidFill>
+                <a:latin typeface="Inter"/>
+              </a:rPr>
+              <a:t>Next Steps &amp; Roadmap</a:t>
+            </a:r>
+          </a:p>
+        </p:txBody>
+      </p:sp>
+      <p:sp>
+        <p:nvSpPr>
+          <p:cNvPr id="4" name="TextBox 3"/>
+          <p:cNvSpPr txBox="1"/>
+          <p:nvPr/>
+        </p:nvSpPr>
+        <p:spPr>
+          <a:xfrm>
+            <a:off x="548640" y="868680"/>
+            <a:ext cx="11064240" cy="320040"/>
+          </a:xfrm>
+          <a:prstGeom prst="rect">
+            <a:avLst/>
+          </a:prstGeom>
+          <a:noFill/>
+        </p:spPr>
+        <p:txBody>
+          <a:bodyPr wrap="square">
+            <a:spAutoFit/>
+          </a:bodyPr>
+          <a:lstStyle/>
+          <a:p>
+            <a:pPr algn="ctr"/>
+            <a:r>
+              <a:rPr sz="1200" b="0" i="0">
+                <a:solidFill>
+                  <a:srgbClr val="8A7D6E"/>
+                </a:solidFill>
+                <a:latin typeface="Inter"/>
+              </a:rPr>
+              <a:t>Structured development path — testable artefact at every phase</a:t>
+            </a:r>
+          </a:p>
+        </p:txBody>
+      </p:sp>
+      <p:sp>
+        <p:nvSpPr>
+          <p:cNvPr id="5" name="TextBox 4"/>
+          <p:cNvSpPr txBox="1"/>
+          <p:nvPr/>
+        </p:nvSpPr>
+        <p:spPr>
+          <a:xfrm>
+            <a:off x="182880" y="6537960"/>
+            <a:ext cx="3657600" cy="274320"/>
+          </a:xfrm>
+          <a:prstGeom prst="rect">
+            <a:avLst/>
+          </a:prstGeom>
+          <a:noFill/>
+        </p:spPr>
+        <p:txBody>
+          <a:bodyPr wrap="square">
+            <a:spAutoFit/>
+          </a:bodyPr>
+          <a:lstStyle/>
+          <a:p>
+            <a:pPr algn="l"/>
+            <a:r>
+              <a:rPr sz="900" b="0" i="0">
+                <a:solidFill>
+                  <a:srgbClr val="8A7D6E"/>
+                </a:solidFill>
+                <a:latin typeface="Inter"/>
+              </a:rPr>
+              <a:t>Next Steps &amp; Roadmap   |   12/12</a:t>
             </a:r>
           </a:p>
         </p:txBody>
@@ -6654,7 +8767,7 @@
                 </a:solidFill>
                 <a:latin typeface="Inter"/>
               </a:rPr>
-              <a:t>Phase 1 — Hardware Procurement   |   4/10</a:t>
+              <a:t>Phase 1 — Hardware Procurement   |   4/13</a:t>
             </a:r>
           </a:p>
         </p:txBody>
@@ -6703,7 +8816,7 @@
         <p:spPr>
           <a:xfrm>
             <a:off x="365760" y="1234440"/>
-            <a:ext cx="3108960" cy="2011680"/>
+            <a:ext cx="2743200" cy="2011680"/>
           </a:xfrm>
           <a:prstGeom prst="rect">
             <a:avLst/>
@@ -6748,7 +8861,7 @@
         <p:spPr>
           <a:xfrm>
             <a:off x="502920" y="1325880"/>
-            <a:ext cx="2834640" cy="256032"/>
+            <a:ext cx="2468880" cy="256032"/>
           </a:xfrm>
           <a:prstGeom prst="rect">
             <a:avLst/>
@@ -6783,7 +8896,7 @@
         <p:spPr>
           <a:xfrm>
             <a:off x="502920" y="1572768"/>
-            <a:ext cx="2834640" cy="1508760"/>
+            <a:ext cx="2468880" cy="1508760"/>
           </a:xfrm>
           <a:prstGeom prst="rect">
             <a:avLst/>
@@ -6818,7 +8931,7 @@
         <p:spPr>
           <a:xfrm>
             <a:off x="502920" y="3337560"/>
-            <a:ext cx="2834640" cy="228600"/>
+            <a:ext cx="2468880" cy="228600"/>
           </a:xfrm>
           <a:prstGeom prst="rect">
             <a:avLst/>
@@ -6853,7 +8966,7 @@
         <p:spPr>
           <a:xfrm>
             <a:off x="502920" y="3566160"/>
-            <a:ext cx="2834640" cy="1097280"/>
+            <a:ext cx="2468880" cy="1097280"/>
           </a:xfrm>
           <a:prstGeom prst="rect">
             <a:avLst/>
@@ -6887,8 +9000,8 @@
         </p:nvSpPr>
         <p:spPr>
           <a:xfrm>
-            <a:off x="3657600" y="1234440"/>
-            <a:ext cx="8229600" cy="1188720"/>
+            <a:off x="3291840" y="1234440"/>
+            <a:ext cx="5029200" cy="1188720"/>
           </a:xfrm>
           <a:prstGeom prst="rect">
             <a:avLst/>
@@ -6932,7 +9045,7 @@
         </p:nvSpPr>
         <p:spPr>
           <a:xfrm>
-            <a:off x="3794760" y="1344168"/>
+            <a:off x="3429000" y="1344168"/>
             <a:ext cx="457200" cy="1078992"/>
           </a:xfrm>
           <a:prstGeom prst="rect">
@@ -6967,8 +9080,8 @@
         </p:nvSpPr>
         <p:spPr>
           <a:xfrm>
-            <a:off x="4297680" y="1325880"/>
-            <a:ext cx="7406640" cy="256032"/>
+            <a:off x="3931920" y="1325880"/>
+            <a:ext cx="4251960" cy="256032"/>
           </a:xfrm>
           <a:prstGeom prst="rect">
             <a:avLst/>
@@ -7002,8 +9115,8 @@
         </p:nvSpPr>
         <p:spPr>
           <a:xfrm>
-            <a:off x="4297680" y="1581912"/>
-            <a:ext cx="7406640" cy="804672"/>
+            <a:off x="3931920" y="1581912"/>
+            <a:ext cx="4251960" cy="804672"/>
           </a:xfrm>
           <a:prstGeom prst="rect">
             <a:avLst/>
@@ -7037,8 +9150,8 @@
         </p:nvSpPr>
         <p:spPr>
           <a:xfrm>
-            <a:off x="3657600" y="2514600"/>
-            <a:ext cx="8229600" cy="1188720"/>
+            <a:off x="3291840" y="2514600"/>
+            <a:ext cx="5029200" cy="1188720"/>
           </a:xfrm>
           <a:prstGeom prst="rect">
             <a:avLst/>
@@ -7082,7 +9195,7 @@
         </p:nvSpPr>
         <p:spPr>
           <a:xfrm>
-            <a:off x="3794760" y="2624328"/>
+            <a:off x="3429000" y="2624328"/>
             <a:ext cx="457200" cy="1078992"/>
           </a:xfrm>
           <a:prstGeom prst="rect">
@@ -7117,8 +9230,8 @@
         </p:nvSpPr>
         <p:spPr>
           <a:xfrm>
-            <a:off x="4297680" y="2606040"/>
-            <a:ext cx="7406640" cy="256032"/>
+            <a:off x="3931920" y="2606040"/>
+            <a:ext cx="4251960" cy="256032"/>
           </a:xfrm>
           <a:prstGeom prst="rect">
             <a:avLst/>
@@ -7152,8 +9265,8 @@
         </p:nvSpPr>
         <p:spPr>
           <a:xfrm>
-            <a:off x="4297680" y="2862072"/>
-            <a:ext cx="7406640" cy="804672"/>
+            <a:off x="3931920" y="2862072"/>
+            <a:ext cx="4251960" cy="804672"/>
           </a:xfrm>
           <a:prstGeom prst="rect">
             <a:avLst/>
@@ -7187,8 +9300,8 @@
         </p:nvSpPr>
         <p:spPr>
           <a:xfrm>
-            <a:off x="3657600" y="3794760"/>
-            <a:ext cx="8229600" cy="1188720"/>
+            <a:off x="3291840" y="3794760"/>
+            <a:ext cx="5029200" cy="1188720"/>
           </a:xfrm>
           <a:prstGeom prst="rect">
             <a:avLst/>
@@ -7232,7 +9345,7 @@
         </p:nvSpPr>
         <p:spPr>
           <a:xfrm>
-            <a:off x="3794760" y="3904488"/>
+            <a:off x="3429000" y="3904488"/>
             <a:ext cx="457200" cy="1078992"/>
           </a:xfrm>
           <a:prstGeom prst="rect">
@@ -7267,8 +9380,8 @@
         </p:nvSpPr>
         <p:spPr>
           <a:xfrm>
-            <a:off x="4297680" y="3886200"/>
-            <a:ext cx="7406640" cy="256032"/>
+            <a:off x="3931920" y="3886200"/>
+            <a:ext cx="4251960" cy="256032"/>
           </a:xfrm>
           <a:prstGeom prst="rect">
             <a:avLst/>
@@ -7302,8 +9415,8 @@
         </p:nvSpPr>
         <p:spPr>
           <a:xfrm>
-            <a:off x="4297680" y="4142232"/>
-            <a:ext cx="7406640" cy="804672"/>
+            <a:off x="3931920" y="4142232"/>
+            <a:ext cx="4251960" cy="804672"/>
           </a:xfrm>
           <a:prstGeom prst="rect">
             <a:avLst/>
@@ -7329,6 +9442,30 @@
           </a:p>
         </p:txBody>
       </p:sp>
+      <p:pic>
+        <p:nvPicPr>
+          <p:cNvPr id="23" name="Picture 22" descr="UNASSEMBLED ROBOTIC MODEL.jpeg"/>
+          <p:cNvPicPr>
+            <a:picLocks noChangeAspect="1"/>
+          </p:cNvPicPr>
+          <p:nvPr/>
+        </p:nvPicPr>
+        <p:blipFill>
+          <a:blip r:embed="rId2"/>
+          <a:stretch>
+            <a:fillRect/>
+          </a:stretch>
+        </p:blipFill>
+        <p:spPr>
+          <a:xfrm>
+            <a:off x="8503920" y="1234440"/>
+            <a:ext cx="3474720" cy="4656909"/>
+          </a:xfrm>
+          <a:prstGeom prst="rect">
+            <a:avLst/>
+          </a:prstGeom>
+        </p:spPr>
+      </p:pic>
     </p:spTree>
   </p:cSld>
   <p:clrMapOvr>
@@ -7355,939 +9492,30 @@
         <p:nvPr/>
       </p:nvGrpSpPr>
       <p:grpSpPr/>
-      <p:sp>
-        <p:nvSpPr>
-          <p:cNvPr id="2" name="Rectangle 1"/>
-          <p:cNvSpPr/>
-          <p:nvPr/>
-        </p:nvSpPr>
-        <p:spPr>
-          <a:xfrm>
-            <a:off x="0" y="0"/>
-            <a:ext cx="12188952" cy="76200"/>
-          </a:xfrm>
-          <a:prstGeom prst="rect">
-            <a:avLst/>
-          </a:prstGeom>
-          <a:solidFill>
-            <a:srgbClr val="1A6B8A"/>
-          </a:solidFill>
-          <a:ln>
-            <a:noFill/>
-          </a:ln>
-        </p:spPr>
-        <p:style>
-          <a:lnRef idx="1">
-            <a:schemeClr val="accent1"/>
-          </a:lnRef>
-          <a:fillRef idx="3">
-            <a:schemeClr val="accent1"/>
-          </a:fillRef>
-          <a:effectRef idx="2">
-            <a:schemeClr val="accent1"/>
-          </a:effectRef>
-          <a:fontRef idx="minor">
-            <a:schemeClr val="lt1"/>
-          </a:fontRef>
-        </p:style>
-        <p:txBody>
-          <a:bodyPr rtlCol="0" anchor="ctr"/>
-          <a:lstStyle/>
-          <a:p>
-            <a:pPr algn="ctr"/>
-          </a:p>
-        </p:txBody>
-      </p:sp>
-      <p:sp>
-        <p:nvSpPr>
-          <p:cNvPr id="3" name="TextBox 2"/>
-          <p:cNvSpPr txBox="1"/>
-          <p:nvPr/>
-        </p:nvSpPr>
-        <p:spPr>
-          <a:xfrm>
-            <a:off x="548640" y="320040"/>
-            <a:ext cx="11064240" cy="594360"/>
-          </a:xfrm>
-          <a:prstGeom prst="rect">
-            <a:avLst/>
-          </a:prstGeom>
-          <a:noFill/>
-        </p:spPr>
-        <p:txBody>
-          <a:bodyPr wrap="square">
-            <a:spAutoFit/>
-          </a:bodyPr>
-          <a:lstStyle/>
-          <a:p>
-            <a:pPr algn="ctr"/>
-            <a:r>
-              <a:rPr sz="2600" b="1" i="0">
-                <a:solidFill>
-                  <a:srgbClr val="1C1A16"/>
-                </a:solidFill>
-                <a:latin typeface="Inter"/>
-              </a:rPr>
-              <a:t>Phase 2 — 3D Model &amp; URDF Development</a:t>
-            </a:r>
-          </a:p>
-        </p:txBody>
-      </p:sp>
-      <p:sp>
-        <p:nvSpPr>
-          <p:cNvPr id="4" name="TextBox 3"/>
-          <p:cNvSpPr txBox="1"/>
-          <p:nvPr/>
-        </p:nvSpPr>
-        <p:spPr>
-          <a:xfrm>
-            <a:off x="182880" y="6537960"/>
-            <a:ext cx="3657600" cy="274320"/>
-          </a:xfrm>
-          <a:prstGeom prst="rect">
-            <a:avLst/>
-          </a:prstGeom>
-          <a:noFill/>
-        </p:spPr>
-        <p:txBody>
-          <a:bodyPr wrap="square">
-            <a:spAutoFit/>
-          </a:bodyPr>
-          <a:lstStyle/>
-          <a:p>
-            <a:pPr algn="l"/>
-            <a:r>
-              <a:rPr sz="900" b="0" i="0">
-                <a:solidFill>
-                  <a:srgbClr val="8A7D6E"/>
-                </a:solidFill>
-                <a:latin typeface="Inter"/>
-              </a:rPr>
-              <a:t>Phase 2 — 3D Model &amp; URDF Development   |   5/10</a:t>
-            </a:r>
-          </a:p>
-        </p:txBody>
-      </p:sp>
-      <p:sp>
-        <p:nvSpPr>
-          <p:cNvPr id="5" name="TextBox 4"/>
-          <p:cNvSpPr txBox="1"/>
-          <p:nvPr/>
-        </p:nvSpPr>
-        <p:spPr>
-          <a:xfrm>
-            <a:off x="5029200" y="822960"/>
-            <a:ext cx="2743200" cy="256032"/>
-          </a:xfrm>
-          <a:prstGeom prst="rect">
-            <a:avLst/>
-          </a:prstGeom>
-          <a:noFill/>
-        </p:spPr>
-        <p:txBody>
-          <a:bodyPr wrap="square">
-            <a:spAutoFit/>
-          </a:bodyPr>
-          <a:lstStyle/>
-          <a:p>
-            <a:pPr algn="ctr"/>
-            <a:r>
-              <a:rPr sz="900" b="1" i="0">
-                <a:solidFill>
-                  <a:srgbClr val="1A6B8A"/>
-                </a:solidFill>
-                <a:latin typeface="Inter"/>
-              </a:rPr>
-              <a:t>✅ Completed (Multiple Iterations)</a:t>
-            </a:r>
-          </a:p>
-        </p:txBody>
-      </p:sp>
-      <p:sp>
-        <p:nvSpPr>
-          <p:cNvPr id="6" name="Rectangle 5"/>
-          <p:cNvSpPr/>
-          <p:nvPr/>
-        </p:nvSpPr>
-        <p:spPr>
-          <a:xfrm>
-            <a:off x="365760" y="1234440"/>
-            <a:ext cx="3108960" cy="2011680"/>
-          </a:xfrm>
-          <a:prstGeom prst="rect">
-            <a:avLst/>
-          </a:prstGeom>
-          <a:solidFill>
-            <a:srgbClr val="FFFFFF"/>
-          </a:solidFill>
-          <a:ln w="9525">
-            <a:solidFill>
-              <a:srgbClr val="CCC4B8"/>
-            </a:solidFill>
-          </a:ln>
-        </p:spPr>
-        <p:style>
-          <a:lnRef idx="1">
-            <a:schemeClr val="accent1"/>
-          </a:lnRef>
-          <a:fillRef idx="3">
-            <a:schemeClr val="accent1"/>
-          </a:fillRef>
-          <a:effectRef idx="2">
-            <a:schemeClr val="accent1"/>
-          </a:effectRef>
-          <a:fontRef idx="minor">
-            <a:schemeClr val="lt1"/>
-          </a:fontRef>
-        </p:style>
-        <p:txBody>
-          <a:bodyPr rtlCol="0" anchor="ctr"/>
-          <a:lstStyle/>
-          <a:p>
-            <a:pPr algn="ctr"/>
-          </a:p>
-        </p:txBody>
-      </p:sp>
-      <p:sp>
-        <p:nvSpPr>
-          <p:cNvPr id="7" name="TextBox 6"/>
-          <p:cNvSpPr txBox="1"/>
-          <p:nvPr/>
-        </p:nvSpPr>
-        <p:spPr>
-          <a:xfrm>
-            <a:off x="502920" y="1325880"/>
-            <a:ext cx="2834640" cy="256032"/>
-          </a:xfrm>
-          <a:prstGeom prst="rect">
-            <a:avLst/>
-          </a:prstGeom>
-          <a:noFill/>
-        </p:spPr>
-        <p:txBody>
-          <a:bodyPr wrap="square">
-            <a:spAutoFit/>
-          </a:bodyPr>
-          <a:lstStyle/>
-          <a:p>
-            <a:pPr algn="l"/>
-            <a:r>
-              <a:rPr sz="800" b="1" i="0">
-                <a:solidFill>
-                  <a:srgbClr val="1A6B8A"/>
-                </a:solidFill>
-                <a:latin typeface="Inter"/>
-              </a:rPr>
-              <a:t>OVERVIEW</a:t>
-            </a:r>
-          </a:p>
-        </p:txBody>
-      </p:sp>
-      <p:sp>
-        <p:nvSpPr>
-          <p:cNvPr id="8" name="TextBox 7"/>
-          <p:cNvSpPr txBox="1"/>
-          <p:nvPr/>
-        </p:nvSpPr>
-        <p:spPr>
-          <a:xfrm>
-            <a:off x="502920" y="1572768"/>
-            <a:ext cx="2834640" cy="1508760"/>
-          </a:xfrm>
-          <a:prstGeom prst="rect">
-            <a:avLst/>
-          </a:prstGeom>
-          <a:noFill/>
-        </p:spPr>
-        <p:txBody>
-          <a:bodyPr wrap="square">
-            <a:spAutoFit/>
-          </a:bodyPr>
-          <a:lstStyle/>
-          <a:p>
-            <a:pPr algn="l"/>
-            <a:r>
-              <a:rPr sz="1050" b="0" i="0">
-                <a:solidFill>
-                  <a:srgbClr val="4A4035"/>
-                </a:solidFill>
-                <a:latin typeface="Inter"/>
-              </a:rPr>
-              <a:t>A URDF is mandatory for Gazebo simulation. No pre-existing URDF matched our hardware, so one was created from an adapted open-source reference.</a:t>
-            </a:r>
-          </a:p>
-        </p:txBody>
-      </p:sp>
-      <p:sp>
-        <p:nvSpPr>
-          <p:cNvPr id="9" name="TextBox 8"/>
-          <p:cNvSpPr txBox="1"/>
-          <p:nvPr/>
-        </p:nvSpPr>
-        <p:spPr>
-          <a:xfrm>
-            <a:off x="502920" y="3337560"/>
-            <a:ext cx="2834640" cy="228600"/>
-          </a:xfrm>
-          <a:prstGeom prst="rect">
-            <a:avLst/>
-          </a:prstGeom>
-          <a:noFill/>
-        </p:spPr>
-        <p:txBody>
-          <a:bodyPr wrap="square">
-            <a:spAutoFit/>
-          </a:bodyPr>
-          <a:lstStyle/>
-          <a:p>
-            <a:pPr algn="l"/>
-            <a:r>
-              <a:rPr sz="800" b="1" i="0">
-                <a:solidFill>
-                  <a:srgbClr val="27AE60"/>
-                </a:solidFill>
-                <a:latin typeface="Inter"/>
-              </a:rPr>
-              <a:t>OUTCOME</a:t>
-            </a:r>
-          </a:p>
-        </p:txBody>
-      </p:sp>
-      <p:sp>
-        <p:nvSpPr>
-          <p:cNvPr id="10" name="TextBox 9"/>
-          <p:cNvSpPr txBox="1"/>
-          <p:nvPr/>
-        </p:nvSpPr>
-        <p:spPr>
-          <a:xfrm>
-            <a:off x="502920" y="3566160"/>
-            <a:ext cx="2834640" cy="1097280"/>
-          </a:xfrm>
-          <a:prstGeom prst="rect">
-            <a:avLst/>
-          </a:prstGeom>
-          <a:noFill/>
-        </p:spPr>
-        <p:txBody>
-          <a:bodyPr wrap="square">
-            <a:spAutoFit/>
-          </a:bodyPr>
-          <a:lstStyle/>
-          <a:p>
-            <a:pPr algn="l"/>
-            <a:r>
-              <a:rPr sz="1000" b="0" i="0">
-                <a:solidFill>
-                  <a:srgbClr val="2D6A4F"/>
-                </a:solidFill>
-                <a:latin typeface="Inter"/>
-              </a:rPr>
-              <a:t>Working Xacro URDF produced and integrated into the ROS2 workspace package my_arm_description.</a:t>
-            </a:r>
-          </a:p>
-        </p:txBody>
-      </p:sp>
-      <p:sp>
-        <p:nvSpPr>
-          <p:cNvPr id="11" name="Rectangle 10"/>
-          <p:cNvSpPr/>
-          <p:nvPr/>
-        </p:nvSpPr>
-        <p:spPr>
-          <a:xfrm>
-            <a:off x="3657600" y="1234440"/>
-            <a:ext cx="8229600" cy="1188720"/>
-          </a:xfrm>
-          <a:prstGeom prst="rect">
-            <a:avLst/>
-          </a:prstGeom>
-          <a:solidFill>
-            <a:srgbClr val="FFFFFF"/>
-          </a:solidFill>
-          <a:ln w="9525">
-            <a:solidFill>
-              <a:srgbClr val="CCC4B8"/>
-            </a:solidFill>
-          </a:ln>
-        </p:spPr>
-        <p:style>
-          <a:lnRef idx="1">
-            <a:schemeClr val="accent1"/>
-          </a:lnRef>
-          <a:fillRef idx="3">
-            <a:schemeClr val="accent1"/>
-          </a:fillRef>
-          <a:effectRef idx="2">
-            <a:schemeClr val="accent1"/>
-          </a:effectRef>
-          <a:fontRef idx="minor">
-            <a:schemeClr val="lt1"/>
-          </a:fontRef>
-        </p:style>
-        <p:txBody>
-          <a:bodyPr rtlCol="0" anchor="ctr"/>
-          <a:lstStyle/>
-          <a:p>
-            <a:pPr algn="ctr"/>
-          </a:p>
-        </p:txBody>
-      </p:sp>
-      <p:sp>
-        <p:nvSpPr>
-          <p:cNvPr id="12" name="TextBox 11"/>
-          <p:cNvSpPr txBox="1"/>
-          <p:nvPr/>
-        </p:nvSpPr>
-        <p:spPr>
-          <a:xfrm>
-            <a:off x="3794760" y="1344168"/>
-            <a:ext cx="457200" cy="1078992"/>
-          </a:xfrm>
-          <a:prstGeom prst="rect">
-            <a:avLst/>
-          </a:prstGeom>
-          <a:noFill/>
-        </p:spPr>
-        <p:txBody>
-          <a:bodyPr wrap="square">
-            <a:spAutoFit/>
-          </a:bodyPr>
-          <a:lstStyle/>
-          <a:p>
-            <a:pPr algn="l"/>
-            <a:r>
-              <a:rPr sz="900" b="1" i="0">
-                <a:solidFill>
-                  <a:srgbClr val="1A6B8A"/>
-                </a:solidFill>
-                <a:latin typeface="Inter"/>
-              </a:rPr>
-              <a:t>01</a:t>
-            </a:r>
-          </a:p>
-        </p:txBody>
-      </p:sp>
-      <p:sp>
-        <p:nvSpPr>
-          <p:cNvPr id="13" name="TextBox 12"/>
-          <p:cNvSpPr txBox="1"/>
-          <p:nvPr/>
-        </p:nvSpPr>
-        <p:spPr>
-          <a:xfrm>
-            <a:off x="4297680" y="1325880"/>
-            <a:ext cx="7406640" cy="256032"/>
-          </a:xfrm>
-          <a:prstGeom prst="rect">
-            <a:avLst/>
-          </a:prstGeom>
-          <a:noFill/>
-        </p:spPr>
-        <p:txBody>
-          <a:bodyPr wrap="square">
-            <a:spAutoFit/>
-          </a:bodyPr>
-          <a:lstStyle/>
-          <a:p>
-            <a:pPr algn="l"/>
-            <a:r>
-              <a:rPr sz="1200" b="1" i="0">
-                <a:solidFill>
-                  <a:srgbClr val="1C1A16"/>
-                </a:solidFill>
-                <a:latin typeface="Inter"/>
-              </a:rPr>
-              <a:t>Challenge: No Matching URDF</a:t>
-            </a:r>
-          </a:p>
-        </p:txBody>
-      </p:sp>
-      <p:sp>
-        <p:nvSpPr>
-          <p:cNvPr id="14" name="TextBox 13"/>
-          <p:cNvSpPr txBox="1"/>
-          <p:nvPr/>
-        </p:nvSpPr>
-        <p:spPr>
-          <a:xfrm>
-            <a:off x="4297680" y="1581912"/>
-            <a:ext cx="7406640" cy="804672"/>
-          </a:xfrm>
-          <a:prstGeom prst="rect">
-            <a:avLst/>
-          </a:prstGeom>
-          <a:noFill/>
-        </p:spPr>
-        <p:txBody>
-          <a:bodyPr wrap="square">
-            <a:spAutoFit/>
-          </a:bodyPr>
-          <a:lstStyle/>
-          <a:p>
-            <a:pPr algn="l"/>
-            <a:r>
-              <a:rPr sz="1000" b="0" i="0">
-                <a:solidFill>
-                  <a:srgbClr val="8A7D6E"/>
-                </a:solidFill>
-                <a:latin typeface="Inter"/>
-              </a:rPr>
-              <a:t>The purchased 6-DOF metal arm kit has no freely available 3D model or URDF online. Without a URDF, simulation and motion planning are impossible.</a:t>
-            </a:r>
-          </a:p>
-        </p:txBody>
-      </p:sp>
-      <p:sp>
-        <p:nvSpPr>
-          <p:cNvPr id="15" name="Rectangle 14"/>
-          <p:cNvSpPr/>
-          <p:nvPr/>
-        </p:nvSpPr>
-        <p:spPr>
-          <a:xfrm>
-            <a:off x="3657600" y="2514600"/>
-            <a:ext cx="8229600" cy="1188720"/>
-          </a:xfrm>
-          <a:prstGeom prst="rect">
-            <a:avLst/>
-          </a:prstGeom>
-          <a:solidFill>
-            <a:srgbClr val="FFFFFF"/>
-          </a:solidFill>
-          <a:ln w="9525">
-            <a:solidFill>
-              <a:srgbClr val="CCC4B8"/>
-            </a:solidFill>
-          </a:ln>
-        </p:spPr>
-        <p:style>
-          <a:lnRef idx="1">
-            <a:schemeClr val="accent1"/>
-          </a:lnRef>
-          <a:fillRef idx="3">
-            <a:schemeClr val="accent1"/>
-          </a:fillRef>
-          <a:effectRef idx="2">
-            <a:schemeClr val="accent1"/>
-          </a:effectRef>
-          <a:fontRef idx="minor">
-            <a:schemeClr val="lt1"/>
-          </a:fontRef>
-        </p:style>
-        <p:txBody>
-          <a:bodyPr rtlCol="0" anchor="ctr"/>
-          <a:lstStyle/>
-          <a:p>
-            <a:pPr algn="ctr"/>
-          </a:p>
-        </p:txBody>
-      </p:sp>
-      <p:sp>
-        <p:nvSpPr>
-          <p:cNvPr id="16" name="TextBox 15"/>
-          <p:cNvSpPr txBox="1"/>
-          <p:nvPr/>
-        </p:nvSpPr>
-        <p:spPr>
-          <a:xfrm>
-            <a:off x="3794760" y="2624328"/>
-            <a:ext cx="457200" cy="1078992"/>
-          </a:xfrm>
-          <a:prstGeom prst="rect">
-            <a:avLst/>
-          </a:prstGeom>
-          <a:noFill/>
-        </p:spPr>
-        <p:txBody>
-          <a:bodyPr wrap="square">
-            <a:spAutoFit/>
-          </a:bodyPr>
-          <a:lstStyle/>
-          <a:p>
-            <a:pPr algn="l"/>
-            <a:r>
-              <a:rPr sz="900" b="1" i="0">
-                <a:solidFill>
-                  <a:srgbClr val="1A6B8A"/>
-                </a:solidFill>
-                <a:latin typeface="Inter"/>
-              </a:rPr>
-              <a:t>02</a:t>
-            </a:r>
-          </a:p>
-        </p:txBody>
-      </p:sp>
-      <p:sp>
-        <p:nvSpPr>
-          <p:cNvPr id="17" name="TextBox 16"/>
-          <p:cNvSpPr txBox="1"/>
-          <p:nvPr/>
-        </p:nvSpPr>
-        <p:spPr>
-          <a:xfrm>
-            <a:off x="4297680" y="2606040"/>
-            <a:ext cx="7406640" cy="256032"/>
-          </a:xfrm>
-          <a:prstGeom prst="rect">
-            <a:avLst/>
-          </a:prstGeom>
-          <a:noFill/>
-        </p:spPr>
-        <p:txBody>
-          <a:bodyPr wrap="square">
-            <a:spAutoFit/>
-          </a:bodyPr>
-          <a:lstStyle/>
-          <a:p>
-            <a:pPr algn="l"/>
-            <a:r>
-              <a:rPr sz="1200" b="1" i="0">
-                <a:solidFill>
-                  <a:srgbClr val="1C1A16"/>
-                </a:solidFill>
-                <a:latin typeface="Inter"/>
-              </a:rPr>
-              <a:t>Reference Model Located</a:t>
-            </a:r>
-          </a:p>
-        </p:txBody>
-      </p:sp>
-      <p:sp>
-        <p:nvSpPr>
-          <p:cNvPr id="18" name="TextBox 17"/>
-          <p:cNvSpPr txBox="1"/>
-          <p:nvPr/>
-        </p:nvSpPr>
-        <p:spPr>
-          <a:xfrm>
-            <a:off x="4297680" y="2862072"/>
-            <a:ext cx="7406640" cy="804672"/>
-          </a:xfrm>
-          <a:prstGeom prst="rect">
-            <a:avLst/>
-          </a:prstGeom>
-          <a:noFill/>
-        </p:spPr>
-        <p:txBody>
-          <a:bodyPr wrap="square">
-            <a:spAutoFit/>
-          </a:bodyPr>
-          <a:lstStyle/>
-          <a:p>
-            <a:pPr algn="l"/>
-            <a:r>
-              <a:rPr sz="1000" b="0" i="0">
-                <a:solidFill>
-                  <a:srgbClr val="8A7D6E"/>
-                </a:solidFill>
-                <a:latin typeface="Inter"/>
-              </a:rPr>
-              <a:t>ferasboulala/five-dof-robot-arm on GitHub was used as a base. Mesh proportions and joint placements were studied against the physical hardware.</a:t>
-            </a:r>
-          </a:p>
-        </p:txBody>
-      </p:sp>
-      <p:sp>
-        <p:nvSpPr>
-          <p:cNvPr id="19" name="Rectangle 18"/>
-          <p:cNvSpPr/>
-          <p:nvPr/>
-        </p:nvSpPr>
-        <p:spPr>
-          <a:xfrm>
-            <a:off x="3657600" y="3794760"/>
-            <a:ext cx="8229600" cy="1188720"/>
-          </a:xfrm>
-          <a:prstGeom prst="rect">
-            <a:avLst/>
-          </a:prstGeom>
-          <a:solidFill>
-            <a:srgbClr val="FFFFFF"/>
-          </a:solidFill>
-          <a:ln w="9525">
-            <a:solidFill>
-              <a:srgbClr val="CCC4B8"/>
-            </a:solidFill>
-          </a:ln>
-        </p:spPr>
-        <p:style>
-          <a:lnRef idx="1">
-            <a:schemeClr val="accent1"/>
-          </a:lnRef>
-          <a:fillRef idx="3">
-            <a:schemeClr val="accent1"/>
-          </a:fillRef>
-          <a:effectRef idx="2">
-            <a:schemeClr val="accent1"/>
-          </a:effectRef>
-          <a:fontRef idx="minor">
-            <a:schemeClr val="lt1"/>
-          </a:fontRef>
-        </p:style>
-        <p:txBody>
-          <a:bodyPr rtlCol="0" anchor="ctr"/>
-          <a:lstStyle/>
-          <a:p>
-            <a:pPr algn="ctr"/>
-          </a:p>
-        </p:txBody>
-      </p:sp>
-      <p:sp>
-        <p:nvSpPr>
-          <p:cNvPr id="20" name="TextBox 19"/>
-          <p:cNvSpPr txBox="1"/>
-          <p:nvPr/>
-        </p:nvSpPr>
-        <p:spPr>
-          <a:xfrm>
-            <a:off x="3794760" y="3904488"/>
-            <a:ext cx="457200" cy="1078992"/>
-          </a:xfrm>
-          <a:prstGeom prst="rect">
-            <a:avLst/>
-          </a:prstGeom>
-          <a:noFill/>
-        </p:spPr>
-        <p:txBody>
-          <a:bodyPr wrap="square">
-            <a:spAutoFit/>
-          </a:bodyPr>
-          <a:lstStyle/>
-          <a:p>
-            <a:pPr algn="l"/>
-            <a:r>
-              <a:rPr sz="900" b="1" i="0">
-                <a:solidFill>
-                  <a:srgbClr val="1A6B8A"/>
-                </a:solidFill>
-                <a:latin typeface="Inter"/>
-              </a:rPr>
-              <a:t>03</a:t>
-            </a:r>
-          </a:p>
-        </p:txBody>
-      </p:sp>
-      <p:sp>
-        <p:nvSpPr>
-          <p:cNvPr id="21" name="TextBox 20"/>
-          <p:cNvSpPr txBox="1"/>
-          <p:nvPr/>
-        </p:nvSpPr>
-        <p:spPr>
-          <a:xfrm>
-            <a:off x="4297680" y="3886200"/>
-            <a:ext cx="7406640" cy="256032"/>
-          </a:xfrm>
-          <a:prstGeom prst="rect">
-            <a:avLst/>
-          </a:prstGeom>
-          <a:noFill/>
-        </p:spPr>
-        <p:txBody>
-          <a:bodyPr wrap="square">
-            <a:spAutoFit/>
-          </a:bodyPr>
-          <a:lstStyle/>
-          <a:p>
-            <a:pPr algn="l"/>
-            <a:r>
-              <a:rPr sz="1200" b="1" i="0">
-                <a:solidFill>
-                  <a:srgbClr val="1C1A16"/>
-                </a:solidFill>
-                <a:latin typeface="Inter"/>
-              </a:rPr>
-              <a:t>Iterative Adaptation</a:t>
-            </a:r>
-          </a:p>
-        </p:txBody>
-      </p:sp>
-      <p:sp>
-        <p:nvSpPr>
-          <p:cNvPr id="22" name="TextBox 21"/>
-          <p:cNvSpPr txBox="1"/>
-          <p:nvPr/>
-        </p:nvSpPr>
-        <p:spPr>
-          <a:xfrm>
-            <a:off x="4297680" y="4142232"/>
-            <a:ext cx="7406640" cy="804672"/>
-          </a:xfrm>
-          <a:prstGeom prst="rect">
-            <a:avLst/>
-          </a:prstGeom>
-          <a:noFill/>
-        </p:spPr>
-        <p:txBody>
-          <a:bodyPr wrap="square">
-            <a:spAutoFit/>
-          </a:bodyPr>
-          <a:lstStyle/>
-          <a:p>
-            <a:pPr algn="l"/>
-            <a:r>
-              <a:rPr sz="1000" b="0" i="0">
-                <a:solidFill>
-                  <a:srgbClr val="8A7D6E"/>
-                </a:solidFill>
-                <a:latin typeface="Inter"/>
-              </a:rPr>
-              <a:t>Multiple attempts: adjusting link lengths, correcting joint axes, converting to ROS2 Xacro format, adding the 6th joint and gripper, fixing mesh collision/inertia errors.</a:t>
-            </a:r>
-          </a:p>
-        </p:txBody>
-      </p:sp>
-      <p:sp>
-        <p:nvSpPr>
-          <p:cNvPr id="23" name="Rectangle 22"/>
-          <p:cNvSpPr/>
-          <p:nvPr/>
-        </p:nvSpPr>
-        <p:spPr>
-          <a:xfrm>
-            <a:off x="3657600" y="5074920"/>
-            <a:ext cx="8229600" cy="1188720"/>
-          </a:xfrm>
-          <a:prstGeom prst="rect">
-            <a:avLst/>
-          </a:prstGeom>
-          <a:solidFill>
-            <a:srgbClr val="FFFFFF"/>
-          </a:solidFill>
-          <a:ln w="9525">
-            <a:solidFill>
-              <a:srgbClr val="CCC4B8"/>
-            </a:solidFill>
-          </a:ln>
-        </p:spPr>
-        <p:style>
-          <a:lnRef idx="1">
-            <a:schemeClr val="accent1"/>
-          </a:lnRef>
-          <a:fillRef idx="3">
-            <a:schemeClr val="accent1"/>
-          </a:fillRef>
-          <a:effectRef idx="2">
-            <a:schemeClr val="accent1"/>
-          </a:effectRef>
-          <a:fontRef idx="minor">
-            <a:schemeClr val="lt1"/>
-          </a:fontRef>
-        </p:style>
-        <p:txBody>
-          <a:bodyPr rtlCol="0" anchor="ctr"/>
-          <a:lstStyle/>
-          <a:p>
-            <a:pPr algn="ctr"/>
-          </a:p>
-        </p:txBody>
-      </p:sp>
-      <p:sp>
-        <p:nvSpPr>
-          <p:cNvPr id="24" name="TextBox 23"/>
-          <p:cNvSpPr txBox="1"/>
-          <p:nvPr/>
-        </p:nvSpPr>
-        <p:spPr>
-          <a:xfrm>
-            <a:off x="3794760" y="5184648"/>
-            <a:ext cx="457200" cy="1078992"/>
-          </a:xfrm>
-          <a:prstGeom prst="rect">
-            <a:avLst/>
-          </a:prstGeom>
-          <a:noFill/>
-        </p:spPr>
-        <p:txBody>
-          <a:bodyPr wrap="square">
-            <a:spAutoFit/>
-          </a:bodyPr>
-          <a:lstStyle/>
-          <a:p>
-            <a:pPr algn="l"/>
-            <a:r>
-              <a:rPr sz="900" b="1" i="0">
-                <a:solidFill>
-                  <a:srgbClr val="1A6B8A"/>
-                </a:solidFill>
-                <a:latin typeface="Inter"/>
-              </a:rPr>
-              <a:t>04</a:t>
-            </a:r>
-          </a:p>
-        </p:txBody>
-      </p:sp>
-      <p:sp>
-        <p:nvSpPr>
-          <p:cNvPr id="25" name="TextBox 24"/>
-          <p:cNvSpPr txBox="1"/>
-          <p:nvPr/>
-        </p:nvSpPr>
-        <p:spPr>
-          <a:xfrm>
-            <a:off x="4297680" y="5166360"/>
-            <a:ext cx="7406640" cy="256032"/>
-          </a:xfrm>
-          <a:prstGeom prst="rect">
-            <a:avLst/>
-          </a:prstGeom>
-          <a:noFill/>
-        </p:spPr>
-        <p:txBody>
-          <a:bodyPr wrap="square">
-            <a:spAutoFit/>
-          </a:bodyPr>
-          <a:lstStyle/>
-          <a:p>
-            <a:pPr algn="l"/>
-            <a:r>
-              <a:rPr sz="1200" b="1" i="0">
-                <a:solidFill>
-                  <a:srgbClr val="1C1A16"/>
-                </a:solidFill>
-                <a:latin typeface="Inter"/>
-              </a:rPr>
-              <a:t>Working Model Achieved</a:t>
-            </a:r>
-          </a:p>
-        </p:txBody>
-      </p:sp>
-      <p:sp>
-        <p:nvSpPr>
-          <p:cNvPr id="26" name="TextBox 25"/>
-          <p:cNvSpPr txBox="1"/>
-          <p:nvPr/>
-        </p:nvSpPr>
-        <p:spPr>
-          <a:xfrm>
-            <a:off x="4297680" y="5422392"/>
-            <a:ext cx="7406640" cy="804672"/>
-          </a:xfrm>
-          <a:prstGeom prst="rect">
-            <a:avLst/>
-          </a:prstGeom>
-          <a:noFill/>
-        </p:spPr>
-        <p:txBody>
-          <a:bodyPr wrap="square">
-            <a:spAutoFit/>
-          </a:bodyPr>
-          <a:lstStyle/>
-          <a:p>
-            <a:pPr algn="l"/>
-            <a:r>
-              <a:rPr sz="1000" b="0" i="0">
-                <a:solidFill>
-                  <a:srgbClr val="8A7D6E"/>
-                </a:solidFill>
-                <a:latin typeface="Inter"/>
-              </a:rPr>
-              <a:t>Stable Xacro URDF produced with 6 correctly defined joints, link inertias, and collision geometry — sufficient for simulation and motion planning.</a:t>
-            </a:r>
-          </a:p>
-        </p:txBody>
-      </p:sp>
+      <p:pic>
+        <p:nvPicPr>
+          <p:cNvPr id="2" name="Picture 1" descr="HARWARE REPRESENTAION.png"/>
+          <p:cNvPicPr>
+            <a:picLocks noChangeAspect="1"/>
+          </p:cNvPicPr>
+          <p:nvPr/>
+        </p:nvPicPr>
+        <p:blipFill>
+          <a:blip r:embed="rId2"/>
+          <a:stretch>
+            <a:fillRect/>
+          </a:stretch>
+        </p:blipFill>
+        <p:spPr>
+          <a:xfrm>
+            <a:off x="-49149" y="0"/>
+            <a:ext cx="12287250" cy="6858000"/>
+          </a:xfrm>
+          <a:prstGeom prst="rect">
+            <a:avLst/>
+          </a:prstGeom>
+        </p:spPr>
+      </p:pic>
     </p:spTree>
   </p:cSld>
   <p:clrMapOvr>
@@ -8314,939 +9542,30 @@
         <p:nvPr/>
       </p:nvGrpSpPr>
       <p:grpSpPr/>
-      <p:sp>
-        <p:nvSpPr>
-          <p:cNvPr id="2" name="Rectangle 1"/>
-          <p:cNvSpPr/>
-          <p:nvPr/>
-        </p:nvSpPr>
-        <p:spPr>
-          <a:xfrm>
-            <a:off x="0" y="0"/>
-            <a:ext cx="12188952" cy="76200"/>
-          </a:xfrm>
-          <a:prstGeom prst="rect">
-            <a:avLst/>
-          </a:prstGeom>
-          <a:solidFill>
-            <a:srgbClr val="1A6B8A"/>
-          </a:solidFill>
-          <a:ln>
-            <a:noFill/>
-          </a:ln>
-        </p:spPr>
-        <p:style>
-          <a:lnRef idx="1">
-            <a:schemeClr val="accent1"/>
-          </a:lnRef>
-          <a:fillRef idx="3">
-            <a:schemeClr val="accent1"/>
-          </a:fillRef>
-          <a:effectRef idx="2">
-            <a:schemeClr val="accent1"/>
-          </a:effectRef>
-          <a:fontRef idx="minor">
-            <a:schemeClr val="lt1"/>
-          </a:fontRef>
-        </p:style>
-        <p:txBody>
-          <a:bodyPr rtlCol="0" anchor="ctr"/>
-          <a:lstStyle/>
-          <a:p>
-            <a:pPr algn="ctr"/>
-          </a:p>
-        </p:txBody>
-      </p:sp>
-      <p:sp>
-        <p:nvSpPr>
-          <p:cNvPr id="3" name="TextBox 2"/>
-          <p:cNvSpPr txBox="1"/>
-          <p:nvPr/>
-        </p:nvSpPr>
-        <p:spPr>
-          <a:xfrm>
-            <a:off x="548640" y="320040"/>
-            <a:ext cx="11064240" cy="594360"/>
-          </a:xfrm>
-          <a:prstGeom prst="rect">
-            <a:avLst/>
-          </a:prstGeom>
-          <a:noFill/>
-        </p:spPr>
-        <p:txBody>
-          <a:bodyPr wrap="square">
-            <a:spAutoFit/>
-          </a:bodyPr>
-          <a:lstStyle/>
-          <a:p>
-            <a:pPr algn="ctr"/>
-            <a:r>
-              <a:rPr sz="2600" b="1" i="0">
-                <a:solidFill>
-                  <a:srgbClr val="1C1A16"/>
-                </a:solidFill>
-                <a:latin typeface="Inter"/>
-              </a:rPr>
-              <a:t>Phase 3 — Simulation in Gazebo &amp; RViz</a:t>
-            </a:r>
-          </a:p>
-        </p:txBody>
-      </p:sp>
-      <p:sp>
-        <p:nvSpPr>
-          <p:cNvPr id="4" name="TextBox 3"/>
-          <p:cNvSpPr txBox="1"/>
-          <p:nvPr/>
-        </p:nvSpPr>
-        <p:spPr>
-          <a:xfrm>
-            <a:off x="182880" y="6537960"/>
-            <a:ext cx="3657600" cy="274320"/>
-          </a:xfrm>
-          <a:prstGeom prst="rect">
-            <a:avLst/>
-          </a:prstGeom>
-          <a:noFill/>
-        </p:spPr>
-        <p:txBody>
-          <a:bodyPr wrap="square">
-            <a:spAutoFit/>
-          </a:bodyPr>
-          <a:lstStyle/>
-          <a:p>
-            <a:pPr algn="l"/>
-            <a:r>
-              <a:rPr sz="900" b="0" i="0">
-                <a:solidFill>
-                  <a:srgbClr val="8A7D6E"/>
-                </a:solidFill>
-                <a:latin typeface="Inter"/>
-              </a:rPr>
-              <a:t>Phase 3 — Simulation in Gazebo &amp; RViz   |   6/10</a:t>
-            </a:r>
-          </a:p>
-        </p:txBody>
-      </p:sp>
-      <p:sp>
-        <p:nvSpPr>
-          <p:cNvPr id="5" name="TextBox 4"/>
-          <p:cNvSpPr txBox="1"/>
-          <p:nvPr/>
-        </p:nvSpPr>
-        <p:spPr>
-          <a:xfrm>
-            <a:off x="5029200" y="822960"/>
-            <a:ext cx="2743200" cy="256032"/>
-          </a:xfrm>
-          <a:prstGeom prst="rect">
-            <a:avLst/>
-          </a:prstGeom>
-          <a:noFill/>
-        </p:spPr>
-        <p:txBody>
-          <a:bodyPr wrap="square">
-            <a:spAutoFit/>
-          </a:bodyPr>
-          <a:lstStyle/>
-          <a:p>
-            <a:pPr algn="ctr"/>
-            <a:r>
-              <a:rPr sz="900" b="1" i="0">
-                <a:solidFill>
-                  <a:srgbClr val="1A6B8A"/>
-                </a:solidFill>
-                <a:latin typeface="Inter"/>
-              </a:rPr>
-              <a:t>✅ Completed</a:t>
-            </a:r>
-          </a:p>
-        </p:txBody>
-      </p:sp>
-      <p:sp>
-        <p:nvSpPr>
-          <p:cNvPr id="6" name="Rectangle 5"/>
-          <p:cNvSpPr/>
-          <p:nvPr/>
-        </p:nvSpPr>
-        <p:spPr>
-          <a:xfrm>
-            <a:off x="365760" y="1234440"/>
-            <a:ext cx="3108960" cy="2011680"/>
-          </a:xfrm>
-          <a:prstGeom prst="rect">
-            <a:avLst/>
-          </a:prstGeom>
-          <a:solidFill>
-            <a:srgbClr val="FFFFFF"/>
-          </a:solidFill>
-          <a:ln w="9525">
-            <a:solidFill>
-              <a:srgbClr val="CCC4B8"/>
-            </a:solidFill>
-          </a:ln>
-        </p:spPr>
-        <p:style>
-          <a:lnRef idx="1">
-            <a:schemeClr val="accent1"/>
-          </a:lnRef>
-          <a:fillRef idx="3">
-            <a:schemeClr val="accent1"/>
-          </a:fillRef>
-          <a:effectRef idx="2">
-            <a:schemeClr val="accent1"/>
-          </a:effectRef>
-          <a:fontRef idx="minor">
-            <a:schemeClr val="lt1"/>
-          </a:fontRef>
-        </p:style>
-        <p:txBody>
-          <a:bodyPr rtlCol="0" anchor="ctr"/>
-          <a:lstStyle/>
-          <a:p>
-            <a:pPr algn="ctr"/>
-          </a:p>
-        </p:txBody>
-      </p:sp>
-      <p:sp>
-        <p:nvSpPr>
-          <p:cNvPr id="7" name="TextBox 6"/>
-          <p:cNvSpPr txBox="1"/>
-          <p:nvPr/>
-        </p:nvSpPr>
-        <p:spPr>
-          <a:xfrm>
-            <a:off x="502920" y="1325880"/>
-            <a:ext cx="2834640" cy="256032"/>
-          </a:xfrm>
-          <a:prstGeom prst="rect">
-            <a:avLst/>
-          </a:prstGeom>
-          <a:noFill/>
-        </p:spPr>
-        <p:txBody>
-          <a:bodyPr wrap="square">
-            <a:spAutoFit/>
-          </a:bodyPr>
-          <a:lstStyle/>
-          <a:p>
-            <a:pPr algn="l"/>
-            <a:r>
-              <a:rPr sz="800" b="1" i="0">
-                <a:solidFill>
-                  <a:srgbClr val="1A6B8A"/>
-                </a:solidFill>
-                <a:latin typeface="Inter"/>
-              </a:rPr>
-              <a:t>OVERVIEW</a:t>
-            </a:r>
-          </a:p>
-        </p:txBody>
-      </p:sp>
-      <p:sp>
-        <p:nvSpPr>
-          <p:cNvPr id="8" name="TextBox 7"/>
-          <p:cNvSpPr txBox="1"/>
-          <p:nvPr/>
-        </p:nvSpPr>
-        <p:spPr>
-          <a:xfrm>
-            <a:off x="502920" y="1572768"/>
-            <a:ext cx="2834640" cy="1508760"/>
-          </a:xfrm>
-          <a:prstGeom prst="rect">
-            <a:avLst/>
-          </a:prstGeom>
-          <a:noFill/>
-        </p:spPr>
-        <p:txBody>
-          <a:bodyPr wrap="square">
-            <a:spAutoFit/>
-          </a:bodyPr>
-          <a:lstStyle/>
-          <a:p>
-            <a:pPr algn="l"/>
-            <a:r>
-              <a:rPr sz="1050" b="0" i="0">
-                <a:solidFill>
-                  <a:srgbClr val="4A4035"/>
-                </a:solidFill>
-                <a:latin typeface="Inter"/>
-              </a:rPr>
-              <a:t>With the URDF ready, the arm was loaded into Gazebo Harmonic (physics sim) and RViz (kinematic visualisation) as the primary testbed before hardware deployment.</a:t>
-            </a:r>
-          </a:p>
-        </p:txBody>
-      </p:sp>
-      <p:sp>
-        <p:nvSpPr>
-          <p:cNvPr id="9" name="TextBox 8"/>
-          <p:cNvSpPr txBox="1"/>
-          <p:nvPr/>
-        </p:nvSpPr>
-        <p:spPr>
-          <a:xfrm>
-            <a:off x="502920" y="3337560"/>
-            <a:ext cx="2834640" cy="228600"/>
-          </a:xfrm>
-          <a:prstGeom prst="rect">
-            <a:avLst/>
-          </a:prstGeom>
-          <a:noFill/>
-        </p:spPr>
-        <p:txBody>
-          <a:bodyPr wrap="square">
-            <a:spAutoFit/>
-          </a:bodyPr>
-          <a:lstStyle/>
-          <a:p>
-            <a:pPr algn="l"/>
-            <a:r>
-              <a:rPr sz="800" b="1" i="0">
-                <a:solidFill>
-                  <a:srgbClr val="27AE60"/>
-                </a:solidFill>
-                <a:latin typeface="Inter"/>
-              </a:rPr>
-              <a:t>OUTCOME</a:t>
-            </a:r>
-          </a:p>
-        </p:txBody>
-      </p:sp>
-      <p:sp>
-        <p:nvSpPr>
-          <p:cNvPr id="10" name="TextBox 9"/>
-          <p:cNvSpPr txBox="1"/>
-          <p:nvPr/>
-        </p:nvSpPr>
-        <p:spPr>
-          <a:xfrm>
-            <a:off x="502920" y="3566160"/>
-            <a:ext cx="2834640" cy="1097280"/>
-          </a:xfrm>
-          <a:prstGeom prst="rect">
-            <a:avLst/>
-          </a:prstGeom>
-          <a:noFill/>
-        </p:spPr>
-        <p:txBody>
-          <a:bodyPr wrap="square">
-            <a:spAutoFit/>
-          </a:bodyPr>
-          <a:lstStyle/>
-          <a:p>
-            <a:pPr algn="l"/>
-            <a:r>
-              <a:rPr sz="1000" b="0" i="0">
-                <a:solidFill>
-                  <a:srgbClr val="2D6A4F"/>
-                </a:solidFill>
-                <a:latin typeface="Inter"/>
-              </a:rPr>
-              <a:t>Arm simulates correctly in Gazebo with physics-accurate joint motion. Trajectory commands execute reliably via ROS2 topics.</a:t>
-            </a:r>
-          </a:p>
-        </p:txBody>
-      </p:sp>
-      <p:sp>
-        <p:nvSpPr>
-          <p:cNvPr id="11" name="Rectangle 10"/>
-          <p:cNvSpPr/>
-          <p:nvPr/>
-        </p:nvSpPr>
-        <p:spPr>
-          <a:xfrm>
-            <a:off x="3657600" y="1234440"/>
-            <a:ext cx="8229600" cy="1188720"/>
-          </a:xfrm>
-          <a:prstGeom prst="rect">
-            <a:avLst/>
-          </a:prstGeom>
-          <a:solidFill>
-            <a:srgbClr val="FFFFFF"/>
-          </a:solidFill>
-          <a:ln w="9525">
-            <a:solidFill>
-              <a:srgbClr val="CCC4B8"/>
-            </a:solidFill>
-          </a:ln>
-        </p:spPr>
-        <p:style>
-          <a:lnRef idx="1">
-            <a:schemeClr val="accent1"/>
-          </a:lnRef>
-          <a:fillRef idx="3">
-            <a:schemeClr val="accent1"/>
-          </a:fillRef>
-          <a:effectRef idx="2">
-            <a:schemeClr val="accent1"/>
-          </a:effectRef>
-          <a:fontRef idx="minor">
-            <a:schemeClr val="lt1"/>
-          </a:fontRef>
-        </p:style>
-        <p:txBody>
-          <a:bodyPr rtlCol="0" anchor="ctr"/>
-          <a:lstStyle/>
-          <a:p>
-            <a:pPr algn="ctr"/>
-          </a:p>
-        </p:txBody>
-      </p:sp>
-      <p:sp>
-        <p:nvSpPr>
-          <p:cNvPr id="12" name="TextBox 11"/>
-          <p:cNvSpPr txBox="1"/>
-          <p:nvPr/>
-        </p:nvSpPr>
-        <p:spPr>
-          <a:xfrm>
-            <a:off x="3794760" y="1344168"/>
-            <a:ext cx="457200" cy="1078992"/>
-          </a:xfrm>
-          <a:prstGeom prst="rect">
-            <a:avLst/>
-          </a:prstGeom>
-          <a:noFill/>
-        </p:spPr>
-        <p:txBody>
-          <a:bodyPr wrap="square">
-            <a:spAutoFit/>
-          </a:bodyPr>
-          <a:lstStyle/>
-          <a:p>
-            <a:pPr algn="l"/>
-            <a:r>
-              <a:rPr sz="900" b="1" i="0">
-                <a:solidFill>
-                  <a:srgbClr val="1A6B8A"/>
-                </a:solidFill>
-                <a:latin typeface="Inter"/>
-              </a:rPr>
-              <a:t>01</a:t>
-            </a:r>
-          </a:p>
-        </p:txBody>
-      </p:sp>
-      <p:sp>
-        <p:nvSpPr>
-          <p:cNvPr id="13" name="TextBox 12"/>
-          <p:cNvSpPr txBox="1"/>
-          <p:nvPr/>
-        </p:nvSpPr>
-        <p:spPr>
-          <a:xfrm>
-            <a:off x="4297680" y="1325880"/>
-            <a:ext cx="7406640" cy="256032"/>
-          </a:xfrm>
-          <a:prstGeom prst="rect">
-            <a:avLst/>
-          </a:prstGeom>
-          <a:noFill/>
-        </p:spPr>
-        <p:txBody>
-          <a:bodyPr wrap="square">
-            <a:spAutoFit/>
-          </a:bodyPr>
-          <a:lstStyle/>
-          <a:p>
-            <a:pPr algn="l"/>
-            <a:r>
-              <a:rPr sz="1200" b="1" i="0">
-                <a:solidFill>
-                  <a:srgbClr val="1C1A16"/>
-                </a:solidFill>
-                <a:latin typeface="Inter"/>
-              </a:rPr>
-              <a:t>RViz Visualisation</a:t>
-            </a:r>
-          </a:p>
-        </p:txBody>
-      </p:sp>
-      <p:sp>
-        <p:nvSpPr>
-          <p:cNvPr id="14" name="TextBox 13"/>
-          <p:cNvSpPr txBox="1"/>
-          <p:nvPr/>
-        </p:nvSpPr>
-        <p:spPr>
-          <a:xfrm>
-            <a:off x="4297680" y="1581912"/>
-            <a:ext cx="7406640" cy="804672"/>
-          </a:xfrm>
-          <a:prstGeom prst="rect">
-            <a:avLst/>
-          </a:prstGeom>
-          <a:noFill/>
-        </p:spPr>
-        <p:txBody>
-          <a:bodyPr wrap="square">
-            <a:spAutoFit/>
-          </a:bodyPr>
-          <a:lstStyle/>
-          <a:p>
-            <a:pPr algn="l"/>
-            <a:r>
-              <a:rPr sz="1000" b="0" i="0">
-                <a:solidFill>
-                  <a:srgbClr val="8A7D6E"/>
-                </a:solidFill>
-                <a:latin typeface="Inter"/>
-              </a:rPr>
-              <a:t>Loaded via display.launch.py. joint_state_publisher_gui sliders confirmed all 6 joints move correctly. Link transforms verified.</a:t>
-            </a:r>
-          </a:p>
-        </p:txBody>
-      </p:sp>
-      <p:sp>
-        <p:nvSpPr>
-          <p:cNvPr id="15" name="Rectangle 14"/>
-          <p:cNvSpPr/>
-          <p:nvPr/>
-        </p:nvSpPr>
-        <p:spPr>
-          <a:xfrm>
-            <a:off x="3657600" y="2514600"/>
-            <a:ext cx="8229600" cy="1188720"/>
-          </a:xfrm>
-          <a:prstGeom prst="rect">
-            <a:avLst/>
-          </a:prstGeom>
-          <a:solidFill>
-            <a:srgbClr val="FFFFFF"/>
-          </a:solidFill>
-          <a:ln w="9525">
-            <a:solidFill>
-              <a:srgbClr val="CCC4B8"/>
-            </a:solidFill>
-          </a:ln>
-        </p:spPr>
-        <p:style>
-          <a:lnRef idx="1">
-            <a:schemeClr val="accent1"/>
-          </a:lnRef>
-          <a:fillRef idx="3">
-            <a:schemeClr val="accent1"/>
-          </a:fillRef>
-          <a:effectRef idx="2">
-            <a:schemeClr val="accent1"/>
-          </a:effectRef>
-          <a:fontRef idx="minor">
-            <a:schemeClr val="lt1"/>
-          </a:fontRef>
-        </p:style>
-        <p:txBody>
-          <a:bodyPr rtlCol="0" anchor="ctr"/>
-          <a:lstStyle/>
-          <a:p>
-            <a:pPr algn="ctr"/>
-          </a:p>
-        </p:txBody>
-      </p:sp>
-      <p:sp>
-        <p:nvSpPr>
-          <p:cNvPr id="16" name="TextBox 15"/>
-          <p:cNvSpPr txBox="1"/>
-          <p:nvPr/>
-        </p:nvSpPr>
-        <p:spPr>
-          <a:xfrm>
-            <a:off x="3794760" y="2624328"/>
-            <a:ext cx="457200" cy="1078992"/>
-          </a:xfrm>
-          <a:prstGeom prst="rect">
-            <a:avLst/>
-          </a:prstGeom>
-          <a:noFill/>
-        </p:spPr>
-        <p:txBody>
-          <a:bodyPr wrap="square">
-            <a:spAutoFit/>
-          </a:bodyPr>
-          <a:lstStyle/>
-          <a:p>
-            <a:pPr algn="l"/>
-            <a:r>
-              <a:rPr sz="900" b="1" i="0">
-                <a:solidFill>
-                  <a:srgbClr val="1A6B8A"/>
-                </a:solidFill>
-                <a:latin typeface="Inter"/>
-              </a:rPr>
-              <a:t>02</a:t>
-            </a:r>
-          </a:p>
-        </p:txBody>
-      </p:sp>
-      <p:sp>
-        <p:nvSpPr>
-          <p:cNvPr id="17" name="TextBox 16"/>
-          <p:cNvSpPr txBox="1"/>
-          <p:nvPr/>
-        </p:nvSpPr>
-        <p:spPr>
-          <a:xfrm>
-            <a:off x="4297680" y="2606040"/>
-            <a:ext cx="7406640" cy="256032"/>
-          </a:xfrm>
-          <a:prstGeom prst="rect">
-            <a:avLst/>
-          </a:prstGeom>
-          <a:noFill/>
-        </p:spPr>
-        <p:txBody>
-          <a:bodyPr wrap="square">
-            <a:spAutoFit/>
-          </a:bodyPr>
-          <a:lstStyle/>
-          <a:p>
-            <a:pPr algn="l"/>
-            <a:r>
-              <a:rPr sz="1200" b="1" i="0">
-                <a:solidFill>
-                  <a:srgbClr val="1C1A16"/>
-                </a:solidFill>
-                <a:latin typeface="Inter"/>
-              </a:rPr>
-              <a:t>Gazebo Harmonic Launch</a:t>
-            </a:r>
-          </a:p>
-        </p:txBody>
-      </p:sp>
-      <p:sp>
-        <p:nvSpPr>
-          <p:cNvPr id="18" name="TextBox 17"/>
-          <p:cNvSpPr txBox="1"/>
-          <p:nvPr/>
-        </p:nvSpPr>
-        <p:spPr>
-          <a:xfrm>
-            <a:off x="4297680" y="2862072"/>
-            <a:ext cx="7406640" cy="804672"/>
-          </a:xfrm>
-          <a:prstGeom prst="rect">
-            <a:avLst/>
-          </a:prstGeom>
-          <a:noFill/>
-        </p:spPr>
-        <p:txBody>
-          <a:bodyPr wrap="square">
-            <a:spAutoFit/>
-          </a:bodyPr>
-          <a:lstStyle/>
-          <a:p>
-            <a:pPr algn="l"/>
-            <a:r>
-              <a:rPr sz="1000" b="0" i="0">
-                <a:solidFill>
-                  <a:srgbClr val="8A7D6E"/>
-                </a:solidFill>
-                <a:latin typeface="Inter"/>
-              </a:rPr>
-              <a:t>Arm spawned via gazebo.launch.py. gz-ros2-bridge configured to relay joint states. JointTrajectoryController from ros2_control activated.</a:t>
-            </a:r>
-          </a:p>
-        </p:txBody>
-      </p:sp>
-      <p:sp>
-        <p:nvSpPr>
-          <p:cNvPr id="19" name="Rectangle 18"/>
-          <p:cNvSpPr/>
-          <p:nvPr/>
-        </p:nvSpPr>
-        <p:spPr>
-          <a:xfrm>
-            <a:off x="3657600" y="3794760"/>
-            <a:ext cx="8229600" cy="1188720"/>
-          </a:xfrm>
-          <a:prstGeom prst="rect">
-            <a:avLst/>
-          </a:prstGeom>
-          <a:solidFill>
-            <a:srgbClr val="FFFFFF"/>
-          </a:solidFill>
-          <a:ln w="9525">
-            <a:solidFill>
-              <a:srgbClr val="CCC4B8"/>
-            </a:solidFill>
-          </a:ln>
-        </p:spPr>
-        <p:style>
-          <a:lnRef idx="1">
-            <a:schemeClr val="accent1"/>
-          </a:lnRef>
-          <a:fillRef idx="3">
-            <a:schemeClr val="accent1"/>
-          </a:fillRef>
-          <a:effectRef idx="2">
-            <a:schemeClr val="accent1"/>
-          </a:effectRef>
-          <a:fontRef idx="minor">
-            <a:schemeClr val="lt1"/>
-          </a:fontRef>
-        </p:style>
-        <p:txBody>
-          <a:bodyPr rtlCol="0" anchor="ctr"/>
-          <a:lstStyle/>
-          <a:p>
-            <a:pPr algn="ctr"/>
-          </a:p>
-        </p:txBody>
-      </p:sp>
-      <p:sp>
-        <p:nvSpPr>
-          <p:cNvPr id="20" name="TextBox 19"/>
-          <p:cNvSpPr txBox="1"/>
-          <p:nvPr/>
-        </p:nvSpPr>
-        <p:spPr>
-          <a:xfrm>
-            <a:off x="3794760" y="3904488"/>
-            <a:ext cx="457200" cy="1078992"/>
-          </a:xfrm>
-          <a:prstGeom prst="rect">
-            <a:avLst/>
-          </a:prstGeom>
-          <a:noFill/>
-        </p:spPr>
-        <p:txBody>
-          <a:bodyPr wrap="square">
-            <a:spAutoFit/>
-          </a:bodyPr>
-          <a:lstStyle/>
-          <a:p>
-            <a:pPr algn="l"/>
-            <a:r>
-              <a:rPr sz="900" b="1" i="0">
-                <a:solidFill>
-                  <a:srgbClr val="1A6B8A"/>
-                </a:solidFill>
-                <a:latin typeface="Inter"/>
-              </a:rPr>
-              <a:t>03</a:t>
-            </a:r>
-          </a:p>
-        </p:txBody>
-      </p:sp>
-      <p:sp>
-        <p:nvSpPr>
-          <p:cNvPr id="21" name="TextBox 20"/>
-          <p:cNvSpPr txBox="1"/>
-          <p:nvPr/>
-        </p:nvSpPr>
-        <p:spPr>
-          <a:xfrm>
-            <a:off x="4297680" y="3886200"/>
-            <a:ext cx="7406640" cy="256032"/>
-          </a:xfrm>
-          <a:prstGeom prst="rect">
-            <a:avLst/>
-          </a:prstGeom>
-          <a:noFill/>
-        </p:spPr>
-        <p:txBody>
-          <a:bodyPr wrap="square">
-            <a:spAutoFit/>
-          </a:bodyPr>
-          <a:lstStyle/>
-          <a:p>
-            <a:pPr algn="l"/>
-            <a:r>
-              <a:rPr sz="1200" b="1" i="0">
-                <a:solidFill>
-                  <a:srgbClr val="1C1A16"/>
-                </a:solidFill>
-                <a:latin typeface="Inter"/>
-              </a:rPr>
-              <a:t>Controller Verification</a:t>
-            </a:r>
-          </a:p>
-        </p:txBody>
-      </p:sp>
-      <p:sp>
-        <p:nvSpPr>
-          <p:cNvPr id="22" name="TextBox 21"/>
-          <p:cNvSpPr txBox="1"/>
-          <p:nvPr/>
-        </p:nvSpPr>
-        <p:spPr>
-          <a:xfrm>
-            <a:off x="4297680" y="4142232"/>
-            <a:ext cx="7406640" cy="804672"/>
-          </a:xfrm>
-          <a:prstGeom prst="rect">
-            <a:avLst/>
-          </a:prstGeom>
-          <a:noFill/>
-        </p:spPr>
-        <p:txBody>
-          <a:bodyPr wrap="square">
-            <a:spAutoFit/>
-          </a:bodyPr>
-          <a:lstStyle/>
-          <a:p>
-            <a:pPr algn="l"/>
-            <a:r>
-              <a:rPr sz="1000" b="0" i="0">
-                <a:solidFill>
-                  <a:srgbClr val="8A7D6E"/>
-                </a:solidFill>
-                <a:latin typeface="Inter"/>
-              </a:rPr>
-              <a:t>ros2 control list_controllers confirmed joint_trajectory_controller and joint_state_broadcaster active.</a:t>
-            </a:r>
-          </a:p>
-        </p:txBody>
-      </p:sp>
-      <p:sp>
-        <p:nvSpPr>
-          <p:cNvPr id="23" name="Rectangle 22"/>
-          <p:cNvSpPr/>
-          <p:nvPr/>
-        </p:nvSpPr>
-        <p:spPr>
-          <a:xfrm>
-            <a:off x="3657600" y="5074920"/>
-            <a:ext cx="8229600" cy="1188720"/>
-          </a:xfrm>
-          <a:prstGeom prst="rect">
-            <a:avLst/>
-          </a:prstGeom>
-          <a:solidFill>
-            <a:srgbClr val="FFFFFF"/>
-          </a:solidFill>
-          <a:ln w="9525">
-            <a:solidFill>
-              <a:srgbClr val="CCC4B8"/>
-            </a:solidFill>
-          </a:ln>
-        </p:spPr>
-        <p:style>
-          <a:lnRef idx="1">
-            <a:schemeClr val="accent1"/>
-          </a:lnRef>
-          <a:fillRef idx="3">
-            <a:schemeClr val="accent1"/>
-          </a:fillRef>
-          <a:effectRef idx="2">
-            <a:schemeClr val="accent1"/>
-          </a:effectRef>
-          <a:fontRef idx="minor">
-            <a:schemeClr val="lt1"/>
-          </a:fontRef>
-        </p:style>
-        <p:txBody>
-          <a:bodyPr rtlCol="0" anchor="ctr"/>
-          <a:lstStyle/>
-          <a:p>
-            <a:pPr algn="ctr"/>
-          </a:p>
-        </p:txBody>
-      </p:sp>
-      <p:sp>
-        <p:nvSpPr>
-          <p:cNvPr id="24" name="TextBox 23"/>
-          <p:cNvSpPr txBox="1"/>
-          <p:nvPr/>
-        </p:nvSpPr>
-        <p:spPr>
-          <a:xfrm>
-            <a:off x="3794760" y="5184648"/>
-            <a:ext cx="457200" cy="1078992"/>
-          </a:xfrm>
-          <a:prstGeom prst="rect">
-            <a:avLst/>
-          </a:prstGeom>
-          <a:noFill/>
-        </p:spPr>
-        <p:txBody>
-          <a:bodyPr wrap="square">
-            <a:spAutoFit/>
-          </a:bodyPr>
-          <a:lstStyle/>
-          <a:p>
-            <a:pPr algn="l"/>
-            <a:r>
-              <a:rPr sz="900" b="1" i="0">
-                <a:solidFill>
-                  <a:srgbClr val="1A6B8A"/>
-                </a:solidFill>
-                <a:latin typeface="Inter"/>
-              </a:rPr>
-              <a:t>04</a:t>
-            </a:r>
-          </a:p>
-        </p:txBody>
-      </p:sp>
-      <p:sp>
-        <p:nvSpPr>
-          <p:cNvPr id="25" name="TextBox 24"/>
-          <p:cNvSpPr txBox="1"/>
-          <p:nvPr/>
-        </p:nvSpPr>
-        <p:spPr>
-          <a:xfrm>
-            <a:off x="4297680" y="5166360"/>
-            <a:ext cx="7406640" cy="256032"/>
-          </a:xfrm>
-          <a:prstGeom prst="rect">
-            <a:avLst/>
-          </a:prstGeom>
-          <a:noFill/>
-        </p:spPr>
-        <p:txBody>
-          <a:bodyPr wrap="square">
-            <a:spAutoFit/>
-          </a:bodyPr>
-          <a:lstStyle/>
-          <a:p>
-            <a:pPr algn="l"/>
-            <a:r>
-              <a:rPr sz="1200" b="1" i="0">
-                <a:solidFill>
-                  <a:srgbClr val="1C1A16"/>
-                </a:solidFill>
-                <a:latin typeface="Inter"/>
-              </a:rPr>
-              <a:t>Motion Testing</a:t>
-            </a:r>
-          </a:p>
-        </p:txBody>
-      </p:sp>
-      <p:sp>
-        <p:nvSpPr>
-          <p:cNvPr id="26" name="TextBox 25"/>
-          <p:cNvSpPr txBox="1"/>
-          <p:nvPr/>
-        </p:nvSpPr>
-        <p:spPr>
-          <a:xfrm>
-            <a:off x="4297680" y="5422392"/>
-            <a:ext cx="7406640" cy="804672"/>
-          </a:xfrm>
-          <a:prstGeom prst="rect">
-            <a:avLst/>
-          </a:prstGeom>
-          <a:noFill/>
-        </p:spPr>
-        <p:txBody>
-          <a:bodyPr wrap="square">
-            <a:spAutoFit/>
-          </a:bodyPr>
-          <a:lstStyle/>
-          <a:p>
-            <a:pPr algn="l"/>
-            <a:r>
-              <a:rPr sz="1000" b="0" i="0">
-                <a:solidFill>
-                  <a:srgbClr val="8A7D6E"/>
-                </a:solidFill>
-                <a:latin typeface="Inter"/>
-              </a:rPr>
-              <a:t>Test trajectory commands published via ros2 topic pub. Pick-place sequences and joint-level position commands prototyped in simulation.</a:t>
-            </a:r>
-          </a:p>
-        </p:txBody>
-      </p:sp>
+      <p:pic>
+        <p:nvPicPr>
+          <p:cNvPr id="2" name="Picture 1" descr="ASSMEBLED.jpeg"/>
+          <p:cNvPicPr>
+            <a:picLocks noChangeAspect="1"/>
+          </p:cNvPicPr>
+          <p:nvPr/>
+        </p:nvPicPr>
+        <p:blipFill>
+          <a:blip r:embed="rId2"/>
+          <a:stretch>
+            <a:fillRect/>
+          </a:stretch>
+        </p:blipFill>
+        <p:spPr>
+          <a:xfrm>
+            <a:off x="3529155" y="0"/>
+            <a:ext cx="5130641" cy="6858000"/>
+          </a:xfrm>
+          <a:prstGeom prst="rect">
+            <a:avLst/>
+          </a:prstGeom>
+        </p:spPr>
+      </p:pic>
     </p:spTree>
   </p:cSld>
   <p:clrMapOvr>
@@ -9346,7 +9665,7 @@
                 </a:solidFill>
                 <a:latin typeface="Inter"/>
               </a:rPr>
-              <a:t>Phase 4 — Servo Motor Control (ESP8266)</a:t>
+              <a:t>Phase 2 — 3D Model &amp; URDF Development</a:t>
             </a:r>
           </a:p>
         </p:txBody>
@@ -9381,7 +9700,7 @@
                 </a:solidFill>
                 <a:latin typeface="Inter"/>
               </a:rPr>
-              <a:t>Phase 4 — Servo Motor Control (ESP8266)   |   7/10</a:t>
+              <a:t>Phase 2 — 3D Model &amp; URDF Development   |   7/13</a:t>
             </a:r>
           </a:p>
         </p:txBody>
@@ -9412,11 +9731,11 @@
             <a:r>
               <a:rPr sz="900" b="1" i="0">
                 <a:solidFill>
-                  <a:srgbClr val="D2691E"/>
-                </a:solidFill>
-                <a:latin typeface="Inter"/>
-              </a:rPr>
-              <a:t>🔄 In Progress</a:t>
+                  <a:srgbClr val="1A6B8A"/>
+                </a:solidFill>
+                <a:latin typeface="Inter"/>
+              </a:rPr>
+              <a:t>✅ Completed (Multiple Iterations)</a:t>
             </a:r>
           </a:p>
         </p:txBody>
@@ -9531,7 +9850,7 @@
                 </a:solidFill>
                 <a:latin typeface="Inter"/>
               </a:rPr>
-              <a:t>Initial development of servo motor control firmware on the ESP8266 began in parallel with simulation. This is the hardware counterpart to the simulated JointTrajectoryController.</a:t>
+              <a:t>A URDF is mandatory for Gazebo simulation. No pre-existing URDF matched our hardware, so one was created from an adapted open-source reference.</a:t>
             </a:r>
           </a:p>
         </p:txBody>
@@ -9601,7 +9920,7 @@
                 </a:solidFill>
                 <a:latin typeface="Inter"/>
               </a:rPr>
-              <a:t>Individual servo control functional. Multi-servo coordination and ROS2–ESP8266 bridge are the next steps.</a:t>
+              <a:t>Working Xacro URDF produced and integrated into the ROS2 workspace package my_arm_description.</a:t>
             </a:r>
           </a:p>
         </p:txBody>
@@ -9695,7 +10014,7 @@
         <p:spPr>
           <a:xfrm>
             <a:off x="4297680" y="1325880"/>
-            <a:ext cx="7406640" cy="256032"/>
+            <a:ext cx="7452360" cy="256032"/>
           </a:xfrm>
           <a:prstGeom prst="rect">
             <a:avLst/>
@@ -9716,7 +10035,7 @@
                 </a:solidFill>
                 <a:latin typeface="Inter"/>
               </a:rPr>
-              <a:t>ESP8266 PWM Control</a:t>
+              <a:t>Challenge: No Matching URDF</a:t>
             </a:r>
           </a:p>
         </p:txBody>
@@ -9730,7 +10049,7 @@
         <p:spPr>
           <a:xfrm>
             <a:off x="4297680" y="1581912"/>
-            <a:ext cx="7406640" cy="804672"/>
+            <a:ext cx="7452360" cy="804672"/>
           </a:xfrm>
           <a:prstGeom prst="rect">
             <a:avLst/>
@@ -9751,7 +10070,7 @@
                 </a:solidFill>
                 <a:latin typeface="Inter"/>
               </a:rPr>
-              <a:t>ESP8266 NodeMCU selected for built-in Wi-Fi and PWM output. Will receive joint angle commands and translate them to PWM signals for all 6 MG996R servos.</a:t>
+              <a:t>The purchased 6-DOF metal arm kit has no freely available 3D model or URDF online. Without a URDF, simulation and motion planning are impossible.</a:t>
             </a:r>
           </a:p>
         </p:txBody>
@@ -9845,7 +10164,7 @@
         <p:spPr>
           <a:xfrm>
             <a:off x="4297680" y="2606040"/>
-            <a:ext cx="7406640" cy="256032"/>
+            <a:ext cx="7452360" cy="256032"/>
           </a:xfrm>
           <a:prstGeom prst="rect">
             <a:avLst/>
@@ -9866,7 +10185,7 @@
                 </a:solidFill>
                 <a:latin typeface="Inter"/>
               </a:rPr>
-              <a:t>Signal Generation</a:t>
+              <a:t>Reference Model Located</a:t>
             </a:r>
           </a:p>
         </p:txBody>
@@ -9880,7 +10199,7 @@
         <p:spPr>
           <a:xfrm>
             <a:off x="4297680" y="2862072"/>
-            <a:ext cx="7406640" cy="804672"/>
+            <a:ext cx="7452360" cy="804672"/>
           </a:xfrm>
           <a:prstGeom prst="rect">
             <a:avLst/>
@@ -9901,7 +10220,7 @@
                 </a:solidFill>
                 <a:latin typeface="Inter"/>
               </a:rPr>
-              <a:t>MG996R servos need 50 Hz PWM, 500–2500 µs pulse width for full motion range. Initial firmware maps angle → pulse width and generates signals on digital IO pins.</a:t>
+              <a:t>ferasboulala/five-dof-robot-arm on GitHub was used as a base. Mesh proportions and joint placements were studied against the physical hardware.</a:t>
             </a:r>
           </a:p>
         </p:txBody>
@@ -9995,7 +10314,7 @@
         <p:spPr>
           <a:xfrm>
             <a:off x="4297680" y="3886200"/>
-            <a:ext cx="7406640" cy="256032"/>
+            <a:ext cx="7452360" cy="256032"/>
           </a:xfrm>
           <a:prstGeom prst="rect">
             <a:avLst/>
@@ -10016,7 +10335,7 @@
                 </a:solidFill>
                 <a:latin typeface="Inter"/>
               </a:rPr>
-              <a:t>Initial Tests</a:t>
+              <a:t>Iterative Adaptation</a:t>
             </a:r>
           </a:p>
         </p:txBody>
@@ -10030,7 +10349,7 @@
         <p:spPr>
           <a:xfrm>
             <a:off x="4297680" y="4142232"/>
-            <a:ext cx="7406640" cy="804672"/>
+            <a:ext cx="7452360" cy="804672"/>
           </a:xfrm>
           <a:prstGeom prst="rect">
             <a:avLst/>
@@ -10051,7 +10370,157 @@
                 </a:solidFill>
                 <a:latin typeface="Inter"/>
               </a:rPr>
-              <a:t>Preliminary tests on individual servo motors complete. Smooth angle transitions with configurable speed implemented to prevent jerky motion.</a:t>
+              <a:t>Multiple attempts: adjusting link lengths, correcting joint axes, converting to ROS2 Xacro format, adding the 6th joint and gripper, fixing mesh collision/inertia errors.</a:t>
+            </a:r>
+          </a:p>
+        </p:txBody>
+      </p:sp>
+      <p:sp>
+        <p:nvSpPr>
+          <p:cNvPr id="23" name="Rectangle 22"/>
+          <p:cNvSpPr/>
+          <p:nvPr/>
+        </p:nvSpPr>
+        <p:spPr>
+          <a:xfrm>
+            <a:off x="3657600" y="5074920"/>
+            <a:ext cx="8229600" cy="1188720"/>
+          </a:xfrm>
+          <a:prstGeom prst="rect">
+            <a:avLst/>
+          </a:prstGeom>
+          <a:solidFill>
+            <a:srgbClr val="FFFFFF"/>
+          </a:solidFill>
+          <a:ln w="9525">
+            <a:solidFill>
+              <a:srgbClr val="CCC4B8"/>
+            </a:solidFill>
+          </a:ln>
+        </p:spPr>
+        <p:style>
+          <a:lnRef idx="1">
+            <a:schemeClr val="accent1"/>
+          </a:lnRef>
+          <a:fillRef idx="3">
+            <a:schemeClr val="accent1"/>
+          </a:fillRef>
+          <a:effectRef idx="2">
+            <a:schemeClr val="accent1"/>
+          </a:effectRef>
+          <a:fontRef idx="minor">
+            <a:schemeClr val="lt1"/>
+          </a:fontRef>
+        </p:style>
+        <p:txBody>
+          <a:bodyPr rtlCol="0" anchor="ctr"/>
+          <a:lstStyle/>
+          <a:p>
+            <a:pPr algn="ctr"/>
+          </a:p>
+        </p:txBody>
+      </p:sp>
+      <p:sp>
+        <p:nvSpPr>
+          <p:cNvPr id="24" name="TextBox 23"/>
+          <p:cNvSpPr txBox="1"/>
+          <p:nvPr/>
+        </p:nvSpPr>
+        <p:spPr>
+          <a:xfrm>
+            <a:off x="3794760" y="5184648"/>
+            <a:ext cx="457200" cy="1078992"/>
+          </a:xfrm>
+          <a:prstGeom prst="rect">
+            <a:avLst/>
+          </a:prstGeom>
+          <a:noFill/>
+        </p:spPr>
+        <p:txBody>
+          <a:bodyPr wrap="square">
+            <a:spAutoFit/>
+          </a:bodyPr>
+          <a:lstStyle/>
+          <a:p>
+            <a:pPr algn="l"/>
+            <a:r>
+              <a:rPr sz="900" b="1" i="0">
+                <a:solidFill>
+                  <a:srgbClr val="1A6B8A"/>
+                </a:solidFill>
+                <a:latin typeface="Inter"/>
+              </a:rPr>
+              <a:t>04</a:t>
+            </a:r>
+          </a:p>
+        </p:txBody>
+      </p:sp>
+      <p:sp>
+        <p:nvSpPr>
+          <p:cNvPr id="25" name="TextBox 24"/>
+          <p:cNvSpPr txBox="1"/>
+          <p:nvPr/>
+        </p:nvSpPr>
+        <p:spPr>
+          <a:xfrm>
+            <a:off x="4297680" y="5166360"/>
+            <a:ext cx="7452360" cy="256032"/>
+          </a:xfrm>
+          <a:prstGeom prst="rect">
+            <a:avLst/>
+          </a:prstGeom>
+          <a:noFill/>
+        </p:spPr>
+        <p:txBody>
+          <a:bodyPr wrap="square">
+            <a:spAutoFit/>
+          </a:bodyPr>
+          <a:lstStyle/>
+          <a:p>
+            <a:pPr algn="l"/>
+            <a:r>
+              <a:rPr sz="1200" b="1" i="0">
+                <a:solidFill>
+                  <a:srgbClr val="1C1A16"/>
+                </a:solidFill>
+                <a:latin typeface="Inter"/>
+              </a:rPr>
+              <a:t>Working Model Achieved</a:t>
+            </a:r>
+          </a:p>
+        </p:txBody>
+      </p:sp>
+      <p:sp>
+        <p:nvSpPr>
+          <p:cNvPr id="26" name="TextBox 25"/>
+          <p:cNvSpPr txBox="1"/>
+          <p:nvPr/>
+        </p:nvSpPr>
+        <p:spPr>
+          <a:xfrm>
+            <a:off x="4297680" y="5422392"/>
+            <a:ext cx="7452360" cy="804672"/>
+          </a:xfrm>
+          <a:prstGeom prst="rect">
+            <a:avLst/>
+          </a:prstGeom>
+          <a:noFill/>
+        </p:spPr>
+        <p:txBody>
+          <a:bodyPr wrap="square">
+            <a:spAutoFit/>
+          </a:bodyPr>
+          <a:lstStyle/>
+          <a:p>
+            <a:pPr algn="l"/>
+            <a:r>
+              <a:rPr sz="1000" b="0" i="0">
+                <a:solidFill>
+                  <a:srgbClr val="8A7D6E"/>
+                </a:solidFill>
+                <a:latin typeface="Inter"/>
+              </a:rPr>
+              <a:t>Stable Xacro URDF produced with 6 correctly defined joints, link inertias, and collision geometry — sufficient for simulation and motion planning.</a:t>
             </a:r>
           </a:p>
         </p:txBody>
@@ -10155,7 +10624,7 @@
                 </a:solidFill>
                 <a:latin typeface="Inter"/>
               </a:rPr>
-              <a:t>Phase 5 — Computer Vision Integration (YOLO)</a:t>
+              <a:t>Phase 3 — Simulation in Gazebo &amp; RViz</a:t>
             </a:r>
           </a:p>
         </p:txBody>
@@ -10190,7 +10659,7 @@
                 </a:solidFill>
                 <a:latin typeface="Inter"/>
               </a:rPr>
-              <a:t>Phase 5 — Computer Vision Integration (YOLO)   |   8/10</a:t>
+              <a:t>Phase 3 — Simulation in Gazebo &amp; RViz   |   8/13</a:t>
             </a:r>
           </a:p>
         </p:txBody>
@@ -10221,11 +10690,11 @@
             <a:r>
               <a:rPr sz="900" b="1" i="0">
                 <a:solidFill>
-                  <a:srgbClr val="D2691E"/>
-                </a:solidFill>
-                <a:latin typeface="Inter"/>
-              </a:rPr>
-              <a:t>🔄 Under Development</a:t>
+                  <a:srgbClr val="1A6B8A"/>
+                </a:solidFill>
+                <a:latin typeface="Inter"/>
+              </a:rPr>
+              <a:t>✅ Completed</a:t>
             </a:r>
           </a:p>
         </p:txBody>
@@ -10239,7 +10708,7 @@
         <p:spPr>
           <a:xfrm>
             <a:off x="365760" y="1234440"/>
-            <a:ext cx="3108960" cy="2011680"/>
+            <a:ext cx="2743200" cy="2011680"/>
           </a:xfrm>
           <a:prstGeom prst="rect">
             <a:avLst/>
@@ -10284,7 +10753,7 @@
         <p:spPr>
           <a:xfrm>
             <a:off x="502920" y="1325880"/>
-            <a:ext cx="2834640" cy="256032"/>
+            <a:ext cx="2468880" cy="256032"/>
           </a:xfrm>
           <a:prstGeom prst="rect">
             <a:avLst/>
@@ -10319,7 +10788,7 @@
         <p:spPr>
           <a:xfrm>
             <a:off x="502920" y="1572768"/>
-            <a:ext cx="2834640" cy="1508760"/>
+            <a:ext cx="2468880" cy="1508760"/>
           </a:xfrm>
           <a:prstGeom prst="rect">
             <a:avLst/>
@@ -10340,7 +10809,7 @@
                 </a:solidFill>
                 <a:latin typeface="Inter"/>
               </a:rPr>
-              <a:t>A YOLOv8-based pipeline was developed to detect a human hand and convert that detection into servo movement commands. This is the core intelligence of gesture control mode.</a:t>
+              <a:t>With the URDF ready, the arm was loaded into Gazebo Harmonic (physics sim) and RViz (kinematic visualisation) as the primary testbed before hardware deployment.</a:t>
             </a:r>
           </a:p>
         </p:txBody>
@@ -10354,7 +10823,7 @@
         <p:spPr>
           <a:xfrm>
             <a:off x="502920" y="3337560"/>
-            <a:ext cx="2834640" cy="228600"/>
+            <a:ext cx="2468880" cy="228600"/>
           </a:xfrm>
           <a:prstGeom prst="rect">
             <a:avLst/>
@@ -10389,7 +10858,7 @@
         <p:spPr>
           <a:xfrm>
             <a:off x="502920" y="3566160"/>
-            <a:ext cx="2834640" cy="1097280"/>
+            <a:ext cx="2468880" cy="1097280"/>
           </a:xfrm>
           <a:prstGeom prst="rect">
             <a:avLst/>
@@ -10410,7 +10879,7 @@
                 </a:solidFill>
                 <a:latin typeface="Inter"/>
               </a:rPr>
-              <a:t>Hand detection functional in isolation. Full pipeline integration into ROS2 + servo chain is the current blocker under active debugging.</a:t>
+              <a:t>Arm simulates correctly in Gazebo with physics-accurate joint motion. Trajectory commands execute reliably via ROS2 topics.</a:t>
             </a:r>
           </a:p>
         </p:txBody>
@@ -10423,8 +10892,8 @@
         </p:nvSpPr>
         <p:spPr>
           <a:xfrm>
-            <a:off x="3657600" y="1234440"/>
-            <a:ext cx="8229600" cy="1188720"/>
+            <a:off x="3291840" y="1234440"/>
+            <a:ext cx="5029200" cy="1188720"/>
           </a:xfrm>
           <a:prstGeom prst="rect">
             <a:avLst/>
@@ -10468,7 +10937,7 @@
         </p:nvSpPr>
         <p:spPr>
           <a:xfrm>
-            <a:off x="3794760" y="1344168"/>
+            <a:off x="3429000" y="1344168"/>
             <a:ext cx="457200" cy="1078992"/>
           </a:xfrm>
           <a:prstGeom prst="rect">
@@ -10503,8 +10972,8 @@
         </p:nvSpPr>
         <p:spPr>
           <a:xfrm>
-            <a:off x="4297680" y="1325880"/>
-            <a:ext cx="7406640" cy="256032"/>
+            <a:off x="3931920" y="1325880"/>
+            <a:ext cx="4251960" cy="256032"/>
           </a:xfrm>
           <a:prstGeom prst="rect">
             <a:avLst/>
@@ -10525,7 +10994,7 @@
                 </a:solidFill>
                 <a:latin typeface="Inter"/>
               </a:rPr>
-              <a:t>YOLOv8 Model Setup</a:t>
+              <a:t>RViz Visualisation</a:t>
             </a:r>
           </a:p>
         </p:txBody>
@@ -10538,8 +11007,8 @@
         </p:nvSpPr>
         <p:spPr>
           <a:xfrm>
-            <a:off x="4297680" y="1581912"/>
-            <a:ext cx="7406640" cy="804672"/>
+            <a:off x="3931920" y="1581912"/>
+            <a:ext cx="4251960" cy="804672"/>
           </a:xfrm>
           <a:prstGeom prst="rect">
             <a:avLst/>
@@ -10560,7 +11029,7 @@
                 </a:solidFill>
                 <a:latin typeface="Inter"/>
               </a:rPr>
-              <a:t>YOLOv8 (Ultralytics) configured on NVIDIA RTX 3060 with CUDA 12.1 for accelerated inference. Targeting real-time &gt;30 FPS performance.</a:t>
+              <a:t>Loaded via display.launch.py. joint_state_publisher_gui sliders confirmed all 6 joints move correctly. Link transforms verified.</a:t>
             </a:r>
           </a:p>
         </p:txBody>
@@ -10573,8 +11042,8 @@
         </p:nvSpPr>
         <p:spPr>
           <a:xfrm>
-            <a:off x="3657600" y="2514600"/>
-            <a:ext cx="8229600" cy="1188720"/>
+            <a:off x="3291840" y="2514600"/>
+            <a:ext cx="5029200" cy="1188720"/>
           </a:xfrm>
           <a:prstGeom prst="rect">
             <a:avLst/>
@@ -10618,7 +11087,7 @@
         </p:nvSpPr>
         <p:spPr>
           <a:xfrm>
-            <a:off x="3794760" y="2624328"/>
+            <a:off x="3429000" y="2624328"/>
             <a:ext cx="457200" cy="1078992"/>
           </a:xfrm>
           <a:prstGeom prst="rect">
@@ -10653,8 +11122,8 @@
         </p:nvSpPr>
         <p:spPr>
           <a:xfrm>
-            <a:off x="4297680" y="2606040"/>
-            <a:ext cx="7406640" cy="256032"/>
+            <a:off x="3931920" y="2606040"/>
+            <a:ext cx="4251960" cy="256032"/>
           </a:xfrm>
           <a:prstGeom prst="rect">
             <a:avLst/>
@@ -10675,7 +11144,7 @@
                 </a:solidFill>
                 <a:latin typeface="Inter"/>
               </a:rPr>
-              <a:t>Detection → Command Pipeline</a:t>
+              <a:t>Gazebo Harmonic Launch</a:t>
             </a:r>
           </a:p>
         </p:txBody>
@@ -10688,8 +11157,8 @@
         </p:nvSpPr>
         <p:spPr>
           <a:xfrm>
-            <a:off x="4297680" y="2862072"/>
-            <a:ext cx="7406640" cy="804672"/>
+            <a:off x="3931920" y="2862072"/>
+            <a:ext cx="4251960" cy="804672"/>
           </a:xfrm>
           <a:prstGeom prst="rect">
             <a:avLst/>
@@ -10710,7 +11179,7 @@
                 </a:solidFill>
                 <a:latin typeface="Inter"/>
               </a:rPr>
-              <a:t>Intended: camera → YOLOv8 bounding box → centroid → IK → 6 joint angles → ESP8266 servo commands. Partially implemented.</a:t>
+              <a:t>Arm spawned via gazebo.launch.py. gz-ros2-bridge configured to relay joint states. JointTrajectoryController from ros2_control activated.</a:t>
             </a:r>
           </a:p>
         </p:txBody>
@@ -10723,8 +11192,8 @@
         </p:nvSpPr>
         <p:spPr>
           <a:xfrm>
-            <a:off x="3657600" y="3794760"/>
-            <a:ext cx="8229600" cy="1188720"/>
+            <a:off x="3291840" y="3794760"/>
+            <a:ext cx="5029200" cy="1188720"/>
           </a:xfrm>
           <a:prstGeom prst="rect">
             <a:avLst/>
@@ -10768,7 +11237,7 @@
         </p:nvSpPr>
         <p:spPr>
           <a:xfrm>
-            <a:off x="3794760" y="3904488"/>
+            <a:off x="3429000" y="3904488"/>
             <a:ext cx="457200" cy="1078992"/>
           </a:xfrm>
           <a:prstGeom prst="rect">
@@ -10803,8 +11272,8 @@
         </p:nvSpPr>
         <p:spPr>
           <a:xfrm>
-            <a:off x="4297680" y="3886200"/>
-            <a:ext cx="7406640" cy="256032"/>
+            <a:off x="3931920" y="3886200"/>
+            <a:ext cx="4251960" cy="256032"/>
           </a:xfrm>
           <a:prstGeom prst="rect">
             <a:avLst/>
@@ -10825,7 +11294,7 @@
                 </a:solidFill>
                 <a:latin typeface="Inter"/>
               </a:rPr>
-              <a:t>Integration Issues Found</a:t>
+              <a:t>Controller Verification</a:t>
             </a:r>
           </a:p>
         </p:txBody>
@@ -10838,8 +11307,8 @@
         </p:nvSpPr>
         <p:spPr>
           <a:xfrm>
-            <a:off x="4297680" y="4142232"/>
-            <a:ext cx="7406640" cy="804672"/>
+            <a:off x="3931920" y="4142232"/>
+            <a:ext cx="4251960" cy="804672"/>
           </a:xfrm>
           <a:prstGeom prst="rect">
             <a:avLst/>
@@ -10860,7 +11329,7 @@
                 </a:solidFill>
                 <a:latin typeface="Inter"/>
               </a:rPr>
-              <a:t>Latency spikes in detection-to-command loop, coordinate mapping calibration errors, and serialization issues passing YOLO output into ROS2 topics.</a:t>
+              <a:t>ros2 control list_controllers confirmed joint_trajectory_controller and joint_state_broadcaster active.</a:t>
             </a:r>
           </a:p>
         </p:txBody>
@@ -10873,8 +11342,8 @@
         </p:nvSpPr>
         <p:spPr>
           <a:xfrm>
-            <a:off x="3657600" y="5074920"/>
-            <a:ext cx="8229600" cy="1188720"/>
+            <a:off x="3291840" y="5074920"/>
+            <a:ext cx="5029200" cy="1188720"/>
           </a:xfrm>
           <a:prstGeom prst="rect">
             <a:avLst/>
@@ -10918,7 +11387,7 @@
         </p:nvSpPr>
         <p:spPr>
           <a:xfrm>
-            <a:off x="3794760" y="5184648"/>
+            <a:off x="3429000" y="5184648"/>
             <a:ext cx="457200" cy="1078992"/>
           </a:xfrm>
           <a:prstGeom prst="rect">
@@ -10953,8 +11422,8 @@
         </p:nvSpPr>
         <p:spPr>
           <a:xfrm>
-            <a:off x="4297680" y="5166360"/>
-            <a:ext cx="7406640" cy="256032"/>
+            <a:off x="3931920" y="5166360"/>
+            <a:ext cx="4251960" cy="256032"/>
           </a:xfrm>
           <a:prstGeom prst="rect">
             <a:avLst/>
@@ -10975,7 +11444,7 @@
                 </a:solidFill>
                 <a:latin typeface="Inter"/>
               </a:rPr>
-              <a:t>Current Status</a:t>
+              <a:t>Motion Testing</a:t>
             </a:r>
           </a:p>
         </p:txBody>
@@ -10988,8 +11457,8 @@
         </p:nvSpPr>
         <p:spPr>
           <a:xfrm>
-            <a:off x="4297680" y="5422392"/>
-            <a:ext cx="7406640" cy="804672"/>
+            <a:off x="3931920" y="5422392"/>
+            <a:ext cx="4251960" cy="804672"/>
           </a:xfrm>
           <a:prstGeom prst="rect">
             <a:avLst/>
@@ -11010,11 +11479,35 @@
                 </a:solidFill>
                 <a:latin typeface="Inter"/>
               </a:rPr>
-              <a:t>YOLO detects hands reliably in isolation. End-to-end integration from detection to servo command under active debugging and expected to resolve in next cycle.</a:t>
-            </a:r>
-          </a:p>
-        </p:txBody>
-      </p:sp>
+              <a:t>Test trajectory commands published via ros2 topic pub. Pick-place sequences and joint-level position commands prototyped in simulation.</a:t>
+            </a:r>
+          </a:p>
+        </p:txBody>
+      </p:sp>
+      <p:pic>
+        <p:nvPicPr>
+          <p:cNvPr id="27" name="Picture 26" descr="RVIZ IMAGE OF MODEL.jpeg"/>
+          <p:cNvPicPr>
+            <a:picLocks noChangeAspect="1"/>
+          </p:cNvPicPr>
+          <p:nvPr/>
+        </p:nvPicPr>
+        <p:blipFill>
+          <a:blip r:embed="rId2"/>
+          <a:stretch>
+            <a:fillRect/>
+          </a:stretch>
+        </p:blipFill>
+        <p:spPr>
+          <a:xfrm>
+            <a:off x="8503920" y="1234440"/>
+            <a:ext cx="3474720" cy="1676552"/>
+          </a:xfrm>
+          <a:prstGeom prst="rect">
+            <a:avLst/>
+          </a:prstGeom>
+        </p:spPr>
+      </p:pic>
     </p:spTree>
   </p:cSld>
   <p:clrMapOvr>
@@ -11114,7 +11607,7 @@
                 </a:solidFill>
                 <a:latin typeface="Inter"/>
               </a:rPr>
-              <a:t>Challenges &amp; Current Status</a:t>
+              <a:t>Phase 4 — Servo Motor Control (ESP8266)</a:t>
             </a:r>
           </a:p>
         </p:txBody>
@@ -11122,41 +11615,6 @@
       <p:sp>
         <p:nvSpPr>
           <p:cNvPr id="4" name="TextBox 3"/>
-          <p:cNvSpPr txBox="1"/>
-          <p:nvPr/>
-        </p:nvSpPr>
-        <p:spPr>
-          <a:xfrm>
-            <a:off x="548640" y="868680"/>
-            <a:ext cx="11064240" cy="320040"/>
-          </a:xfrm>
-          <a:prstGeom prst="rect">
-            <a:avLst/>
-          </a:prstGeom>
-          <a:noFill/>
-        </p:spPr>
-        <p:txBody>
-          <a:bodyPr wrap="square">
-            <a:spAutoFit/>
-          </a:bodyPr>
-          <a:lstStyle/>
-          <a:p>
-            <a:pPr algn="ctr"/>
-            <a:r>
-              <a:rPr sz="1200" b="0" i="0">
-                <a:solidFill>
-                  <a:srgbClr val="8A7D6E"/>
-                </a:solidFill>
-                <a:latin typeface="Inter"/>
-              </a:rPr>
-              <a:t>Dual-track development: each track validated independently, converging at integration</a:t>
-            </a:r>
-          </a:p>
-        </p:txBody>
-      </p:sp>
-      <p:sp>
-        <p:nvSpPr>
-          <p:cNvPr id="5" name="TextBox 4"/>
           <p:cNvSpPr txBox="1"/>
           <p:nvPr/>
         </p:nvSpPr>
@@ -11184,7 +11642,42 @@
                 </a:solidFill>
                 <a:latin typeface="Inter"/>
               </a:rPr>
-              <a:t>Challenges &amp; Current Status   |   9/10</a:t>
+              <a:t>Phase 4 — Servo Motor Control (ESP8266)   |   9/13</a:t>
+            </a:r>
+          </a:p>
+        </p:txBody>
+      </p:sp>
+      <p:sp>
+        <p:nvSpPr>
+          <p:cNvPr id="5" name="TextBox 4"/>
+          <p:cNvSpPr txBox="1"/>
+          <p:nvPr/>
+        </p:nvSpPr>
+        <p:spPr>
+          <a:xfrm>
+            <a:off x="5029200" y="822960"/>
+            <a:ext cx="2743200" cy="256032"/>
+          </a:xfrm>
+          <a:prstGeom prst="rect">
+            <a:avLst/>
+          </a:prstGeom>
+          <a:noFill/>
+        </p:spPr>
+        <p:txBody>
+          <a:bodyPr wrap="square">
+            <a:spAutoFit/>
+          </a:bodyPr>
+          <a:lstStyle/>
+          <a:p>
+            <a:pPr algn="ctr"/>
+            <a:r>
+              <a:rPr sz="900" b="1" i="0">
+                <a:solidFill>
+                  <a:srgbClr val="D2691E"/>
+                </a:solidFill>
+                <a:latin typeface="Inter"/>
+              </a:rPr>
+              <a:t>🔄 In Progress</a:t>
             </a:r>
           </a:p>
         </p:txBody>
@@ -11197,8 +11690,8 @@
         </p:nvSpPr>
         <p:spPr>
           <a:xfrm>
-            <a:off x="365760" y="1280160"/>
-            <a:ext cx="5715000" cy="4251960"/>
+            <a:off x="365760" y="1234440"/>
+            <a:ext cx="3108960" cy="2011680"/>
           </a:xfrm>
           <a:prstGeom prst="rect">
             <a:avLst/>
@@ -11242,29 +11735,29 @@
         </p:nvSpPr>
         <p:spPr>
           <a:xfrm>
-            <a:off x="530352" y="1371600"/>
-            <a:ext cx="5394960" cy="320040"/>
-          </a:xfrm>
-          <a:prstGeom prst="rect">
-            <a:avLst/>
-          </a:prstGeom>
-          <a:noFill/>
-        </p:spPr>
-        <p:txBody>
-          <a:bodyPr wrap="square">
-            <a:spAutoFit/>
-          </a:bodyPr>
-          <a:lstStyle/>
-          <a:p>
-            <a:pPr algn="l"/>
-            <a:r>
-              <a:rPr sz="1400" b="1" i="0">
-                <a:solidFill>
-                  <a:srgbClr val="D2691E"/>
-                </a:solidFill>
-                <a:latin typeface="Inter"/>
-              </a:rPr>
-              <a:t>Hardware Track</a:t>
+            <a:off x="502920" y="1325880"/>
+            <a:ext cx="2834640" cy="256032"/>
+          </a:xfrm>
+          <a:prstGeom prst="rect">
+            <a:avLst/>
+          </a:prstGeom>
+          <a:noFill/>
+        </p:spPr>
+        <p:txBody>
+          <a:bodyPr wrap="square">
+            <a:spAutoFit/>
+          </a:bodyPr>
+          <a:lstStyle/>
+          <a:p>
+            <a:pPr algn="l"/>
+            <a:r>
+              <a:rPr sz="800" b="1" i="0">
+                <a:solidFill>
+                  <a:srgbClr val="1A6B8A"/>
+                </a:solidFill>
+                <a:latin typeface="Inter"/>
+              </a:rPr>
+              <a:t>OVERVIEW</a:t>
             </a:r>
           </a:p>
         </p:txBody>
@@ -11277,29 +11770,29 @@
         </p:nvSpPr>
         <p:spPr>
           <a:xfrm>
-            <a:off x="530352" y="1737360"/>
-            <a:ext cx="5394960" cy="228600"/>
-          </a:xfrm>
-          <a:prstGeom prst="rect">
-            <a:avLst/>
-          </a:prstGeom>
-          <a:noFill/>
-        </p:spPr>
-        <p:txBody>
-          <a:bodyPr wrap="square">
-            <a:spAutoFit/>
-          </a:bodyPr>
-          <a:lstStyle/>
-          <a:p>
-            <a:pPr algn="l"/>
-            <a:r>
-              <a:rPr sz="900" b="1" i="0">
-                <a:solidFill>
-                  <a:srgbClr val="8A7D6E"/>
-                </a:solidFill>
-                <a:latin typeface="Inter"/>
-              </a:rPr>
-              <a:t>COMPLETED</a:t>
+            <a:off x="502920" y="1572768"/>
+            <a:ext cx="2834640" cy="1508760"/>
+          </a:xfrm>
+          <a:prstGeom prst="rect">
+            <a:avLst/>
+          </a:prstGeom>
+          <a:noFill/>
+        </p:spPr>
+        <p:txBody>
+          <a:bodyPr wrap="square">
+            <a:spAutoFit/>
+          </a:bodyPr>
+          <a:lstStyle/>
+          <a:p>
+            <a:pPr algn="l"/>
+            <a:r>
+              <a:rPr sz="1050" b="0" i="0">
+                <a:solidFill>
+                  <a:srgbClr val="4A4035"/>
+                </a:solidFill>
+                <a:latin typeface="Inter"/>
+              </a:rPr>
+              <a:t>Initial development of servo motor control firmware on the ESP8266 began in parallel with simulation. This is the hardware counterpart to the simulated JointTrajectoryController.</a:t>
             </a:r>
           </a:p>
         </p:txBody>
@@ -11312,29 +11805,29 @@
         </p:nvSpPr>
         <p:spPr>
           <a:xfrm>
-            <a:off x="530352" y="1965960"/>
-            <a:ext cx="5394960" cy="274320"/>
-          </a:xfrm>
-          <a:prstGeom prst="rect">
-            <a:avLst/>
-          </a:prstGeom>
-          <a:noFill/>
-        </p:spPr>
-        <p:txBody>
-          <a:bodyPr wrap="square">
-            <a:spAutoFit/>
-          </a:bodyPr>
-          <a:lstStyle/>
-          <a:p>
-            <a:pPr algn="l"/>
-            <a:r>
-              <a:rPr sz="1100" b="0" i="0">
-                <a:solidFill>
-                  <a:srgbClr val="4A4035"/>
-                </a:solidFill>
-                <a:latin typeface="Inter"/>
-              </a:rPr>
-              <a:t>✅  All components procured</a:t>
+            <a:off x="502920" y="3337560"/>
+            <a:ext cx="2834640" cy="228600"/>
+          </a:xfrm>
+          <a:prstGeom prst="rect">
+            <a:avLst/>
+          </a:prstGeom>
+          <a:noFill/>
+        </p:spPr>
+        <p:txBody>
+          <a:bodyPr wrap="square">
+            <a:spAutoFit/>
+          </a:bodyPr>
+          <a:lstStyle/>
+          <a:p>
+            <a:pPr algn="l"/>
+            <a:r>
+              <a:rPr sz="800" b="1" i="0">
+                <a:solidFill>
+                  <a:srgbClr val="27AE60"/>
+                </a:solidFill>
+                <a:latin typeface="Inter"/>
+              </a:rPr>
+              <a:t>OUTCOME</a:t>
             </a:r>
           </a:p>
         </p:txBody>
@@ -11347,288 +11840,43 @@
         </p:nvSpPr>
         <p:spPr>
           <a:xfrm>
-            <a:off x="530352" y="2249424"/>
-            <a:ext cx="5394960" cy="274320"/>
-          </a:xfrm>
-          <a:prstGeom prst="rect">
-            <a:avLst/>
-          </a:prstGeom>
-          <a:noFill/>
-        </p:spPr>
-        <p:txBody>
-          <a:bodyPr wrap="square">
-            <a:spAutoFit/>
-          </a:bodyPr>
-          <a:lstStyle/>
-          <a:p>
-            <a:pPr algn="l"/>
-            <a:r>
-              <a:rPr sz="1100" b="0" i="0">
-                <a:solidFill>
-                  <a:srgbClr val="4A4035"/>
-                </a:solidFill>
-                <a:latin typeface="Inter"/>
-              </a:rPr>
-              <a:t>✅  Specs verified</a:t>
-            </a:r>
-          </a:p>
-        </p:txBody>
-      </p:sp>
-      <p:sp>
-        <p:nvSpPr>
-          <p:cNvPr id="11" name="TextBox 10"/>
-          <p:cNvSpPr txBox="1"/>
-          <p:nvPr/>
-        </p:nvSpPr>
-        <p:spPr>
-          <a:xfrm>
-            <a:off x="530352" y="2532888"/>
-            <a:ext cx="5394960" cy="274320"/>
-          </a:xfrm>
-          <a:prstGeom prst="rect">
-            <a:avLst/>
-          </a:prstGeom>
-          <a:noFill/>
-        </p:spPr>
-        <p:txBody>
-          <a:bodyPr wrap="square">
-            <a:spAutoFit/>
-          </a:bodyPr>
-          <a:lstStyle/>
-          <a:p>
-            <a:pPr algn="l"/>
-            <a:r>
-              <a:rPr sz="1100" b="0" i="0">
-                <a:solidFill>
-                  <a:srgbClr val="4A4035"/>
-                </a:solidFill>
-                <a:latin typeface="Inter"/>
-              </a:rPr>
-              <a:t>✅  ESP8266 PWM firmware written</a:t>
-            </a:r>
-          </a:p>
-        </p:txBody>
-      </p:sp>
-      <p:sp>
-        <p:nvSpPr>
-          <p:cNvPr id="12" name="TextBox 11"/>
-          <p:cNvSpPr txBox="1"/>
-          <p:nvPr/>
-        </p:nvSpPr>
-        <p:spPr>
-          <a:xfrm>
-            <a:off x="530352" y="2816352"/>
-            <a:ext cx="5394960" cy="274320"/>
-          </a:xfrm>
-          <a:prstGeom prst="rect">
-            <a:avLst/>
-          </a:prstGeom>
-          <a:noFill/>
-        </p:spPr>
-        <p:txBody>
-          <a:bodyPr wrap="square">
-            <a:spAutoFit/>
-          </a:bodyPr>
-          <a:lstStyle/>
-          <a:p>
-            <a:pPr algn="l"/>
-            <a:r>
-              <a:rPr sz="1100" b="0" i="0">
-                <a:solidFill>
-                  <a:srgbClr val="4A4035"/>
-                </a:solidFill>
-                <a:latin typeface="Inter"/>
-              </a:rPr>
-              <a:t>✅  Individual servo response tested</a:t>
-            </a:r>
-          </a:p>
-        </p:txBody>
-      </p:sp>
-      <p:sp>
-        <p:nvSpPr>
-          <p:cNvPr id="13" name="TextBox 12"/>
-          <p:cNvSpPr txBox="1"/>
-          <p:nvPr/>
-        </p:nvSpPr>
-        <p:spPr>
-          <a:xfrm>
-            <a:off x="530352" y="3145536"/>
-            <a:ext cx="5394960" cy="228600"/>
-          </a:xfrm>
-          <a:prstGeom prst="rect">
-            <a:avLst/>
-          </a:prstGeom>
-          <a:noFill/>
-        </p:spPr>
-        <p:txBody>
-          <a:bodyPr wrap="square">
-            <a:spAutoFit/>
-          </a:bodyPr>
-          <a:lstStyle/>
-          <a:p>
-            <a:pPr algn="l"/>
-            <a:r>
-              <a:rPr sz="900" b="1" i="0">
-                <a:solidFill>
-                  <a:srgbClr val="8A7D6E"/>
-                </a:solidFill>
-                <a:latin typeface="Inter"/>
-              </a:rPr>
-              <a:t>PENDING</a:t>
-            </a:r>
-          </a:p>
-        </p:txBody>
-      </p:sp>
-      <p:sp>
-        <p:nvSpPr>
-          <p:cNvPr id="14" name="TextBox 13"/>
-          <p:cNvSpPr txBox="1"/>
-          <p:nvPr/>
-        </p:nvSpPr>
-        <p:spPr>
-          <a:xfrm>
-            <a:off x="530352" y="3374136"/>
-            <a:ext cx="5394960" cy="274320"/>
-          </a:xfrm>
-          <a:prstGeom prst="rect">
-            <a:avLst/>
-          </a:prstGeom>
-          <a:noFill/>
-        </p:spPr>
-        <p:txBody>
-          <a:bodyPr wrap="square">
-            <a:spAutoFit/>
-          </a:bodyPr>
-          <a:lstStyle/>
-          <a:p>
-            <a:pPr algn="l"/>
-            <a:r>
-              <a:rPr sz="1100" b="0" i="0">
-                <a:solidFill>
-                  <a:srgbClr val="8A7D6E"/>
-                </a:solidFill>
-                <a:latin typeface="Inter"/>
-              </a:rPr>
-              <a:t>⏳  Full arm assembly &amp; wiring</a:t>
-            </a:r>
-          </a:p>
-        </p:txBody>
-      </p:sp>
-      <p:sp>
-        <p:nvSpPr>
-          <p:cNvPr id="15" name="TextBox 14"/>
-          <p:cNvSpPr txBox="1"/>
-          <p:nvPr/>
-        </p:nvSpPr>
-        <p:spPr>
-          <a:xfrm>
-            <a:off x="530352" y="3657600"/>
-            <a:ext cx="5394960" cy="274320"/>
-          </a:xfrm>
-          <a:prstGeom prst="rect">
-            <a:avLst/>
-          </a:prstGeom>
-          <a:noFill/>
-        </p:spPr>
-        <p:txBody>
-          <a:bodyPr wrap="square">
-            <a:spAutoFit/>
-          </a:bodyPr>
-          <a:lstStyle/>
-          <a:p>
-            <a:pPr algn="l"/>
-            <a:r>
-              <a:rPr sz="1100" b="0" i="0">
-                <a:solidFill>
-                  <a:srgbClr val="8A7D6E"/>
-                </a:solidFill>
-                <a:latin typeface="Inter"/>
-              </a:rPr>
-              <a:t>⏳  Multi-servo coordinated control</a:t>
-            </a:r>
-          </a:p>
-        </p:txBody>
-      </p:sp>
-      <p:sp>
-        <p:nvSpPr>
-          <p:cNvPr id="16" name="TextBox 15"/>
-          <p:cNvSpPr txBox="1"/>
-          <p:nvPr/>
-        </p:nvSpPr>
-        <p:spPr>
-          <a:xfrm>
-            <a:off x="530352" y="3941064"/>
-            <a:ext cx="5394960" cy="274320"/>
-          </a:xfrm>
-          <a:prstGeom prst="rect">
-            <a:avLst/>
-          </a:prstGeom>
-          <a:noFill/>
-        </p:spPr>
-        <p:txBody>
-          <a:bodyPr wrap="square">
-            <a:spAutoFit/>
-          </a:bodyPr>
-          <a:lstStyle/>
-          <a:p>
-            <a:pPr algn="l"/>
-            <a:r>
-              <a:rPr sz="1100" b="0" i="0">
-                <a:solidFill>
-                  <a:srgbClr val="8A7D6E"/>
-                </a:solidFill>
-                <a:latin typeface="Inter"/>
-              </a:rPr>
-              <a:t>⏳  ROS2 ↔ ESP8266 serial bridge</a:t>
-            </a:r>
-          </a:p>
-        </p:txBody>
-      </p:sp>
-      <p:sp>
-        <p:nvSpPr>
-          <p:cNvPr id="17" name="TextBox 16"/>
-          <p:cNvSpPr txBox="1"/>
-          <p:nvPr/>
-        </p:nvSpPr>
-        <p:spPr>
-          <a:xfrm>
-            <a:off x="530352" y="4224528"/>
-            <a:ext cx="5394960" cy="274320"/>
-          </a:xfrm>
-          <a:prstGeom prst="rect">
-            <a:avLst/>
-          </a:prstGeom>
-          <a:noFill/>
-        </p:spPr>
-        <p:txBody>
-          <a:bodyPr wrap="square">
-            <a:spAutoFit/>
-          </a:bodyPr>
-          <a:lstStyle/>
-          <a:p>
-            <a:pPr algn="l"/>
-            <a:r>
-              <a:rPr sz="1100" b="0" i="0">
-                <a:solidFill>
-                  <a:srgbClr val="8A7D6E"/>
-                </a:solidFill>
-                <a:latin typeface="Inter"/>
-              </a:rPr>
-              <a:t>⏳  IMU integration</a:t>
-            </a:r>
-          </a:p>
-        </p:txBody>
-      </p:sp>
-      <p:sp>
-        <p:nvSpPr>
-          <p:cNvPr id="18" name="Rectangle 17"/>
+            <a:off x="502920" y="3566160"/>
+            <a:ext cx="2834640" cy="1097280"/>
+          </a:xfrm>
+          <a:prstGeom prst="rect">
+            <a:avLst/>
+          </a:prstGeom>
+          <a:noFill/>
+        </p:spPr>
+        <p:txBody>
+          <a:bodyPr wrap="square">
+            <a:spAutoFit/>
+          </a:bodyPr>
+          <a:lstStyle/>
+          <a:p>
+            <a:pPr algn="l"/>
+            <a:r>
+              <a:rPr sz="1000" b="0" i="0">
+                <a:solidFill>
+                  <a:srgbClr val="2D6A4F"/>
+                </a:solidFill>
+                <a:latin typeface="Inter"/>
+              </a:rPr>
+              <a:t>Individual servo control functional. Multi-servo coordination and ROS2–ESP8266 bridge are the next steps.</a:t>
+            </a:r>
+          </a:p>
+        </p:txBody>
+      </p:sp>
+      <p:sp>
+        <p:nvSpPr>
+          <p:cNvPr id="11" name="Rectangle 10"/>
           <p:cNvSpPr/>
           <p:nvPr/>
         </p:nvSpPr>
         <p:spPr>
           <a:xfrm>
-            <a:off x="6355080" y="1280160"/>
-            <a:ext cx="5715000" cy="4251960"/>
+            <a:off x="3657600" y="1234440"/>
+            <a:ext cx="8229600" cy="1188720"/>
           </a:xfrm>
           <a:prstGeom prst="rect">
             <a:avLst/>
@@ -11666,36 +11914,301 @@
       </p:sp>
       <p:sp>
         <p:nvSpPr>
-          <p:cNvPr id="19" name="TextBox 18"/>
-          <p:cNvSpPr txBox="1"/>
-          <p:nvPr/>
-        </p:nvSpPr>
-        <p:spPr>
-          <a:xfrm>
-            <a:off x="6519672" y="1371600"/>
-            <a:ext cx="5394960" cy="320040"/>
-          </a:xfrm>
-          <a:prstGeom prst="rect">
-            <a:avLst/>
-          </a:prstGeom>
-          <a:noFill/>
-        </p:spPr>
-        <p:txBody>
-          <a:bodyPr wrap="square">
-            <a:spAutoFit/>
-          </a:bodyPr>
-          <a:lstStyle/>
-          <a:p>
-            <a:pPr algn="l"/>
-            <a:r>
-              <a:rPr sz="1400" b="1" i="0">
+          <p:cNvPr id="12" name="TextBox 11"/>
+          <p:cNvSpPr txBox="1"/>
+          <p:nvPr/>
+        </p:nvSpPr>
+        <p:spPr>
+          <a:xfrm>
+            <a:off x="3794760" y="1344168"/>
+            <a:ext cx="457200" cy="1078992"/>
+          </a:xfrm>
+          <a:prstGeom prst="rect">
+            <a:avLst/>
+          </a:prstGeom>
+          <a:noFill/>
+        </p:spPr>
+        <p:txBody>
+          <a:bodyPr wrap="square">
+            <a:spAutoFit/>
+          </a:bodyPr>
+          <a:lstStyle/>
+          <a:p>
+            <a:pPr algn="l"/>
+            <a:r>
+              <a:rPr sz="900" b="1" i="0">
                 <a:solidFill>
                   <a:srgbClr val="1A6B8A"/>
                 </a:solidFill>
                 <a:latin typeface="Inter"/>
               </a:rPr>
-              <a:t>Software Track</a:t>
-            </a:r>
+              <a:t>01</a:t>
+            </a:r>
+          </a:p>
+        </p:txBody>
+      </p:sp>
+      <p:sp>
+        <p:nvSpPr>
+          <p:cNvPr id="13" name="TextBox 12"/>
+          <p:cNvSpPr txBox="1"/>
+          <p:nvPr/>
+        </p:nvSpPr>
+        <p:spPr>
+          <a:xfrm>
+            <a:off x="4297680" y="1325880"/>
+            <a:ext cx="7452360" cy="256032"/>
+          </a:xfrm>
+          <a:prstGeom prst="rect">
+            <a:avLst/>
+          </a:prstGeom>
+          <a:noFill/>
+        </p:spPr>
+        <p:txBody>
+          <a:bodyPr wrap="square">
+            <a:spAutoFit/>
+          </a:bodyPr>
+          <a:lstStyle/>
+          <a:p>
+            <a:pPr algn="l"/>
+            <a:r>
+              <a:rPr sz="1200" b="1" i="0">
+                <a:solidFill>
+                  <a:srgbClr val="1C1A16"/>
+                </a:solidFill>
+                <a:latin typeface="Inter"/>
+              </a:rPr>
+              <a:t>ESP8266 PWM Control</a:t>
+            </a:r>
+          </a:p>
+        </p:txBody>
+      </p:sp>
+      <p:sp>
+        <p:nvSpPr>
+          <p:cNvPr id="14" name="TextBox 13"/>
+          <p:cNvSpPr txBox="1"/>
+          <p:nvPr/>
+        </p:nvSpPr>
+        <p:spPr>
+          <a:xfrm>
+            <a:off x="4297680" y="1581912"/>
+            <a:ext cx="7452360" cy="804672"/>
+          </a:xfrm>
+          <a:prstGeom prst="rect">
+            <a:avLst/>
+          </a:prstGeom>
+          <a:noFill/>
+        </p:spPr>
+        <p:txBody>
+          <a:bodyPr wrap="square">
+            <a:spAutoFit/>
+          </a:bodyPr>
+          <a:lstStyle/>
+          <a:p>
+            <a:pPr algn="l"/>
+            <a:r>
+              <a:rPr sz="1000" b="0" i="0">
+                <a:solidFill>
+                  <a:srgbClr val="8A7D6E"/>
+                </a:solidFill>
+                <a:latin typeface="Inter"/>
+              </a:rPr>
+              <a:t>ESP8266 NodeMCU selected for built-in Wi-Fi and PWM output. Will receive joint angle commands and translate them to PWM signals for all 6 MG996R servos.</a:t>
+            </a:r>
+          </a:p>
+        </p:txBody>
+      </p:sp>
+      <p:sp>
+        <p:nvSpPr>
+          <p:cNvPr id="15" name="Rectangle 14"/>
+          <p:cNvSpPr/>
+          <p:nvPr/>
+        </p:nvSpPr>
+        <p:spPr>
+          <a:xfrm>
+            <a:off x="3657600" y="2514600"/>
+            <a:ext cx="8229600" cy="1188720"/>
+          </a:xfrm>
+          <a:prstGeom prst="rect">
+            <a:avLst/>
+          </a:prstGeom>
+          <a:solidFill>
+            <a:srgbClr val="FFFFFF"/>
+          </a:solidFill>
+          <a:ln w="9525">
+            <a:solidFill>
+              <a:srgbClr val="CCC4B8"/>
+            </a:solidFill>
+          </a:ln>
+        </p:spPr>
+        <p:style>
+          <a:lnRef idx="1">
+            <a:schemeClr val="accent1"/>
+          </a:lnRef>
+          <a:fillRef idx="3">
+            <a:schemeClr val="accent1"/>
+          </a:fillRef>
+          <a:effectRef idx="2">
+            <a:schemeClr val="accent1"/>
+          </a:effectRef>
+          <a:fontRef idx="minor">
+            <a:schemeClr val="lt1"/>
+          </a:fontRef>
+        </p:style>
+        <p:txBody>
+          <a:bodyPr rtlCol="0" anchor="ctr"/>
+          <a:lstStyle/>
+          <a:p>
+            <a:pPr algn="ctr"/>
+          </a:p>
+        </p:txBody>
+      </p:sp>
+      <p:sp>
+        <p:nvSpPr>
+          <p:cNvPr id="16" name="TextBox 15"/>
+          <p:cNvSpPr txBox="1"/>
+          <p:nvPr/>
+        </p:nvSpPr>
+        <p:spPr>
+          <a:xfrm>
+            <a:off x="3794760" y="2624328"/>
+            <a:ext cx="457200" cy="1078992"/>
+          </a:xfrm>
+          <a:prstGeom prst="rect">
+            <a:avLst/>
+          </a:prstGeom>
+          <a:noFill/>
+        </p:spPr>
+        <p:txBody>
+          <a:bodyPr wrap="square">
+            <a:spAutoFit/>
+          </a:bodyPr>
+          <a:lstStyle/>
+          <a:p>
+            <a:pPr algn="l"/>
+            <a:r>
+              <a:rPr sz="900" b="1" i="0">
+                <a:solidFill>
+                  <a:srgbClr val="1A6B8A"/>
+                </a:solidFill>
+                <a:latin typeface="Inter"/>
+              </a:rPr>
+              <a:t>02</a:t>
+            </a:r>
+          </a:p>
+        </p:txBody>
+      </p:sp>
+      <p:sp>
+        <p:nvSpPr>
+          <p:cNvPr id="17" name="TextBox 16"/>
+          <p:cNvSpPr txBox="1"/>
+          <p:nvPr/>
+        </p:nvSpPr>
+        <p:spPr>
+          <a:xfrm>
+            <a:off x="4297680" y="2606040"/>
+            <a:ext cx="7452360" cy="256032"/>
+          </a:xfrm>
+          <a:prstGeom prst="rect">
+            <a:avLst/>
+          </a:prstGeom>
+          <a:noFill/>
+        </p:spPr>
+        <p:txBody>
+          <a:bodyPr wrap="square">
+            <a:spAutoFit/>
+          </a:bodyPr>
+          <a:lstStyle/>
+          <a:p>
+            <a:pPr algn="l"/>
+            <a:r>
+              <a:rPr sz="1200" b="1" i="0">
+                <a:solidFill>
+                  <a:srgbClr val="1C1A16"/>
+                </a:solidFill>
+                <a:latin typeface="Inter"/>
+              </a:rPr>
+              <a:t>Signal Generation</a:t>
+            </a:r>
+          </a:p>
+        </p:txBody>
+      </p:sp>
+      <p:sp>
+        <p:nvSpPr>
+          <p:cNvPr id="18" name="TextBox 17"/>
+          <p:cNvSpPr txBox="1"/>
+          <p:nvPr/>
+        </p:nvSpPr>
+        <p:spPr>
+          <a:xfrm>
+            <a:off x="4297680" y="2862072"/>
+            <a:ext cx="7452360" cy="804672"/>
+          </a:xfrm>
+          <a:prstGeom prst="rect">
+            <a:avLst/>
+          </a:prstGeom>
+          <a:noFill/>
+        </p:spPr>
+        <p:txBody>
+          <a:bodyPr wrap="square">
+            <a:spAutoFit/>
+          </a:bodyPr>
+          <a:lstStyle/>
+          <a:p>
+            <a:pPr algn="l"/>
+            <a:r>
+              <a:rPr sz="1000" b="0" i="0">
+                <a:solidFill>
+                  <a:srgbClr val="8A7D6E"/>
+                </a:solidFill>
+                <a:latin typeface="Inter"/>
+              </a:rPr>
+              <a:t>MG996R servos need 50 Hz PWM, 500–2500 µs pulse width for full motion range. Initial firmware maps angle → pulse width and generates signals on digital IO pins.</a:t>
+            </a:r>
+          </a:p>
+        </p:txBody>
+      </p:sp>
+      <p:sp>
+        <p:nvSpPr>
+          <p:cNvPr id="19" name="Rectangle 18"/>
+          <p:cNvSpPr/>
+          <p:nvPr/>
+        </p:nvSpPr>
+        <p:spPr>
+          <a:xfrm>
+            <a:off x="3657600" y="3794760"/>
+            <a:ext cx="8229600" cy="1188720"/>
+          </a:xfrm>
+          <a:prstGeom prst="rect">
+            <a:avLst/>
+          </a:prstGeom>
+          <a:solidFill>
+            <a:srgbClr val="FFFFFF"/>
+          </a:solidFill>
+          <a:ln w="9525">
+            <a:solidFill>
+              <a:srgbClr val="CCC4B8"/>
+            </a:solidFill>
+          </a:ln>
+        </p:spPr>
+        <p:style>
+          <a:lnRef idx="1">
+            <a:schemeClr val="accent1"/>
+          </a:lnRef>
+          <a:fillRef idx="3">
+            <a:schemeClr val="accent1"/>
+          </a:fillRef>
+          <a:effectRef idx="2">
+            <a:schemeClr val="accent1"/>
+          </a:effectRef>
+          <a:fontRef idx="minor">
+            <a:schemeClr val="lt1"/>
+          </a:fontRef>
+        </p:style>
+        <p:txBody>
+          <a:bodyPr rtlCol="0" anchor="ctr"/>
+          <a:lstStyle/>
+          <a:p>
+            <a:pPr algn="ctr"/>
           </a:p>
         </p:txBody>
       </p:sp>
@@ -11707,8 +12220,8 @@
         </p:nvSpPr>
         <p:spPr>
           <a:xfrm>
-            <a:off x="6519672" y="1737360"/>
-            <a:ext cx="5394960" cy="228600"/>
+            <a:off x="3794760" y="3904488"/>
+            <a:ext cx="457200" cy="1078992"/>
           </a:xfrm>
           <a:prstGeom prst="rect">
             <a:avLst/>
@@ -11725,396 +12238,81 @@
             <a:r>
               <a:rPr sz="900" b="1" i="0">
                 <a:solidFill>
+                  <a:srgbClr val="1A6B8A"/>
+                </a:solidFill>
+                <a:latin typeface="Inter"/>
+              </a:rPr>
+              <a:t>03</a:t>
+            </a:r>
+          </a:p>
+        </p:txBody>
+      </p:sp>
+      <p:sp>
+        <p:nvSpPr>
+          <p:cNvPr id="21" name="TextBox 20"/>
+          <p:cNvSpPr txBox="1"/>
+          <p:nvPr/>
+        </p:nvSpPr>
+        <p:spPr>
+          <a:xfrm>
+            <a:off x="4297680" y="3886200"/>
+            <a:ext cx="7452360" cy="256032"/>
+          </a:xfrm>
+          <a:prstGeom prst="rect">
+            <a:avLst/>
+          </a:prstGeom>
+          <a:noFill/>
+        </p:spPr>
+        <p:txBody>
+          <a:bodyPr wrap="square">
+            <a:spAutoFit/>
+          </a:bodyPr>
+          <a:lstStyle/>
+          <a:p>
+            <a:pPr algn="l"/>
+            <a:r>
+              <a:rPr sz="1200" b="1" i="0">
+                <a:solidFill>
+                  <a:srgbClr val="1C1A16"/>
+                </a:solidFill>
+                <a:latin typeface="Inter"/>
+              </a:rPr>
+              <a:t>Initial Tests</a:t>
+            </a:r>
+          </a:p>
+        </p:txBody>
+      </p:sp>
+      <p:sp>
+        <p:nvSpPr>
+          <p:cNvPr id="22" name="TextBox 21"/>
+          <p:cNvSpPr txBox="1"/>
+          <p:nvPr/>
+        </p:nvSpPr>
+        <p:spPr>
+          <a:xfrm>
+            <a:off x="4297680" y="4142232"/>
+            <a:ext cx="7452360" cy="804672"/>
+          </a:xfrm>
+          <a:prstGeom prst="rect">
+            <a:avLst/>
+          </a:prstGeom>
+          <a:noFill/>
+        </p:spPr>
+        <p:txBody>
+          <a:bodyPr wrap="square">
+            <a:spAutoFit/>
+          </a:bodyPr>
+          <a:lstStyle/>
+          <a:p>
+            <a:pPr algn="l"/>
+            <a:r>
+              <a:rPr sz="1000" b="0" i="0">
+                <a:solidFill>
                   <a:srgbClr val="8A7D6E"/>
                 </a:solidFill>
                 <a:latin typeface="Inter"/>
               </a:rPr>
-              <a:t>COMPLETED</a:t>
-            </a:r>
-          </a:p>
-        </p:txBody>
-      </p:sp>
-      <p:sp>
-        <p:nvSpPr>
-          <p:cNvPr id="21" name="TextBox 20"/>
-          <p:cNvSpPr txBox="1"/>
-          <p:nvPr/>
-        </p:nvSpPr>
-        <p:spPr>
-          <a:xfrm>
-            <a:off x="6519672" y="1965960"/>
-            <a:ext cx="5394960" cy="274320"/>
-          </a:xfrm>
-          <a:prstGeom prst="rect">
-            <a:avLst/>
-          </a:prstGeom>
-          <a:noFill/>
-        </p:spPr>
-        <p:txBody>
-          <a:bodyPr wrap="square">
-            <a:spAutoFit/>
-          </a:bodyPr>
-          <a:lstStyle/>
-          <a:p>
-            <a:pPr algn="l"/>
-            <a:r>
-              <a:rPr sz="1100" b="0" i="0">
-                <a:solidFill>
-                  <a:srgbClr val="4A4035"/>
-                </a:solidFill>
-                <a:latin typeface="Inter"/>
-              </a:rPr>
-              <a:t>✅  URDF created after iterative adaptation</a:t>
-            </a:r>
-          </a:p>
-        </p:txBody>
-      </p:sp>
-      <p:sp>
-        <p:nvSpPr>
-          <p:cNvPr id="22" name="TextBox 21"/>
-          <p:cNvSpPr txBox="1"/>
-          <p:nvPr/>
-        </p:nvSpPr>
-        <p:spPr>
-          <a:xfrm>
-            <a:off x="6519672" y="2249424"/>
-            <a:ext cx="5394960" cy="274320"/>
-          </a:xfrm>
-          <a:prstGeom prst="rect">
-            <a:avLst/>
-          </a:prstGeom>
-          <a:noFill/>
-        </p:spPr>
-        <p:txBody>
-          <a:bodyPr wrap="square">
-            <a:spAutoFit/>
-          </a:bodyPr>
-          <a:lstStyle/>
-          <a:p>
-            <a:pPr algn="l"/>
-            <a:r>
-              <a:rPr sz="1100" b="0" i="0">
-                <a:solidFill>
-                  <a:srgbClr val="4A4035"/>
-                </a:solidFill>
-                <a:latin typeface="Inter"/>
-              </a:rPr>
-              <a:t>✅  Arm visualised in RViz</a:t>
-            </a:r>
-          </a:p>
-        </p:txBody>
-      </p:sp>
-      <p:sp>
-        <p:nvSpPr>
-          <p:cNvPr id="23" name="TextBox 22"/>
-          <p:cNvSpPr txBox="1"/>
-          <p:nvPr/>
-        </p:nvSpPr>
-        <p:spPr>
-          <a:xfrm>
-            <a:off x="6519672" y="2532888"/>
-            <a:ext cx="5394960" cy="274320"/>
-          </a:xfrm>
-          <a:prstGeom prst="rect">
-            <a:avLst/>
-          </a:prstGeom>
-          <a:noFill/>
-        </p:spPr>
-        <p:txBody>
-          <a:bodyPr wrap="square">
-            <a:spAutoFit/>
-          </a:bodyPr>
-          <a:lstStyle/>
-          <a:p>
-            <a:pPr algn="l"/>
-            <a:r>
-              <a:rPr sz="1100" b="0" i="0">
-                <a:solidFill>
-                  <a:srgbClr val="4A4035"/>
-                </a:solidFill>
-                <a:latin typeface="Inter"/>
-              </a:rPr>
-              <a:t>✅  Gazebo simulation running</a:t>
-            </a:r>
-          </a:p>
-        </p:txBody>
-      </p:sp>
-      <p:sp>
-        <p:nvSpPr>
-          <p:cNvPr id="24" name="TextBox 23"/>
-          <p:cNvSpPr txBox="1"/>
-          <p:nvPr/>
-        </p:nvSpPr>
-        <p:spPr>
-          <a:xfrm>
-            <a:off x="6519672" y="2816352"/>
-            <a:ext cx="5394960" cy="274320"/>
-          </a:xfrm>
-          <a:prstGeom prst="rect">
-            <a:avLst/>
-          </a:prstGeom>
-          <a:noFill/>
-        </p:spPr>
-        <p:txBody>
-          <a:bodyPr wrap="square">
-            <a:spAutoFit/>
-          </a:bodyPr>
-          <a:lstStyle/>
-          <a:p>
-            <a:pPr algn="l"/>
-            <a:r>
-              <a:rPr sz="1100" b="0" i="0">
-                <a:solidFill>
-                  <a:srgbClr val="4A4035"/>
-                </a:solidFill>
-                <a:latin typeface="Inter"/>
-              </a:rPr>
-              <a:t>✅  ros2_control JTC active</a:t>
-            </a:r>
-          </a:p>
-        </p:txBody>
-      </p:sp>
-      <p:sp>
-        <p:nvSpPr>
-          <p:cNvPr id="25" name="TextBox 24"/>
-          <p:cNvSpPr txBox="1"/>
-          <p:nvPr/>
-        </p:nvSpPr>
-        <p:spPr>
-          <a:xfrm>
-            <a:off x="6519672" y="3099816"/>
-            <a:ext cx="5394960" cy="274320"/>
-          </a:xfrm>
-          <a:prstGeom prst="rect">
-            <a:avLst/>
-          </a:prstGeom>
-          <a:noFill/>
-        </p:spPr>
-        <p:txBody>
-          <a:bodyPr wrap="square">
-            <a:spAutoFit/>
-          </a:bodyPr>
-          <a:lstStyle/>
-          <a:p>
-            <a:pPr algn="l"/>
-            <a:r>
-              <a:rPr sz="1100" b="0" i="0">
-                <a:solidFill>
-                  <a:srgbClr val="4A4035"/>
-                </a:solidFill>
-                <a:latin typeface="Inter"/>
-              </a:rPr>
-              <a:t>✅  YOLOv8 detection working in isolation</a:t>
-            </a:r>
-          </a:p>
-        </p:txBody>
-      </p:sp>
-      <p:sp>
-        <p:nvSpPr>
-          <p:cNvPr id="26" name="TextBox 25"/>
-          <p:cNvSpPr txBox="1"/>
-          <p:nvPr/>
-        </p:nvSpPr>
-        <p:spPr>
-          <a:xfrm>
-            <a:off x="6519672" y="3429000"/>
-            <a:ext cx="5394960" cy="228600"/>
-          </a:xfrm>
-          <a:prstGeom prst="rect">
-            <a:avLst/>
-          </a:prstGeom>
-          <a:noFill/>
-        </p:spPr>
-        <p:txBody>
-          <a:bodyPr wrap="square">
-            <a:spAutoFit/>
-          </a:bodyPr>
-          <a:lstStyle/>
-          <a:p>
-            <a:pPr algn="l"/>
-            <a:r>
-              <a:rPr sz="900" b="1" i="0">
-                <a:solidFill>
-                  <a:srgbClr val="8A7D6E"/>
-                </a:solidFill>
-                <a:latin typeface="Inter"/>
-              </a:rPr>
-              <a:t>PENDING</a:t>
-            </a:r>
-          </a:p>
-        </p:txBody>
-      </p:sp>
-      <p:sp>
-        <p:nvSpPr>
-          <p:cNvPr id="27" name="TextBox 26"/>
-          <p:cNvSpPr txBox="1"/>
-          <p:nvPr/>
-        </p:nvSpPr>
-        <p:spPr>
-          <a:xfrm>
-            <a:off x="6519672" y="3657600"/>
-            <a:ext cx="5394960" cy="274320"/>
-          </a:xfrm>
-          <a:prstGeom prst="rect">
-            <a:avLst/>
-          </a:prstGeom>
-          <a:noFill/>
-        </p:spPr>
-        <p:txBody>
-          <a:bodyPr wrap="square">
-            <a:spAutoFit/>
-          </a:bodyPr>
-          <a:lstStyle/>
-          <a:p>
-            <a:pPr algn="l"/>
-            <a:r>
-              <a:rPr sz="1100" b="0" i="0">
-                <a:solidFill>
-                  <a:srgbClr val="8A7D6E"/>
-                </a:solidFill>
-                <a:latin typeface="Inter"/>
-              </a:rPr>
-              <a:t>⏳  YOLO → ROS2 command pipeline</a:t>
-            </a:r>
-          </a:p>
-        </p:txBody>
-      </p:sp>
-      <p:sp>
-        <p:nvSpPr>
-          <p:cNvPr id="28" name="TextBox 27"/>
-          <p:cNvSpPr txBox="1"/>
-          <p:nvPr/>
-        </p:nvSpPr>
-        <p:spPr>
-          <a:xfrm>
-            <a:off x="6519672" y="3941064"/>
-            <a:ext cx="5394960" cy="274320"/>
-          </a:xfrm>
-          <a:prstGeom prst="rect">
-            <a:avLst/>
-          </a:prstGeom>
-          <a:noFill/>
-        </p:spPr>
-        <p:txBody>
-          <a:bodyPr wrap="square">
-            <a:spAutoFit/>
-          </a:bodyPr>
-          <a:lstStyle/>
-          <a:p>
-            <a:pPr algn="l"/>
-            <a:r>
-              <a:rPr sz="1100" b="0" i="0">
-                <a:solidFill>
-                  <a:srgbClr val="8A7D6E"/>
-                </a:solidFill>
-                <a:latin typeface="Inter"/>
-              </a:rPr>
-              <a:t>⏳  Camera-to-workspace calibration</a:t>
-            </a:r>
-          </a:p>
-        </p:txBody>
-      </p:sp>
-      <p:sp>
-        <p:nvSpPr>
-          <p:cNvPr id="29" name="TextBox 28"/>
-          <p:cNvSpPr txBox="1"/>
-          <p:nvPr/>
-        </p:nvSpPr>
-        <p:spPr>
-          <a:xfrm>
-            <a:off x="6519672" y="4224528"/>
-            <a:ext cx="5394960" cy="274320"/>
-          </a:xfrm>
-          <a:prstGeom prst="rect">
-            <a:avLst/>
-          </a:prstGeom>
-          <a:noFill/>
-        </p:spPr>
-        <p:txBody>
-          <a:bodyPr wrap="square">
-            <a:spAutoFit/>
-          </a:bodyPr>
-          <a:lstStyle/>
-          <a:p>
-            <a:pPr algn="l"/>
-            <a:r>
-              <a:rPr sz="1100" b="0" i="0">
-                <a:solidFill>
-                  <a:srgbClr val="8A7D6E"/>
-                </a:solidFill>
-                <a:latin typeface="Inter"/>
-              </a:rPr>
-              <a:t>⏳  MoveIt2 motion planning</a:t>
-            </a:r>
-          </a:p>
-        </p:txBody>
-      </p:sp>
-      <p:sp>
-        <p:nvSpPr>
-          <p:cNvPr id="30" name="TextBox 29"/>
-          <p:cNvSpPr txBox="1"/>
-          <p:nvPr/>
-        </p:nvSpPr>
-        <p:spPr>
-          <a:xfrm>
-            <a:off x="6519672" y="4507992"/>
-            <a:ext cx="5394960" cy="274320"/>
-          </a:xfrm>
-          <a:prstGeom prst="rect">
-            <a:avLst/>
-          </a:prstGeom>
-          <a:noFill/>
-        </p:spPr>
-        <p:txBody>
-          <a:bodyPr wrap="square">
-            <a:spAutoFit/>
-          </a:bodyPr>
-          <a:lstStyle/>
-          <a:p>
-            <a:pPr algn="l"/>
-            <a:r>
-              <a:rPr sz="1100" b="0" i="0">
-                <a:solidFill>
-                  <a:srgbClr val="8A7D6E"/>
-                </a:solidFill>
-                <a:latin typeface="Inter"/>
-              </a:rPr>
-              <a:t>⏳  Autonomous mode logic</a:t>
-            </a:r>
-          </a:p>
-        </p:txBody>
-      </p:sp>
-      <p:sp>
-        <p:nvSpPr>
-          <p:cNvPr id="31" name="TextBox 30"/>
-          <p:cNvSpPr txBox="1"/>
-          <p:nvPr/>
-        </p:nvSpPr>
-        <p:spPr>
-          <a:xfrm>
-            <a:off x="365760" y="5669280"/>
-            <a:ext cx="11521440" cy="411480"/>
-          </a:xfrm>
-          <a:prstGeom prst="rect">
-            <a:avLst/>
-          </a:prstGeom>
-          <a:noFill/>
-        </p:spPr>
-        <p:txBody>
-          <a:bodyPr wrap="square">
-            <a:spAutoFit/>
-          </a:bodyPr>
-          <a:lstStyle/>
-          <a:p>
-            <a:pPr algn="ctr"/>
-            <a:r>
-              <a:rPr sz="1100" b="0" i="1">
-                <a:solidFill>
-                  <a:srgbClr val="D2691E"/>
-                </a:solidFill>
-                <a:latin typeface="Inter"/>
-              </a:rPr>
-              <a:t>Key Challenge: The most significant obstacle was the absence of a ready-made URDF for the purchased arm kit, requiring multiple iterative reconstruction attempts before a working simulation model was produced.</a:t>
+              <a:t>Preliminary tests on individual servo motors complete. Smooth angle transitions with configurable speed implemented to prevent jerky motion.</a:t>
             </a:r>
           </a:p>
         </p:txBody>
